--- a/fasano-mamucabo.pptx
+++ b/fasano-mamucabo.pptx
@@ -7,7 +7,7 @@
   <p:sldIdLst>
     <p:sldId id="256" r:id="rId7"/>
   </p:sldIdLst>
-  <p:sldSz cx="7560072" cy="10692792" type="screen4x3"/>
+  <p:sldSz cx="7560000" cy="10692000" type="screen4x3"/>
   <p:notesSz cx="6858000" cy="9144000"/>
   <p:defaultTextStyle>
     <a:defPPr>
@@ -3097,18 +3097,16 @@
         <p:spPr>
           <a:xfrm>
             <a:off x="0" y="0"/>
-            <a:ext cx="7560000" cy="792000"/>
+            <a:ext cx="7560000" cy="10692000"/>
           </a:xfrm>
           <a:prstGeom prst="rect">
             <a:avLst/>
           </a:prstGeom>
           <a:solidFill>
-            <a:srgbClr val="201A47"/>
+            <a:srgbClr val="F4F4F7"/>
           </a:solidFill>
           <a:ln>
-            <a:solidFill>
-              <a:srgbClr val="201A47"/>
-            </a:solidFill>
+            <a:noFill/>
           </a:ln>
         </p:spPr>
         <p:style>
@@ -3133,9 +3131,52 @@
           </a:p>
         </p:txBody>
       </p:sp>
+      <p:sp>
+        <p:nvSpPr>
+          <p:cNvPr id="3" name="Rectangle 2"/>
+          <p:cNvSpPr/>
+          <p:nvPr/>
+        </p:nvSpPr>
+        <p:spPr>
+          <a:xfrm>
+            <a:off x="0" y="0"/>
+            <a:ext cx="7560000" cy="720000"/>
+          </a:xfrm>
+          <a:prstGeom prst="rect">
+            <a:avLst/>
+          </a:prstGeom>
+          <a:solidFill>
+            <a:srgbClr val="201A47"/>
+          </a:solidFill>
+          <a:ln>
+            <a:noFill/>
+          </a:ln>
+        </p:spPr>
+        <p:style>
+          <a:lnRef idx="1">
+            <a:schemeClr val="accent1"/>
+          </a:lnRef>
+          <a:fillRef idx="3">
+            <a:schemeClr val="accent1"/>
+          </a:fillRef>
+          <a:effectRef idx="2">
+            <a:schemeClr val="accent1"/>
+          </a:effectRef>
+          <a:fontRef idx="minor">
+            <a:schemeClr val="lt1"/>
+          </a:fontRef>
+        </p:style>
+        <p:txBody>
+          <a:bodyPr rtlCol="0" anchor="ctr"/>
+          <a:lstStyle/>
+          <a:p>
+            <a:pPr algn="ctr"/>
+          </a:p>
+        </p:txBody>
+      </p:sp>
       <p:pic>
         <p:nvPicPr>
-          <p:cNvPr id="3" name="Picture 2" descr="logo_mb_ib_white.png"/>
+          <p:cNvPr id="4" name="Picture 3" descr="logo_mb_ib_white.png"/>
           <p:cNvPicPr>
             <a:picLocks noChangeAspect="1"/>
           </p:cNvPicPr>
@@ -3149,8 +3190,8 @@
         </p:blipFill>
         <p:spPr>
           <a:xfrm>
-            <a:off x="108000" y="72000"/>
-            <a:ext cx="900000" cy="648000"/>
+            <a:off x="144000" y="126000"/>
+            <a:ext cx="1008000" cy="468000"/>
           </a:xfrm>
           <a:prstGeom prst="rect">
             <a:avLst/>
@@ -3159,14 +3200,14 @@
       </p:pic>
       <p:sp>
         <p:nvSpPr>
-          <p:cNvPr id="4" name="TextBox 3"/>
+          <p:cNvPr id="5" name="TextBox 4"/>
           <p:cNvSpPr txBox="1"/>
           <p:nvPr/>
         </p:nvSpPr>
         <p:spPr>
           <a:xfrm>
-            <a:off x="1152000" y="72000"/>
-            <a:ext cx="4320000" cy="396000"/>
+            <a:off x="1296000" y="54000"/>
+            <a:ext cx="4680000" cy="720000"/>
           </a:xfrm>
           <a:prstGeom prst="rect">
             <a:avLst/>
@@ -3179,29 +3220,55 @@
           </a:bodyPr>
           <a:lstStyle/>
           <a:p>
-            <a:pPr algn="l"/>
-            <a:r>
-              <a:rPr sz="1800" b="1" i="0">
+            <a:pPr>
+              <a:spcBef>
+                <a:spcPts val="0"/>
+              </a:spcBef>
+              <a:spcAft>
+                <a:spcPts val="100"/>
+              </a:spcAft>
+            </a:pPr>
+            <a:r>
+              <a:rPr sz="1600" b="1">
                 <a:solidFill>
                   <a:srgbClr val="C8A96D"/>
                 </a:solidFill>
                 <a:latin typeface="Calibri"/>
               </a:rPr>
-              <a:t>FASANO MAMUCABO</a:t>
-            </a:r>
-          </a:p>
-        </p:txBody>
-      </p:sp>
-      <p:sp>
-        <p:nvSpPr>
-          <p:cNvPr id="5" name="TextBox 4"/>
+              <a:t>Fasano Mamucabo</a:t>
+            </a:r>
+          </a:p>
+          <a:p>
+            <a:pPr algn="l">
+              <a:spcBef>
+                <a:spcPts val="0"/>
+              </a:spcBef>
+              <a:spcAft>
+                <a:spcPts val="0"/>
+              </a:spcAft>
+            </a:pPr>
+            <a:r>
+              <a:rPr sz="650" b="0" i="0">
+                <a:solidFill>
+                  <a:srgbClr val="FFFFFF"/>
+                </a:solidFill>
+                <a:latin typeface="Calibri"/>
+              </a:rPr>
+              <a:t>Branded Residences &amp; Hotel · Overview de Investimento</a:t>
+            </a:r>
+          </a:p>
+        </p:txBody>
+      </p:sp>
+      <p:sp>
+        <p:nvSpPr>
+          <p:cNvPr id="6" name="TextBox 5"/>
           <p:cNvSpPr txBox="1"/>
           <p:nvPr/>
         </p:nvSpPr>
         <p:spPr>
           <a:xfrm>
-            <a:off x="1152000" y="468000"/>
-            <a:ext cx="4680000" cy="252000"/>
+            <a:off x="5580000" y="108000"/>
+            <a:ext cx="1800000" cy="720000"/>
           </a:xfrm>
           <a:prstGeom prst="rect">
             <a:avLst/>
@@ -3209,55 +3276,36 @@
           <a:noFill/>
         </p:spPr>
         <p:txBody>
-          <a:bodyPr wrap="square">
+          <a:bodyPr wrap="none">
             <a:spAutoFit/>
           </a:bodyPr>
           <a:lstStyle/>
           <a:p>
-            <a:pPr algn="l"/>
-            <a:r>
-              <a:rPr sz="800" b="0" i="0">
-                <a:solidFill>
-                  <a:srgbClr val="FFFFFF"/>
-                </a:solidFill>
-                <a:latin typeface="Calibri"/>
-              </a:rPr>
-              <a:t>Grupo Prima × Fasano | Oportunidade de Coinvestimento</a:t>
-            </a:r>
-          </a:p>
-        </p:txBody>
-      </p:sp>
-      <p:sp>
-        <p:nvSpPr>
-          <p:cNvPr id="6" name="TextBox 5"/>
-          <p:cNvSpPr txBox="1"/>
-          <p:nvPr/>
-        </p:nvSpPr>
-        <p:spPr>
-          <a:xfrm>
-            <a:off x="5760000" y="252000"/>
-            <a:ext cx="1692000" cy="288000"/>
-          </a:xfrm>
-          <a:prstGeom prst="rect">
-            <a:avLst/>
-          </a:prstGeom>
-          <a:noFill/>
-        </p:spPr>
-        <p:txBody>
-          <a:bodyPr wrap="square">
-            <a:spAutoFit/>
-          </a:bodyPr>
-          <a:lstStyle/>
+            <a:pPr algn="r">
+              <a:spcBef>
+                <a:spcPts val="0"/>
+              </a:spcBef>
+            </a:pPr>
+            <a:r>
+              <a:rPr sz="600" b="1">
+                <a:solidFill>
+                  <a:srgbClr val="C8A96D"/>
+                </a:solidFill>
+                <a:latin typeface="Calibri"/>
+              </a:rPr>
+              <a:t>CONFIDENCIAL</a:t>
+            </a:r>
+          </a:p>
           <a:p>
             <a:pPr algn="r"/>
             <a:r>
-              <a:rPr sz="700" b="1" i="0">
-                <a:solidFill>
-                  <a:srgbClr val="C8A96D"/>
-                </a:solidFill>
-                <a:latin typeface="Calibri"/>
-              </a:rPr>
-              <a:t>CONFIDENCIAL</a:t>
+              <a:rPr sz="600">
+                <a:solidFill>
+                  <a:srgbClr val="7F808F"/>
+                </a:solidFill>
+                <a:latin typeface="Calibri"/>
+              </a:rPr>
+              <a:t>Março 2026</a:t>
             </a:r>
           </a:p>
         </p:txBody>
@@ -3278,8 +3326,8 @@
         </p:blipFill>
         <p:spPr>
           <a:xfrm>
-            <a:off x="0" y="792000"/>
-            <a:ext cx="7560000" cy="1080000"/>
+            <a:off x="0" y="720000"/>
+            <a:ext cx="7560000" cy="1152000"/>
           </a:xfrm>
           <a:prstGeom prst="rect">
             <a:avLst/>
@@ -3294,19 +3342,17 @@
         </p:nvSpPr>
         <p:spPr>
           <a:xfrm>
-            <a:off x="0" y="1872000"/>
-            <a:ext cx="7560000" cy="504000"/>
+            <a:off x="0" y="720000"/>
+            <a:ext cx="4140000" cy="1152000"/>
           </a:xfrm>
           <a:prstGeom prst="rect">
             <a:avLst/>
           </a:prstGeom>
           <a:solidFill>
-            <a:srgbClr val="201A47"/>
+            <a:srgbClr val="141130"/>
           </a:solidFill>
           <a:ln>
-            <a:solidFill>
-              <a:srgbClr val="201A47"/>
-            </a:solidFill>
+            <a:noFill/>
           </a:ln>
         </p:spPr>
         <p:style>
@@ -3339,8 +3385,8 @@
         </p:nvSpPr>
         <p:spPr>
           <a:xfrm>
-            <a:off x="180000" y="1944000"/>
-            <a:ext cx="7200000" cy="432000"/>
+            <a:off x="180000" y="828000"/>
+            <a:ext cx="3888000" cy="972000"/>
           </a:xfrm>
           <a:prstGeom prst="rect">
             <a:avLst/>
@@ -3353,15 +3399,51 @@
           </a:bodyPr>
           <a:lstStyle/>
           <a:p>
-            <a:pPr algn="ctr"/>
-            <a:r>
-              <a:rPr sz="800" b="0" i="0">
+            <a:pPr>
+              <a:spcBef>
+                <a:spcPts val="0"/>
+              </a:spcBef>
+            </a:pPr>
+            <a:r>
+              <a:rPr sz="550">
+                <a:solidFill>
+                  <a:srgbClr val="C8A96D"/>
+                </a:solidFill>
+                <a:latin typeface="Calibri"/>
+              </a:rPr>
+              <a:t>Litoral Norte da Bahia · Costa dos Coqueiros · 108 km de Salvador</a:t>
+            </a:r>
+          </a:p>
+          <a:p>
+            <a:pPr>
+              <a:spcBef>
+                <a:spcPts val="300"/>
+              </a:spcBef>
+            </a:pPr>
+            <a:r>
+              <a:rPr sz="1300" b="1">
                 <a:solidFill>
                   <a:srgbClr val="FFFFFF"/>
                 </a:solidFill>
                 <a:latin typeface="Calibri"/>
               </a:rPr>
-              <a:t>Projeto residencial de ultra-luxo desenvolvido pelo Grupo Prima em parceria com a rede hoteleira Fasano, localizado em Mamucabo, litoral sul do Rio de Janeiro.</a:t>
+              <a:t>O maior destino turístico-imobiliário de luxo do Brasil</a:t>
+            </a:r>
+          </a:p>
+          <a:p>
+            <a:pPr>
+              <a:spcBef>
+                <a:spcPts val="300"/>
+              </a:spcBef>
+            </a:pPr>
+            <a:r>
+              <a:rPr sz="550">
+                <a:solidFill>
+                  <a:srgbClr val="E8E8F0"/>
+                </a:solidFill>
+                <a:latin typeface="Calibri"/>
+              </a:rPr>
+              <a:t>Complexo Fasano · Mamucabo · Esplanada, BA · Licença de Instalação Emitida</a:t>
             </a:r>
           </a:p>
         </p:txBody>
@@ -3374,18 +3456,18 @@
         </p:nvSpPr>
         <p:spPr>
           <a:xfrm>
-            <a:off x="0" y="2376000"/>
-            <a:ext cx="7560000" cy="7236000"/>
+            <a:off x="4176000" y="1548000"/>
+            <a:ext cx="1044000" cy="252000"/>
           </a:xfrm>
           <a:prstGeom prst="rect">
             <a:avLst/>
           </a:prstGeom>
           <a:solidFill>
-            <a:srgbClr val="1A1A2E"/>
+            <a:srgbClr val="201A47"/>
           </a:solidFill>
-          <a:ln>
+          <a:ln w="6350">
             <a:solidFill>
-              <a:srgbClr val="1A1A2E"/>
+              <a:srgbClr val="C8A96D"/>
             </a:solidFill>
           </a:ln>
         </p:spPr>
@@ -3413,22 +3495,59 @@
       </p:sp>
       <p:sp>
         <p:nvSpPr>
-          <p:cNvPr id="11" name="Rectangle 10"/>
+          <p:cNvPr id="11" name="TextBox 10"/>
+          <p:cNvSpPr txBox="1"/>
+          <p:nvPr/>
+        </p:nvSpPr>
+        <p:spPr>
+          <a:xfrm>
+            <a:off x="4212000" y="1584000"/>
+            <a:ext cx="972000" cy="216000"/>
+          </a:xfrm>
+          <a:prstGeom prst="rect">
+            <a:avLst/>
+          </a:prstGeom>
+          <a:noFill/>
+        </p:spPr>
+        <p:txBody>
+          <a:bodyPr wrap="none">
+            <a:spAutoFit/>
+          </a:bodyPr>
+          <a:lstStyle/>
+          <a:p>
+            <a:pPr algn="ctr"/>
+            <a:r>
+              <a:rPr sz="550" b="1">
+                <a:solidFill>
+                  <a:srgbClr val="C8A96D"/>
+                </a:solidFill>
+                <a:latin typeface="Calibri"/>
+              </a:rPr>
+              <a:t>IPCA + 12,5% a.a.</a:t>
+            </a:r>
+          </a:p>
+        </p:txBody>
+      </p:sp>
+      <p:sp>
+        <p:nvSpPr>
+          <p:cNvPr id="12" name="Rectangle 11"/>
           <p:cNvSpPr/>
           <p:nvPr/>
         </p:nvSpPr>
         <p:spPr>
           <a:xfrm>
-            <a:off x="2520000" y="2448000"/>
-            <a:ext cx="6350" cy="7092000"/>
-          </a:xfrm>
-          <a:prstGeom prst="rect">
-            <a:avLst/>
-          </a:prstGeom>
-          <a:noFill/>
+            <a:off x="5292000" y="1548000"/>
+            <a:ext cx="1044000" cy="252000"/>
+          </a:xfrm>
+          <a:prstGeom prst="rect">
+            <a:avLst/>
+          </a:prstGeom>
+          <a:solidFill>
+            <a:srgbClr val="201A47"/>
+          </a:solidFill>
           <a:ln w="6350">
             <a:solidFill>
-              <a:srgbClr val="887CD3"/>
+              <a:srgbClr val="C8A96D"/>
             </a:solidFill>
           </a:ln>
         </p:spPr>
@@ -3456,22 +3575,59 @@
       </p:sp>
       <p:sp>
         <p:nvSpPr>
-          <p:cNvPr id="12" name="Rectangle 11"/>
+          <p:cNvPr id="13" name="TextBox 12"/>
+          <p:cNvSpPr txBox="1"/>
+          <p:nvPr/>
+        </p:nvSpPr>
+        <p:spPr>
+          <a:xfrm>
+            <a:off x="5328000" y="1584000"/>
+            <a:ext cx="972000" cy="216000"/>
+          </a:xfrm>
+          <a:prstGeom prst="rect">
+            <a:avLst/>
+          </a:prstGeom>
+          <a:noFill/>
+        </p:spPr>
+        <p:txBody>
+          <a:bodyPr wrap="none">
+            <a:spAutoFit/>
+          </a:bodyPr>
+          <a:lstStyle/>
+          <a:p>
+            <a:pPr algn="ctr"/>
+            <a:r>
+              <a:rPr sz="550" b="1">
+                <a:solidFill>
+                  <a:srgbClr val="C8A96D"/>
+                </a:solidFill>
+                <a:latin typeface="Calibri"/>
+              </a:rPr>
+              <a:t>TIR 30,9%</a:t>
+            </a:r>
+          </a:p>
+        </p:txBody>
+      </p:sp>
+      <p:sp>
+        <p:nvSpPr>
+          <p:cNvPr id="14" name="Rectangle 13"/>
           <p:cNvSpPr/>
           <p:nvPr/>
         </p:nvSpPr>
         <p:spPr>
           <a:xfrm>
-            <a:off x="5040000" y="2448000"/>
-            <a:ext cx="6350" cy="7092000"/>
-          </a:xfrm>
-          <a:prstGeom prst="rect">
-            <a:avLst/>
-          </a:prstGeom>
-          <a:noFill/>
+            <a:off x="6408000" y="1548000"/>
+            <a:ext cx="1044000" cy="252000"/>
+          </a:xfrm>
+          <a:prstGeom prst="rect">
+            <a:avLst/>
+          </a:prstGeom>
+          <a:solidFill>
+            <a:srgbClr val="201A47"/>
+          </a:solidFill>
           <a:ln w="6350">
             <a:solidFill>
-              <a:srgbClr val="887CD3"/>
+              <a:srgbClr val="C8A96D"/>
             </a:solidFill>
           </a:ln>
         </p:spPr>
@@ -3499,14 +3655,92 @@
       </p:sp>
       <p:sp>
         <p:nvSpPr>
-          <p:cNvPr id="13" name="TextBox 12"/>
+          <p:cNvPr id="15" name="TextBox 14"/>
           <p:cNvSpPr txBox="1"/>
           <p:nvPr/>
         </p:nvSpPr>
         <p:spPr>
           <a:xfrm>
-            <a:off x="108000" y="2484000"/>
-            <a:ext cx="2358000" cy="180000"/>
+            <a:off x="6444000" y="1584000"/>
+            <a:ext cx="972000" cy="216000"/>
+          </a:xfrm>
+          <a:prstGeom prst="rect">
+            <a:avLst/>
+          </a:prstGeom>
+          <a:noFill/>
+        </p:spPr>
+        <p:txBody>
+          <a:bodyPr wrap="none">
+            <a:spAutoFit/>
+          </a:bodyPr>
+          <a:lstStyle/>
+          <a:p>
+            <a:pPr algn="ctr"/>
+            <a:r>
+              <a:rPr sz="550" b="1">
+                <a:solidFill>
+                  <a:srgbClr val="C8A96D"/>
+                </a:solidFill>
+                <a:latin typeface="Calibri"/>
+              </a:rPr>
+              <a:t>LI Emitida Jan/2024</a:t>
+            </a:r>
+          </a:p>
+        </p:txBody>
+      </p:sp>
+      <p:sp>
+        <p:nvSpPr>
+          <p:cNvPr id="16" name="Rectangle 15"/>
+          <p:cNvSpPr/>
+          <p:nvPr/>
+        </p:nvSpPr>
+        <p:spPr>
+          <a:xfrm>
+            <a:off x="0" y="1872000"/>
+            <a:ext cx="7560000" cy="504000"/>
+          </a:xfrm>
+          <a:prstGeom prst="rect">
+            <a:avLst/>
+          </a:prstGeom>
+          <a:solidFill>
+            <a:srgbClr val="18143A"/>
+          </a:solidFill>
+          <a:ln>
+            <a:noFill/>
+          </a:ln>
+        </p:spPr>
+        <p:style>
+          <a:lnRef idx="1">
+            <a:schemeClr val="accent1"/>
+          </a:lnRef>
+          <a:fillRef idx="3">
+            <a:schemeClr val="accent1"/>
+          </a:fillRef>
+          <a:effectRef idx="2">
+            <a:schemeClr val="accent1"/>
+          </a:effectRef>
+          <a:fontRef idx="minor">
+            <a:schemeClr val="lt1"/>
+          </a:fontRef>
+        </p:style>
+        <p:txBody>
+          <a:bodyPr rtlCol="0" anchor="ctr"/>
+          <a:lstStyle/>
+          <a:p>
+            <a:pPr algn="ctr"/>
+          </a:p>
+        </p:txBody>
+      </p:sp>
+      <p:sp>
+        <p:nvSpPr>
+          <p:cNvPr id="17" name="TextBox 16"/>
+          <p:cNvSpPr txBox="1"/>
+          <p:nvPr/>
+        </p:nvSpPr>
+        <p:spPr>
+          <a:xfrm>
+            <a:off x="36000" y="1926000"/>
+            <a:ext cx="1440000" cy="432000"/>
           </a:xfrm>
           <a:prstGeom prst="rect">
             <a:avLst/>
@@ -3519,29 +3753,84 @@
           </a:bodyPr>
           <a:lstStyle/>
           <a:p>
-            <a:pPr algn="l"/>
-            <a:r>
-              <a:rPr sz="600" b="1" i="0">
-                <a:solidFill>
-                  <a:srgbClr val="C8A96D"/>
-                </a:solidFill>
-                <a:latin typeface="Calibri"/>
-              </a:rPr>
-              <a:t>O PROJETO</a:t>
-            </a:r>
-          </a:p>
-        </p:txBody>
-      </p:sp>
-      <p:sp>
-        <p:nvSpPr>
-          <p:cNvPr id="14" name="TextBox 13"/>
+            <a:pPr algn="ctr"/>
+            <a:r>
+              <a:rPr sz="1100" b="1">
+                <a:solidFill>
+                  <a:srgbClr val="FFFFFF"/>
+                </a:solidFill>
+                <a:latin typeface="Calibri"/>
+              </a:rPr>
+              <a:t>R$411,6MM</a:t>
+            </a:r>
+          </a:p>
+          <a:p>
+            <a:pPr algn="ctr"/>
+            <a:r>
+              <a:rPr sz="500">
+                <a:solidFill>
+                  <a:srgbClr val="E8E8F0"/>
+                </a:solidFill>
+                <a:latin typeface="Calibri"/>
+              </a:rPr>
+              <a:t>VGV Total Residencial</a:t>
+            </a:r>
+          </a:p>
+        </p:txBody>
+      </p:sp>
+      <p:sp>
+        <p:nvSpPr>
+          <p:cNvPr id="18" name="Rectangle 17"/>
+          <p:cNvSpPr/>
+          <p:nvPr/>
+        </p:nvSpPr>
+        <p:spPr>
+          <a:xfrm>
+            <a:off x="1506600" y="1944000"/>
+            <a:ext cx="10800" cy="360000"/>
+          </a:xfrm>
+          <a:prstGeom prst="rect">
+            <a:avLst/>
+          </a:prstGeom>
+          <a:solidFill>
+            <a:srgbClr val="887CD3"/>
+          </a:solidFill>
+          <a:ln>
+            <a:noFill/>
+          </a:ln>
+        </p:spPr>
+        <p:style>
+          <a:lnRef idx="1">
+            <a:schemeClr val="accent1"/>
+          </a:lnRef>
+          <a:fillRef idx="3">
+            <a:schemeClr val="accent1"/>
+          </a:fillRef>
+          <a:effectRef idx="2">
+            <a:schemeClr val="accent1"/>
+          </a:effectRef>
+          <a:fontRef idx="minor">
+            <a:schemeClr val="lt1"/>
+          </a:fontRef>
+        </p:style>
+        <p:txBody>
+          <a:bodyPr rtlCol="0" anchor="ctr"/>
+          <a:lstStyle/>
+          <a:p>
+            <a:pPr algn="ctr"/>
+          </a:p>
+        </p:txBody>
+      </p:sp>
+      <p:sp>
+        <p:nvSpPr>
+          <p:cNvPr id="19" name="TextBox 18"/>
           <p:cNvSpPr txBox="1"/>
           <p:nvPr/>
         </p:nvSpPr>
         <p:spPr>
           <a:xfrm>
-            <a:off x="108000" y="2664000"/>
-            <a:ext cx="2358000" cy="252000"/>
+            <a:off x="1548000" y="1926000"/>
+            <a:ext cx="1440000" cy="432000"/>
           </a:xfrm>
           <a:prstGeom prst="rect">
             <a:avLst/>
@@ -3554,29 +3843,84 @@
           </a:bodyPr>
           <a:lstStyle/>
           <a:p>
-            <a:pPr algn="l"/>
-            <a:r>
-              <a:rPr sz="900" b="1" i="0">
+            <a:pPr algn="ctr"/>
+            <a:r>
+              <a:rPr sz="1100" b="1">
                 <a:solidFill>
                   <a:srgbClr val="FFFFFF"/>
                 </a:solidFill>
                 <a:latin typeface="Calibri"/>
               </a:rPr>
-              <a:t>Fasano Mamucabo</a:t>
-            </a:r>
-          </a:p>
-        </p:txBody>
-      </p:sp>
-      <p:sp>
-        <p:nvSpPr>
-          <p:cNvPr id="15" name="TextBox 14"/>
+              <a:t>R$170MM</a:t>
+            </a:r>
+          </a:p>
+          <a:p>
+            <a:pPr algn="ctr"/>
+            <a:r>
+              <a:rPr sz="500">
+                <a:solidFill>
+                  <a:srgbClr val="E8E8F0"/>
+                </a:solidFill>
+                <a:latin typeface="Calibri"/>
+              </a:rPr>
+              <a:t>Volume CRI</a:t>
+            </a:r>
+          </a:p>
+        </p:txBody>
+      </p:sp>
+      <p:sp>
+        <p:nvSpPr>
+          <p:cNvPr id="20" name="Rectangle 19"/>
+          <p:cNvSpPr/>
+          <p:nvPr/>
+        </p:nvSpPr>
+        <p:spPr>
+          <a:xfrm>
+            <a:off x="3018600" y="1944000"/>
+            <a:ext cx="10800" cy="360000"/>
+          </a:xfrm>
+          <a:prstGeom prst="rect">
+            <a:avLst/>
+          </a:prstGeom>
+          <a:solidFill>
+            <a:srgbClr val="887CD3"/>
+          </a:solidFill>
+          <a:ln>
+            <a:noFill/>
+          </a:ln>
+        </p:spPr>
+        <p:style>
+          <a:lnRef idx="1">
+            <a:schemeClr val="accent1"/>
+          </a:lnRef>
+          <a:fillRef idx="3">
+            <a:schemeClr val="accent1"/>
+          </a:fillRef>
+          <a:effectRef idx="2">
+            <a:schemeClr val="accent1"/>
+          </a:effectRef>
+          <a:fontRef idx="minor">
+            <a:schemeClr val="lt1"/>
+          </a:fontRef>
+        </p:style>
+        <p:txBody>
+          <a:bodyPr rtlCol="0" anchor="ctr"/>
+          <a:lstStyle/>
+          <a:p>
+            <a:pPr algn="ctr"/>
+          </a:p>
+        </p:txBody>
+      </p:sp>
+      <p:sp>
+        <p:nvSpPr>
+          <p:cNvPr id="21" name="TextBox 20"/>
           <p:cNvSpPr txBox="1"/>
           <p:nvPr/>
         </p:nvSpPr>
         <p:spPr>
           <a:xfrm>
-            <a:off x="108000" y="2916000"/>
-            <a:ext cx="2358000" cy="1080000"/>
+            <a:off x="3060000" y="1926000"/>
+            <a:ext cx="1440000" cy="432000"/>
           </a:xfrm>
           <a:prstGeom prst="rect">
             <a:avLst/>
@@ -3589,102 +3933,1547 @@
           </a:bodyPr>
           <a:lstStyle/>
           <a:p>
-            <a:pPr algn="l">
-              <a:lnSpc>
-                <a:spcPts val="900"/>
-              </a:lnSpc>
+            <a:pPr algn="ctr"/>
+            <a:r>
+              <a:rPr sz="1100" b="1">
+                <a:solidFill>
+                  <a:srgbClr val="C8A96D"/>
+                </a:solidFill>
+                <a:latin typeface="Calibri"/>
+              </a:rPr>
+              <a:t>30,9%</a:t>
+            </a:r>
+          </a:p>
+          <a:p>
+            <a:pPr algn="ctr"/>
+            <a:r>
+              <a:rPr sz="500">
+                <a:solidFill>
+                  <a:srgbClr val="E8E8F0"/>
+                </a:solidFill>
+                <a:latin typeface="Calibri"/>
+              </a:rPr>
+              <a:t>TIR Equity (49%)</a:t>
+            </a:r>
+          </a:p>
+        </p:txBody>
+      </p:sp>
+      <p:sp>
+        <p:nvSpPr>
+          <p:cNvPr id="22" name="Rectangle 21"/>
+          <p:cNvSpPr/>
+          <p:nvPr/>
+        </p:nvSpPr>
+        <p:spPr>
+          <a:xfrm>
+            <a:off x="4530600" y="1944000"/>
+            <a:ext cx="10800" cy="360000"/>
+          </a:xfrm>
+          <a:prstGeom prst="rect">
+            <a:avLst/>
+          </a:prstGeom>
+          <a:solidFill>
+            <a:srgbClr val="887CD3"/>
+          </a:solidFill>
+          <a:ln>
+            <a:noFill/>
+          </a:ln>
+        </p:spPr>
+        <p:style>
+          <a:lnRef idx="1">
+            <a:schemeClr val="accent1"/>
+          </a:lnRef>
+          <a:fillRef idx="3">
+            <a:schemeClr val="accent1"/>
+          </a:fillRef>
+          <a:effectRef idx="2">
+            <a:schemeClr val="accent1"/>
+          </a:effectRef>
+          <a:fontRef idx="minor">
+            <a:schemeClr val="lt1"/>
+          </a:fontRef>
+        </p:style>
+        <p:txBody>
+          <a:bodyPr rtlCol="0" anchor="ctr"/>
+          <a:lstStyle/>
+          <a:p>
+            <a:pPr algn="ctr"/>
+          </a:p>
+        </p:txBody>
+      </p:sp>
+      <p:sp>
+        <p:nvSpPr>
+          <p:cNvPr id="23" name="TextBox 22"/>
+          <p:cNvSpPr txBox="1"/>
+          <p:nvPr/>
+        </p:nvSpPr>
+        <p:spPr>
+          <a:xfrm>
+            <a:off x="4572000" y="1926000"/>
+            <a:ext cx="1440000" cy="432000"/>
+          </a:xfrm>
+          <a:prstGeom prst="rect">
+            <a:avLst/>
+          </a:prstGeom>
+          <a:noFill/>
+        </p:spPr>
+        <p:txBody>
+          <a:bodyPr wrap="square">
+            <a:spAutoFit/>
+          </a:bodyPr>
+          <a:lstStyle/>
+          <a:p>
+            <a:pPr algn="ctr"/>
+            <a:r>
+              <a:rPr sz="1100" b="1">
+                <a:solidFill>
+                  <a:srgbClr val="FFFFFF"/>
+                </a:solidFill>
+                <a:latin typeface="Calibri"/>
+              </a:rPr>
+              <a:t>48</a:t>
+            </a:r>
+          </a:p>
+          <a:p>
+            <a:pPr algn="ctr"/>
+            <a:r>
+              <a:rPr sz="500">
+                <a:solidFill>
+                  <a:srgbClr val="E8E8F0"/>
+                </a:solidFill>
+                <a:latin typeface="Calibri"/>
+              </a:rPr>
+              <a:t>Unidades Residenciais</a:t>
+            </a:r>
+          </a:p>
+        </p:txBody>
+      </p:sp>
+      <p:sp>
+        <p:nvSpPr>
+          <p:cNvPr id="24" name="Rectangle 23"/>
+          <p:cNvSpPr/>
+          <p:nvPr/>
+        </p:nvSpPr>
+        <p:spPr>
+          <a:xfrm>
+            <a:off x="6042600" y="1944000"/>
+            <a:ext cx="10800" cy="360000"/>
+          </a:xfrm>
+          <a:prstGeom prst="rect">
+            <a:avLst/>
+          </a:prstGeom>
+          <a:solidFill>
+            <a:srgbClr val="887CD3"/>
+          </a:solidFill>
+          <a:ln>
+            <a:noFill/>
+          </a:ln>
+        </p:spPr>
+        <p:style>
+          <a:lnRef idx="1">
+            <a:schemeClr val="accent1"/>
+          </a:lnRef>
+          <a:fillRef idx="3">
+            <a:schemeClr val="accent1"/>
+          </a:fillRef>
+          <a:effectRef idx="2">
+            <a:schemeClr val="accent1"/>
+          </a:effectRef>
+          <a:fontRef idx="minor">
+            <a:schemeClr val="lt1"/>
+          </a:fontRef>
+        </p:style>
+        <p:txBody>
+          <a:bodyPr rtlCol="0" anchor="ctr"/>
+          <a:lstStyle/>
+          <a:p>
+            <a:pPr algn="ctr"/>
+          </a:p>
+        </p:txBody>
+      </p:sp>
+      <p:sp>
+        <p:nvSpPr>
+          <p:cNvPr id="25" name="TextBox 24"/>
+          <p:cNvSpPr txBox="1"/>
+          <p:nvPr/>
+        </p:nvSpPr>
+        <p:spPr>
+          <a:xfrm>
+            <a:off x="6084000" y="1926000"/>
+            <a:ext cx="1440000" cy="432000"/>
+          </a:xfrm>
+          <a:prstGeom prst="rect">
+            <a:avLst/>
+          </a:prstGeom>
+          <a:noFill/>
+        </p:spPr>
+        <p:txBody>
+          <a:bodyPr wrap="square">
+            <a:spAutoFit/>
+          </a:bodyPr>
+          <a:lstStyle/>
+          <a:p>
+            <a:pPr algn="ctr"/>
+            <a:r>
+              <a:rPr sz="1100" b="1">
+                <a:solidFill>
+                  <a:srgbClr val="FFFFFF"/>
+                </a:solidFill>
+                <a:latin typeface="Calibri"/>
+              </a:rPr>
+              <a:t>40</a:t>
+            </a:r>
+          </a:p>
+          <a:p>
+            <a:pPr algn="ctr"/>
+            <a:r>
+              <a:rPr sz="500">
+                <a:solidFill>
+                  <a:srgbClr val="E8E8F0"/>
+                </a:solidFill>
+                <a:latin typeface="Calibri"/>
+              </a:rPr>
+              <a:t>Unidades Hoteleiras</a:t>
+            </a:r>
+          </a:p>
+        </p:txBody>
+      </p:sp>
+      <p:sp>
+        <p:nvSpPr>
+          <p:cNvPr id="26" name="Rectangle 25"/>
+          <p:cNvSpPr/>
+          <p:nvPr/>
+        </p:nvSpPr>
+        <p:spPr>
+          <a:xfrm>
+            <a:off x="0" y="2376000"/>
+            <a:ext cx="7560000" cy="396000"/>
+          </a:xfrm>
+          <a:prstGeom prst="rect">
+            <a:avLst/>
+          </a:prstGeom>
+          <a:solidFill>
+            <a:srgbClr val="F0EEF8"/>
+          </a:solidFill>
+          <a:ln>
+            <a:noFill/>
+          </a:ln>
+        </p:spPr>
+        <p:style>
+          <a:lnRef idx="1">
+            <a:schemeClr val="accent1"/>
+          </a:lnRef>
+          <a:fillRef idx="3">
+            <a:schemeClr val="accent1"/>
+          </a:fillRef>
+          <a:effectRef idx="2">
+            <a:schemeClr val="accent1"/>
+          </a:effectRef>
+          <a:fontRef idx="minor">
+            <a:schemeClr val="lt1"/>
+          </a:fontRef>
+        </p:style>
+        <p:txBody>
+          <a:bodyPr rtlCol="0" anchor="ctr"/>
+          <a:lstStyle/>
+          <a:p>
+            <a:pPr algn="ctr"/>
+          </a:p>
+        </p:txBody>
+      </p:sp>
+      <p:sp>
+        <p:nvSpPr>
+          <p:cNvPr id="27" name="Rectangle 26"/>
+          <p:cNvSpPr/>
+          <p:nvPr/>
+        </p:nvSpPr>
+        <p:spPr>
+          <a:xfrm>
+            <a:off x="180000" y="2556000"/>
+            <a:ext cx="7200000" cy="14400"/>
+          </a:xfrm>
+          <a:prstGeom prst="rect">
+            <a:avLst/>
+          </a:prstGeom>
+          <a:solidFill>
+            <a:srgbClr val="887CD3"/>
+          </a:solidFill>
+          <a:ln>
+            <a:noFill/>
+          </a:ln>
+        </p:spPr>
+        <p:style>
+          <a:lnRef idx="1">
+            <a:schemeClr val="accent1"/>
+          </a:lnRef>
+          <a:fillRef idx="3">
+            <a:schemeClr val="accent1"/>
+          </a:fillRef>
+          <a:effectRef idx="2">
+            <a:schemeClr val="accent1"/>
+          </a:effectRef>
+          <a:fontRef idx="minor">
+            <a:schemeClr val="lt1"/>
+          </a:fontRef>
+        </p:style>
+        <p:txBody>
+          <a:bodyPr rtlCol="0" anchor="ctr"/>
+          <a:lstStyle/>
+          <a:p>
+            <a:pPr algn="ctr"/>
+          </a:p>
+        </p:txBody>
+      </p:sp>
+      <p:sp>
+        <p:nvSpPr>
+          <p:cNvPr id="28" name="Rectangle 27"/>
+          <p:cNvSpPr/>
+          <p:nvPr/>
+        </p:nvSpPr>
+        <p:spPr>
+          <a:xfrm>
+            <a:off x="493200" y="2512800"/>
+            <a:ext cx="93600" cy="93600"/>
+          </a:xfrm>
+          <a:prstGeom prst="rect">
+            <a:avLst/>
+          </a:prstGeom>
+          <a:solidFill>
+            <a:srgbClr val="887CD3"/>
+          </a:solidFill>
+          <a:ln>
+            <a:noFill/>
+          </a:ln>
+        </p:spPr>
+        <p:style>
+          <a:lnRef idx="1">
+            <a:schemeClr val="accent1"/>
+          </a:lnRef>
+          <a:fillRef idx="3">
+            <a:schemeClr val="accent1"/>
+          </a:fillRef>
+          <a:effectRef idx="2">
+            <a:schemeClr val="accent1"/>
+          </a:effectRef>
+          <a:fontRef idx="minor">
+            <a:schemeClr val="lt1"/>
+          </a:fontRef>
+        </p:style>
+        <p:txBody>
+          <a:bodyPr rtlCol="0" anchor="ctr"/>
+          <a:lstStyle/>
+          <a:p>
+            <a:pPr algn="ctr"/>
+          </a:p>
+        </p:txBody>
+      </p:sp>
+      <p:sp>
+        <p:nvSpPr>
+          <p:cNvPr id="29" name="TextBox 28"/>
+          <p:cNvSpPr txBox="1"/>
+          <p:nvPr/>
+        </p:nvSpPr>
+        <p:spPr>
+          <a:xfrm>
+            <a:off x="144000" y="2394000"/>
+            <a:ext cx="792000" cy="126000"/>
+          </a:xfrm>
+          <a:prstGeom prst="rect">
+            <a:avLst/>
+          </a:prstGeom>
+          <a:noFill/>
+        </p:spPr>
+        <p:txBody>
+          <a:bodyPr wrap="none">
+            <a:spAutoFit/>
+          </a:bodyPr>
+          <a:lstStyle/>
+          <a:p>
+            <a:pPr algn="ctr"/>
+            <a:r>
+              <a:rPr sz="500" b="1">
+                <a:solidFill>
+                  <a:srgbClr val="201A47"/>
+                </a:solidFill>
+                <a:latin typeface="Calibri"/>
+              </a:rPr>
+              <a:t>Out/2026</a:t>
+            </a:r>
+          </a:p>
+        </p:txBody>
+      </p:sp>
+      <p:sp>
+        <p:nvSpPr>
+          <p:cNvPr id="30" name="TextBox 29"/>
+          <p:cNvSpPr txBox="1"/>
+          <p:nvPr/>
+        </p:nvSpPr>
+        <p:spPr>
+          <a:xfrm>
+            <a:off x="108000" y="2610000"/>
+            <a:ext cx="864000" cy="180000"/>
+          </a:xfrm>
+          <a:prstGeom prst="rect">
+            <a:avLst/>
+          </a:prstGeom>
+          <a:noFill/>
+        </p:spPr>
+        <p:txBody>
+          <a:bodyPr wrap="none">
+            <a:spAutoFit/>
+          </a:bodyPr>
+          <a:lstStyle/>
+          <a:p>
+            <a:pPr algn="ctr"/>
+            <a:r>
+              <a:rPr sz="450">
+                <a:solidFill>
+                  <a:srgbClr val="7F808F"/>
+                </a:solidFill>
+                <a:latin typeface="Calibri"/>
+              </a:rPr>
+              <a:t>Lançamento Res. F1
+Início Obras Hotel</a:t>
+            </a:r>
+          </a:p>
+        </p:txBody>
+      </p:sp>
+      <p:sp>
+        <p:nvSpPr>
+          <p:cNvPr id="31" name="Rectangle 30"/>
+          <p:cNvSpPr/>
+          <p:nvPr/>
+        </p:nvSpPr>
+        <p:spPr>
+          <a:xfrm>
+            <a:off x="1573200" y="2512800"/>
+            <a:ext cx="93600" cy="93600"/>
+          </a:xfrm>
+          <a:prstGeom prst="rect">
+            <a:avLst/>
+          </a:prstGeom>
+          <a:solidFill>
+            <a:srgbClr val="887CD3"/>
+          </a:solidFill>
+          <a:ln>
+            <a:noFill/>
+          </a:ln>
+        </p:spPr>
+        <p:style>
+          <a:lnRef idx="1">
+            <a:schemeClr val="accent1"/>
+          </a:lnRef>
+          <a:fillRef idx="3">
+            <a:schemeClr val="accent1"/>
+          </a:fillRef>
+          <a:effectRef idx="2">
+            <a:schemeClr val="accent1"/>
+          </a:effectRef>
+          <a:fontRef idx="minor">
+            <a:schemeClr val="lt1"/>
+          </a:fontRef>
+        </p:style>
+        <p:txBody>
+          <a:bodyPr rtlCol="0" anchor="ctr"/>
+          <a:lstStyle/>
+          <a:p>
+            <a:pPr algn="ctr"/>
+          </a:p>
+        </p:txBody>
+      </p:sp>
+      <p:sp>
+        <p:nvSpPr>
+          <p:cNvPr id="32" name="TextBox 31"/>
+          <p:cNvSpPr txBox="1"/>
+          <p:nvPr/>
+        </p:nvSpPr>
+        <p:spPr>
+          <a:xfrm>
+            <a:off x="1224000" y="2394000"/>
+            <a:ext cx="792000" cy="126000"/>
+          </a:xfrm>
+          <a:prstGeom prst="rect">
+            <a:avLst/>
+          </a:prstGeom>
+          <a:noFill/>
+        </p:spPr>
+        <p:txBody>
+          <a:bodyPr wrap="none">
+            <a:spAutoFit/>
+          </a:bodyPr>
+          <a:lstStyle/>
+          <a:p>
+            <a:pPr algn="ctr"/>
+            <a:r>
+              <a:rPr sz="500" b="1">
+                <a:solidFill>
+                  <a:srgbClr val="201A47"/>
+                </a:solidFill>
+                <a:latin typeface="Calibri"/>
+              </a:rPr>
+              <a:t>Abr/2027</a:t>
+            </a:r>
+          </a:p>
+        </p:txBody>
+      </p:sp>
+      <p:sp>
+        <p:nvSpPr>
+          <p:cNvPr id="33" name="TextBox 32"/>
+          <p:cNvSpPr txBox="1"/>
+          <p:nvPr/>
+        </p:nvSpPr>
+        <p:spPr>
+          <a:xfrm>
+            <a:off x="1188000" y="2610000"/>
+            <a:ext cx="864000" cy="180000"/>
+          </a:xfrm>
+          <a:prstGeom prst="rect">
+            <a:avLst/>
+          </a:prstGeom>
+          <a:noFill/>
+        </p:spPr>
+        <p:txBody>
+          <a:bodyPr wrap="none">
+            <a:spAutoFit/>
+          </a:bodyPr>
+          <a:lstStyle/>
+          <a:p>
+            <a:pPr algn="ctr"/>
+            <a:r>
+              <a:rPr sz="450">
+                <a:solidFill>
+                  <a:srgbClr val="7F808F"/>
+                </a:solidFill>
+                <a:latin typeface="Calibri"/>
+              </a:rPr>
+              <a:t>Início Obras
+Residencial F1</a:t>
+            </a:r>
+          </a:p>
+        </p:txBody>
+      </p:sp>
+      <p:sp>
+        <p:nvSpPr>
+          <p:cNvPr id="34" name="Rectangle 33"/>
+          <p:cNvSpPr/>
+          <p:nvPr/>
+        </p:nvSpPr>
+        <p:spPr>
+          <a:xfrm>
+            <a:off x="2653200" y="2512800"/>
+            <a:ext cx="93600" cy="93600"/>
+          </a:xfrm>
+          <a:prstGeom prst="rect">
+            <a:avLst/>
+          </a:prstGeom>
+          <a:solidFill>
+            <a:srgbClr val="887CD3"/>
+          </a:solidFill>
+          <a:ln>
+            <a:noFill/>
+          </a:ln>
+        </p:spPr>
+        <p:style>
+          <a:lnRef idx="1">
+            <a:schemeClr val="accent1"/>
+          </a:lnRef>
+          <a:fillRef idx="3">
+            <a:schemeClr val="accent1"/>
+          </a:fillRef>
+          <a:effectRef idx="2">
+            <a:schemeClr val="accent1"/>
+          </a:effectRef>
+          <a:fontRef idx="minor">
+            <a:schemeClr val="lt1"/>
+          </a:fontRef>
+        </p:style>
+        <p:txBody>
+          <a:bodyPr rtlCol="0" anchor="ctr"/>
+          <a:lstStyle/>
+          <a:p>
+            <a:pPr algn="ctr"/>
+          </a:p>
+        </p:txBody>
+      </p:sp>
+      <p:sp>
+        <p:nvSpPr>
+          <p:cNvPr id="35" name="TextBox 34"/>
+          <p:cNvSpPr txBox="1"/>
+          <p:nvPr/>
+        </p:nvSpPr>
+        <p:spPr>
+          <a:xfrm>
+            <a:off x="2304000" y="2394000"/>
+            <a:ext cx="792000" cy="126000"/>
+          </a:xfrm>
+          <a:prstGeom prst="rect">
+            <a:avLst/>
+          </a:prstGeom>
+          <a:noFill/>
+        </p:spPr>
+        <p:txBody>
+          <a:bodyPr wrap="none">
+            <a:spAutoFit/>
+          </a:bodyPr>
+          <a:lstStyle/>
+          <a:p>
+            <a:pPr algn="ctr"/>
+            <a:r>
+              <a:rPr sz="500" b="1">
+                <a:solidFill>
+                  <a:srgbClr val="201A47"/>
+                </a:solidFill>
+                <a:latin typeface="Calibri"/>
+              </a:rPr>
+              <a:t>Jan/2028</a:t>
+            </a:r>
+          </a:p>
+        </p:txBody>
+      </p:sp>
+      <p:sp>
+        <p:nvSpPr>
+          <p:cNvPr id="36" name="TextBox 35"/>
+          <p:cNvSpPr txBox="1"/>
+          <p:nvPr/>
+        </p:nvSpPr>
+        <p:spPr>
+          <a:xfrm>
+            <a:off x="2268000" y="2610000"/>
+            <a:ext cx="864000" cy="180000"/>
+          </a:xfrm>
+          <a:prstGeom prst="rect">
+            <a:avLst/>
+          </a:prstGeom>
+          <a:noFill/>
+        </p:spPr>
+        <p:txBody>
+          <a:bodyPr wrap="none">
+            <a:spAutoFit/>
+          </a:bodyPr>
+          <a:lstStyle/>
+          <a:p>
+            <a:pPr algn="ctr"/>
+            <a:r>
+              <a:rPr sz="450">
+                <a:solidFill>
+                  <a:srgbClr val="7F808F"/>
+                </a:solidFill>
+                <a:latin typeface="Calibri"/>
+              </a:rPr>
+              <a:t>Lançamento
+Residencial F2</a:t>
+            </a:r>
+          </a:p>
+        </p:txBody>
+      </p:sp>
+      <p:sp>
+        <p:nvSpPr>
+          <p:cNvPr id="37" name="Rectangle 36"/>
+          <p:cNvSpPr/>
+          <p:nvPr/>
+        </p:nvSpPr>
+        <p:spPr>
+          <a:xfrm>
+            <a:off x="3733200" y="2512800"/>
+            <a:ext cx="93600" cy="93600"/>
+          </a:xfrm>
+          <a:prstGeom prst="rect">
+            <a:avLst/>
+          </a:prstGeom>
+          <a:solidFill>
+            <a:srgbClr val="201A47"/>
+          </a:solidFill>
+          <a:ln>
+            <a:noFill/>
+          </a:ln>
+        </p:spPr>
+        <p:style>
+          <a:lnRef idx="1">
+            <a:schemeClr val="accent1"/>
+          </a:lnRef>
+          <a:fillRef idx="3">
+            <a:schemeClr val="accent1"/>
+          </a:fillRef>
+          <a:effectRef idx="2">
+            <a:schemeClr val="accent1"/>
+          </a:effectRef>
+          <a:fontRef idx="minor">
+            <a:schemeClr val="lt1"/>
+          </a:fontRef>
+        </p:style>
+        <p:txBody>
+          <a:bodyPr rtlCol="0" anchor="ctr"/>
+          <a:lstStyle/>
+          <a:p>
+            <a:pPr algn="ctr"/>
+          </a:p>
+        </p:txBody>
+      </p:sp>
+      <p:sp>
+        <p:nvSpPr>
+          <p:cNvPr id="38" name="TextBox 37"/>
+          <p:cNvSpPr txBox="1"/>
+          <p:nvPr/>
+        </p:nvSpPr>
+        <p:spPr>
+          <a:xfrm>
+            <a:off x="3384000" y="2394000"/>
+            <a:ext cx="792000" cy="126000"/>
+          </a:xfrm>
+          <a:prstGeom prst="rect">
+            <a:avLst/>
+          </a:prstGeom>
+          <a:noFill/>
+        </p:spPr>
+        <p:txBody>
+          <a:bodyPr wrap="none">
+            <a:spAutoFit/>
+          </a:bodyPr>
+          <a:lstStyle/>
+          <a:p>
+            <a:pPr algn="ctr"/>
+            <a:r>
+              <a:rPr sz="500" b="1">
+                <a:solidFill>
+                  <a:srgbClr val="201A47"/>
+                </a:solidFill>
+                <a:latin typeface="Calibri"/>
+              </a:rPr>
+              <a:t>Jan/2029</a:t>
+            </a:r>
+          </a:p>
+        </p:txBody>
+      </p:sp>
+      <p:sp>
+        <p:nvSpPr>
+          <p:cNvPr id="39" name="TextBox 38"/>
+          <p:cNvSpPr txBox="1"/>
+          <p:nvPr/>
+        </p:nvSpPr>
+        <p:spPr>
+          <a:xfrm>
+            <a:off x="3348000" y="2610000"/>
+            <a:ext cx="864000" cy="180000"/>
+          </a:xfrm>
+          <a:prstGeom prst="rect">
+            <a:avLst/>
+          </a:prstGeom>
+          <a:noFill/>
+        </p:spPr>
+        <p:txBody>
+          <a:bodyPr wrap="none">
+            <a:spAutoFit/>
+          </a:bodyPr>
+          <a:lstStyle/>
+          <a:p>
+            <a:pPr algn="ctr"/>
+            <a:r>
+              <a:rPr sz="450">
+                <a:solidFill>
+                  <a:srgbClr val="7F808F"/>
+                </a:solidFill>
+                <a:latin typeface="Calibri"/>
+              </a:rPr>
+              <a:t>Abertura
+Hotel Fasano</a:t>
+            </a:r>
+          </a:p>
+        </p:txBody>
+      </p:sp>
+      <p:sp>
+        <p:nvSpPr>
+          <p:cNvPr id="40" name="Rectangle 39"/>
+          <p:cNvSpPr/>
+          <p:nvPr/>
+        </p:nvSpPr>
+        <p:spPr>
+          <a:xfrm>
+            <a:off x="4813200" y="2512800"/>
+            <a:ext cx="93600" cy="93600"/>
+          </a:xfrm>
+          <a:prstGeom prst="rect">
+            <a:avLst/>
+          </a:prstGeom>
+          <a:solidFill>
+            <a:srgbClr val="887CD3"/>
+          </a:solidFill>
+          <a:ln>
+            <a:noFill/>
+          </a:ln>
+        </p:spPr>
+        <p:style>
+          <a:lnRef idx="1">
+            <a:schemeClr val="accent1"/>
+          </a:lnRef>
+          <a:fillRef idx="3">
+            <a:schemeClr val="accent1"/>
+          </a:fillRef>
+          <a:effectRef idx="2">
+            <a:schemeClr val="accent1"/>
+          </a:effectRef>
+          <a:fontRef idx="minor">
+            <a:schemeClr val="lt1"/>
+          </a:fontRef>
+        </p:style>
+        <p:txBody>
+          <a:bodyPr rtlCol="0" anchor="ctr"/>
+          <a:lstStyle/>
+          <a:p>
+            <a:pPr algn="ctr"/>
+          </a:p>
+        </p:txBody>
+      </p:sp>
+      <p:sp>
+        <p:nvSpPr>
+          <p:cNvPr id="41" name="TextBox 40"/>
+          <p:cNvSpPr txBox="1"/>
+          <p:nvPr/>
+        </p:nvSpPr>
+        <p:spPr>
+          <a:xfrm>
+            <a:off x="4464000" y="2394000"/>
+            <a:ext cx="792000" cy="126000"/>
+          </a:xfrm>
+          <a:prstGeom prst="rect">
+            <a:avLst/>
+          </a:prstGeom>
+          <a:noFill/>
+        </p:spPr>
+        <p:txBody>
+          <a:bodyPr wrap="none">
+            <a:spAutoFit/>
+          </a:bodyPr>
+          <a:lstStyle/>
+          <a:p>
+            <a:pPr algn="ctr"/>
+            <a:r>
+              <a:rPr sz="500" b="1">
+                <a:solidFill>
+                  <a:srgbClr val="201A47"/>
+                </a:solidFill>
+                <a:latin typeface="Calibri"/>
+              </a:rPr>
+              <a:t>Ago/2029</a:t>
+            </a:r>
+          </a:p>
+        </p:txBody>
+      </p:sp>
+      <p:sp>
+        <p:nvSpPr>
+          <p:cNvPr id="42" name="TextBox 41"/>
+          <p:cNvSpPr txBox="1"/>
+          <p:nvPr/>
+        </p:nvSpPr>
+        <p:spPr>
+          <a:xfrm>
+            <a:off x="4428000" y="2610000"/>
+            <a:ext cx="864000" cy="180000"/>
+          </a:xfrm>
+          <a:prstGeom prst="rect">
+            <a:avLst/>
+          </a:prstGeom>
+          <a:noFill/>
+        </p:spPr>
+        <p:txBody>
+          <a:bodyPr wrap="none">
+            <a:spAutoFit/>
+          </a:bodyPr>
+          <a:lstStyle/>
+          <a:p>
+            <a:pPr algn="ctr"/>
+            <a:r>
+              <a:rPr sz="450">
+                <a:solidFill>
+                  <a:srgbClr val="7F808F"/>
+                </a:solidFill>
+                <a:latin typeface="Calibri"/>
+              </a:rPr>
+              <a:t>Entrega Res. F1
+Pós-Chaves</a:t>
+            </a:r>
+          </a:p>
+        </p:txBody>
+      </p:sp>
+      <p:sp>
+        <p:nvSpPr>
+          <p:cNvPr id="43" name="Rectangle 42"/>
+          <p:cNvSpPr/>
+          <p:nvPr/>
+        </p:nvSpPr>
+        <p:spPr>
+          <a:xfrm>
+            <a:off x="5893200" y="2512800"/>
+            <a:ext cx="93600" cy="93600"/>
+          </a:xfrm>
+          <a:prstGeom prst="rect">
+            <a:avLst/>
+          </a:prstGeom>
+          <a:solidFill>
+            <a:srgbClr val="887CD3"/>
+          </a:solidFill>
+          <a:ln>
+            <a:noFill/>
+          </a:ln>
+        </p:spPr>
+        <p:style>
+          <a:lnRef idx="1">
+            <a:schemeClr val="accent1"/>
+          </a:lnRef>
+          <a:fillRef idx="3">
+            <a:schemeClr val="accent1"/>
+          </a:fillRef>
+          <a:effectRef idx="2">
+            <a:schemeClr val="accent1"/>
+          </a:effectRef>
+          <a:fontRef idx="minor">
+            <a:schemeClr val="lt1"/>
+          </a:fontRef>
+        </p:style>
+        <p:txBody>
+          <a:bodyPr rtlCol="0" anchor="ctr"/>
+          <a:lstStyle/>
+          <a:p>
+            <a:pPr algn="ctr"/>
+          </a:p>
+        </p:txBody>
+      </p:sp>
+      <p:sp>
+        <p:nvSpPr>
+          <p:cNvPr id="44" name="TextBox 43"/>
+          <p:cNvSpPr txBox="1"/>
+          <p:nvPr/>
+        </p:nvSpPr>
+        <p:spPr>
+          <a:xfrm>
+            <a:off x="5544000" y="2394000"/>
+            <a:ext cx="792000" cy="126000"/>
+          </a:xfrm>
+          <a:prstGeom prst="rect">
+            <a:avLst/>
+          </a:prstGeom>
+          <a:noFill/>
+        </p:spPr>
+        <p:txBody>
+          <a:bodyPr wrap="none">
+            <a:spAutoFit/>
+          </a:bodyPr>
+          <a:lstStyle/>
+          <a:p>
+            <a:pPr algn="ctr"/>
+            <a:r>
+              <a:rPr sz="500" b="1">
+                <a:solidFill>
+                  <a:srgbClr val="201A47"/>
+                </a:solidFill>
+                <a:latin typeface="Calibri"/>
+              </a:rPr>
+              <a:t>Jun/2030</a:t>
+            </a:r>
+          </a:p>
+        </p:txBody>
+      </p:sp>
+      <p:sp>
+        <p:nvSpPr>
+          <p:cNvPr id="45" name="TextBox 44"/>
+          <p:cNvSpPr txBox="1"/>
+          <p:nvPr/>
+        </p:nvSpPr>
+        <p:spPr>
+          <a:xfrm>
+            <a:off x="5508000" y="2610000"/>
+            <a:ext cx="864000" cy="180000"/>
+          </a:xfrm>
+          <a:prstGeom prst="rect">
+            <a:avLst/>
+          </a:prstGeom>
+          <a:noFill/>
+        </p:spPr>
+        <p:txBody>
+          <a:bodyPr wrap="none">
+            <a:spAutoFit/>
+          </a:bodyPr>
+          <a:lstStyle/>
+          <a:p>
+            <a:pPr algn="ctr"/>
+            <a:r>
+              <a:rPr sz="450">
+                <a:solidFill>
+                  <a:srgbClr val="7F808F"/>
+                </a:solidFill>
+                <a:latin typeface="Calibri"/>
+              </a:rPr>
+              <a:t>Entrega Res. F2
+Full Cash Sweep</a:t>
+            </a:r>
+          </a:p>
+        </p:txBody>
+      </p:sp>
+      <p:sp>
+        <p:nvSpPr>
+          <p:cNvPr id="46" name="Rectangle 45"/>
+          <p:cNvSpPr/>
+          <p:nvPr/>
+        </p:nvSpPr>
+        <p:spPr>
+          <a:xfrm>
+            <a:off x="6973200" y="2512800"/>
+            <a:ext cx="93600" cy="93600"/>
+          </a:xfrm>
+          <a:prstGeom prst="rect">
+            <a:avLst/>
+          </a:prstGeom>
+          <a:solidFill>
+            <a:srgbClr val="201A47"/>
+          </a:solidFill>
+          <a:ln>
+            <a:noFill/>
+          </a:ln>
+        </p:spPr>
+        <p:style>
+          <a:lnRef idx="1">
+            <a:schemeClr val="accent1"/>
+          </a:lnRef>
+          <a:fillRef idx="3">
+            <a:schemeClr val="accent1"/>
+          </a:fillRef>
+          <a:effectRef idx="2">
+            <a:schemeClr val="accent1"/>
+          </a:effectRef>
+          <a:fontRef idx="minor">
+            <a:schemeClr val="lt1"/>
+          </a:fontRef>
+        </p:style>
+        <p:txBody>
+          <a:bodyPr rtlCol="0" anchor="ctr"/>
+          <a:lstStyle/>
+          <a:p>
+            <a:pPr algn="ctr"/>
+          </a:p>
+        </p:txBody>
+      </p:sp>
+      <p:sp>
+        <p:nvSpPr>
+          <p:cNvPr id="47" name="TextBox 46"/>
+          <p:cNvSpPr txBox="1"/>
+          <p:nvPr/>
+        </p:nvSpPr>
+        <p:spPr>
+          <a:xfrm>
+            <a:off x="6624000" y="2394000"/>
+            <a:ext cx="792000" cy="126000"/>
+          </a:xfrm>
+          <a:prstGeom prst="rect">
+            <a:avLst/>
+          </a:prstGeom>
+          <a:noFill/>
+        </p:spPr>
+        <p:txBody>
+          <a:bodyPr wrap="none">
+            <a:spAutoFit/>
+          </a:bodyPr>
+          <a:lstStyle/>
+          <a:p>
+            <a:pPr algn="ctr"/>
+            <a:r>
+              <a:rPr sz="500" b="1">
+                <a:solidFill>
+                  <a:srgbClr val="201A47"/>
+                </a:solidFill>
+                <a:latin typeface="Calibri"/>
+              </a:rPr>
+              <a:t>Ago/2031</a:t>
+            </a:r>
+          </a:p>
+        </p:txBody>
+      </p:sp>
+      <p:sp>
+        <p:nvSpPr>
+          <p:cNvPr id="48" name="TextBox 47"/>
+          <p:cNvSpPr txBox="1"/>
+          <p:nvPr/>
+        </p:nvSpPr>
+        <p:spPr>
+          <a:xfrm>
+            <a:off x="6588000" y="2610000"/>
+            <a:ext cx="864000" cy="180000"/>
+          </a:xfrm>
+          <a:prstGeom prst="rect">
+            <a:avLst/>
+          </a:prstGeom>
+          <a:noFill/>
+        </p:spPr>
+        <p:txBody>
+          <a:bodyPr wrap="none">
+            <a:spAutoFit/>
+          </a:bodyPr>
+          <a:lstStyle/>
+          <a:p>
+            <a:pPr algn="ctr"/>
+            <a:r>
+              <a:rPr sz="450">
+                <a:solidFill>
+                  <a:srgbClr val="7F808F"/>
+                </a:solidFill>
+                <a:latin typeface="Calibri"/>
+              </a:rPr>
+              <a:t>Encerramento
+Operação Dívida</a:t>
+            </a:r>
+          </a:p>
+        </p:txBody>
+      </p:sp>
+      <p:sp>
+        <p:nvSpPr>
+          <p:cNvPr id="49" name="Rectangle 48"/>
+          <p:cNvSpPr/>
+          <p:nvPr/>
+        </p:nvSpPr>
+        <p:spPr>
+          <a:xfrm>
+            <a:off x="0" y="2772000"/>
+            <a:ext cx="7560000" cy="6696000"/>
+          </a:xfrm>
+          <a:prstGeom prst="rect">
+            <a:avLst/>
+          </a:prstGeom>
+          <a:solidFill>
+            <a:srgbClr val="FFFFFF"/>
+          </a:solidFill>
+          <a:ln>
+            <a:noFill/>
+          </a:ln>
+        </p:spPr>
+        <p:style>
+          <a:lnRef idx="1">
+            <a:schemeClr val="accent1"/>
+          </a:lnRef>
+          <a:fillRef idx="3">
+            <a:schemeClr val="accent1"/>
+          </a:fillRef>
+          <a:effectRef idx="2">
+            <a:schemeClr val="accent1"/>
+          </a:effectRef>
+          <a:fontRef idx="minor">
+            <a:schemeClr val="lt1"/>
+          </a:fontRef>
+        </p:style>
+        <p:txBody>
+          <a:bodyPr rtlCol="0" anchor="ctr"/>
+          <a:lstStyle/>
+          <a:p>
+            <a:pPr algn="ctr"/>
+          </a:p>
+        </p:txBody>
+      </p:sp>
+      <p:sp>
+        <p:nvSpPr>
+          <p:cNvPr id="50" name="Rectangle 49"/>
+          <p:cNvSpPr/>
+          <p:nvPr/>
+        </p:nvSpPr>
+        <p:spPr>
+          <a:xfrm>
+            <a:off x="2512800" y="2880000"/>
+            <a:ext cx="14400" cy="6480000"/>
+          </a:xfrm>
+          <a:prstGeom prst="rect">
+            <a:avLst/>
+          </a:prstGeom>
+          <a:solidFill>
+            <a:srgbClr val="E8E8F0"/>
+          </a:solidFill>
+          <a:ln>
+            <a:noFill/>
+          </a:ln>
+        </p:spPr>
+        <p:style>
+          <a:lnRef idx="1">
+            <a:schemeClr val="accent1"/>
+          </a:lnRef>
+          <a:fillRef idx="3">
+            <a:schemeClr val="accent1"/>
+          </a:fillRef>
+          <a:effectRef idx="2">
+            <a:schemeClr val="accent1"/>
+          </a:effectRef>
+          <a:fontRef idx="minor">
+            <a:schemeClr val="lt1"/>
+          </a:fontRef>
+        </p:style>
+        <p:txBody>
+          <a:bodyPr rtlCol="0" anchor="ctr"/>
+          <a:lstStyle/>
+          <a:p>
+            <a:pPr algn="ctr"/>
+          </a:p>
+        </p:txBody>
+      </p:sp>
+      <p:sp>
+        <p:nvSpPr>
+          <p:cNvPr id="51" name="Rectangle 50"/>
+          <p:cNvSpPr/>
+          <p:nvPr/>
+        </p:nvSpPr>
+        <p:spPr>
+          <a:xfrm>
+            <a:off x="5032800" y="2880000"/>
+            <a:ext cx="14400" cy="6480000"/>
+          </a:xfrm>
+          <a:prstGeom prst="rect">
+            <a:avLst/>
+          </a:prstGeom>
+          <a:solidFill>
+            <a:srgbClr val="E8E8F0"/>
+          </a:solidFill>
+          <a:ln>
+            <a:noFill/>
+          </a:ln>
+        </p:spPr>
+        <p:style>
+          <a:lnRef idx="1">
+            <a:schemeClr val="accent1"/>
+          </a:lnRef>
+          <a:fillRef idx="3">
+            <a:schemeClr val="accent1"/>
+          </a:fillRef>
+          <a:effectRef idx="2">
+            <a:schemeClr val="accent1"/>
+          </a:effectRef>
+          <a:fontRef idx="minor">
+            <a:schemeClr val="lt1"/>
+          </a:fontRef>
+        </p:style>
+        <p:txBody>
+          <a:bodyPr rtlCol="0" anchor="ctr"/>
+          <a:lstStyle/>
+          <a:p>
+            <a:pPr algn="ctr"/>
+          </a:p>
+        </p:txBody>
+      </p:sp>
+      <p:sp>
+        <p:nvSpPr>
+          <p:cNvPr id="52" name="TextBox 51"/>
+          <p:cNvSpPr txBox="1"/>
+          <p:nvPr/>
+        </p:nvSpPr>
+        <p:spPr>
+          <a:xfrm>
+            <a:off x="108000" y="2844000"/>
+            <a:ext cx="2304000" cy="432000"/>
+          </a:xfrm>
+          <a:prstGeom prst="rect">
+            <a:avLst/>
+          </a:prstGeom>
+          <a:noFill/>
+        </p:spPr>
+        <p:txBody>
+          <a:bodyPr wrap="square">
+            <a:spAutoFit/>
+          </a:bodyPr>
+          <a:lstStyle/>
+          <a:p/>
+          <a:p>
+            <a:pPr>
+              <a:spcBef>
+                <a:spcPts val="0"/>
+              </a:spcBef>
+              <a:spcAft>
+                <a:spcPts val="100"/>
+              </a:spcAft>
             </a:pPr>
             <a:r>
-              <a:rPr sz="700" b="0" i="0">
-                <a:solidFill>
-                  <a:srgbClr val="FFFFFF"/>
-                </a:solidFill>
-                <a:latin typeface="Calibri"/>
-              </a:rPr>
-              <a:t>•  Empreendimento residencial de alto padrão</a:t>
-            </a:r>
-          </a:p>
-          <a:p>
-            <a:pPr algn="l">
-              <a:lnSpc>
-                <a:spcPts val="900"/>
-              </a:lnSpc>
+              <a:rPr sz="500" b="1">
+                <a:solidFill>
+                  <a:srgbClr val="C8A96D"/>
+                </a:solidFill>
+                <a:latin typeface="Calibri"/>
+              </a:rPr>
+              <a:t>POR QUE INVESTIR</a:t>
+            </a:r>
+          </a:p>
+          <a:p>
+            <a:pPr>
               <a:spcBef>
-                <a:spcPts val="100"/>
+                <a:spcPts val="0"/>
+              </a:spcBef>
+              <a:spcAft>
+                <a:spcPts val="200"/>
+              </a:spcAft>
+            </a:pPr>
+            <a:r>
+              <a:rPr sz="800" b="1">
+                <a:solidFill>
+                  <a:srgbClr val="201A47"/>
+                </a:solidFill>
+                <a:latin typeface="Calibri"/>
+              </a:rPr>
+              <a:t>Tese de Investimento</a:t>
+            </a:r>
+          </a:p>
+        </p:txBody>
+      </p:sp>
+      <p:sp>
+        <p:nvSpPr>
+          <p:cNvPr id="53" name="Rectangle 52"/>
+          <p:cNvSpPr/>
+          <p:nvPr/>
+        </p:nvSpPr>
+        <p:spPr>
+          <a:xfrm>
+            <a:off x="108000" y="3114000"/>
+            <a:ext cx="2304000" cy="10800"/>
+          </a:xfrm>
+          <a:prstGeom prst="rect">
+            <a:avLst/>
+          </a:prstGeom>
+          <a:solidFill>
+            <a:srgbClr val="C8A96D"/>
+          </a:solidFill>
+          <a:ln>
+            <a:noFill/>
+          </a:ln>
+        </p:spPr>
+        <p:style>
+          <a:lnRef idx="1">
+            <a:schemeClr val="accent1"/>
+          </a:lnRef>
+          <a:fillRef idx="3">
+            <a:schemeClr val="accent1"/>
+          </a:fillRef>
+          <a:effectRef idx="2">
+            <a:schemeClr val="accent1"/>
+          </a:effectRef>
+          <a:fontRef idx="minor">
+            <a:schemeClr val="lt1"/>
+          </a:fontRef>
+        </p:style>
+        <p:txBody>
+          <a:bodyPr rtlCol="0" anchor="ctr"/>
+          <a:lstStyle/>
+          <a:p>
+            <a:pPr algn="ctr"/>
+          </a:p>
+        </p:txBody>
+      </p:sp>
+      <p:sp>
+        <p:nvSpPr>
+          <p:cNvPr id="54" name="TextBox 53"/>
+          <p:cNvSpPr txBox="1"/>
+          <p:nvPr/>
+        </p:nvSpPr>
+        <p:spPr>
+          <a:xfrm>
+            <a:off x="108000" y="3204000"/>
+            <a:ext cx="2304000" cy="1368000"/>
+          </a:xfrm>
+          <a:prstGeom prst="rect">
+            <a:avLst/>
+          </a:prstGeom>
+          <a:noFill/>
+        </p:spPr>
+        <p:txBody>
+          <a:bodyPr wrap="square">
+            <a:spAutoFit/>
+          </a:bodyPr>
+          <a:lstStyle/>
+          <a:p>
+            <a:pPr>
+              <a:spcBef>
+                <a:spcPts val="0"/>
               </a:spcBef>
             </a:pPr>
-            <a:r>
-              <a:rPr sz="700" b="0" i="0">
-                <a:solidFill>
-                  <a:srgbClr val="FFFFFF"/>
-                </a:solidFill>
-                <a:latin typeface="Calibri"/>
-              </a:rPr>
-              <a:t>•  43 unidades residenciais — studios a penthouses</a:t>
-            </a:r>
-          </a:p>
-          <a:p>
-            <a:pPr algn="l">
-              <a:lnSpc>
-                <a:spcPts val="900"/>
-              </a:lnSpc>
+          </a:p>
+          <a:p>
+            <a:pPr>
               <a:spcBef>
-                <a:spcPts val="100"/>
+                <a:spcPts val="150"/>
               </a:spcBef>
+              <a:spcAft>
+                <a:spcPts val="0"/>
+              </a:spcAft>
             </a:pPr>
             <a:r>
-              <a:rPr sz="700" b="0" i="0">
-                <a:solidFill>
-                  <a:srgbClr val="FFFFFF"/>
-                </a:solidFill>
-                <a:latin typeface="Calibri"/>
-              </a:rPr>
-              <a:t>•  Área privativa: 45m² a 500m²</a:t>
-            </a:r>
-          </a:p>
-          <a:p>
-            <a:pPr algn="l">
-              <a:lnSpc>
-                <a:spcPts val="900"/>
-              </a:lnSpc>
+              <a:rPr sz="600">
+                <a:solidFill>
+                  <a:srgbClr val="887CD3"/>
+                </a:solidFill>
+                <a:latin typeface="Calibri"/>
+              </a:rPr>
+              <a:t>• </a:t>
+            </a:r>
+            <a:r>
+              <a:rPr sz="600" b="1">
+                <a:solidFill>
+                  <a:srgbClr val="201A47"/>
+                </a:solidFill>
+                <a:latin typeface="Calibri"/>
+              </a:rPr>
+              <a:t>Marca Fasano </a:t>
+            </a:r>
+            <a:r>
+              <a:rPr sz="600">
+                <a:solidFill>
+                  <a:srgbClr val="333355"/>
+                </a:solidFill>
+                <a:latin typeface="Calibri"/>
+              </a:rPr>
+              <a:t>— Parceria com grupo centenário, sinônimo de luxo e hospitalidade premium na América Latina. Contrato negociado, formalização final em curso.</a:t>
+            </a:r>
+          </a:p>
+          <a:p>
+            <a:pPr>
               <a:spcBef>
-                <a:spcPts val="100"/>
+                <a:spcPts val="150"/>
               </a:spcBef>
+              <a:spcAft>
+                <a:spcPts val="0"/>
+              </a:spcAft>
             </a:pPr>
             <a:r>
-              <a:rPr sz="700" b="0" i="0">
-                <a:solidFill>
-                  <a:srgbClr val="FFFFFF"/>
-                </a:solidFill>
-                <a:latin typeface="Calibri"/>
-              </a:rPr>
-              <a:t>•  Serviços hoteleiros Fasano integrados</a:t>
-            </a:r>
-          </a:p>
-          <a:p>
-            <a:pPr algn="l">
-              <a:lnSpc>
-                <a:spcPts val="900"/>
-              </a:lnSpc>
+              <a:rPr sz="600">
+                <a:solidFill>
+                  <a:srgbClr val="887CD3"/>
+                </a:solidFill>
+                <a:latin typeface="Calibri"/>
+              </a:rPr>
+              <a:t>• </a:t>
+            </a:r>
+            <a:r>
+              <a:rPr sz="600" b="1">
+                <a:solidFill>
+                  <a:srgbClr val="201A47"/>
+                </a:solidFill>
+                <a:latin typeface="Calibri"/>
+              </a:rPr>
+              <a:t>Destino exclusivo e escasso </a:t>
+            </a:r>
+            <a:r>
+              <a:rPr sz="600">
+                <a:solidFill>
+                  <a:srgbClr val="333355"/>
+                </a:solidFill>
+                <a:latin typeface="Calibri"/>
+              </a:rPr>
+              <a:t>— Mamucabo reservado exclusivamente para projetos AAA. 13 km de praias intocadas com baixíssima densidade.</a:t>
+            </a:r>
+          </a:p>
+          <a:p>
+            <a:pPr>
               <a:spcBef>
-                <a:spcPts val="100"/>
+                <a:spcPts val="150"/>
               </a:spcBef>
+              <a:spcAft>
+                <a:spcPts val="0"/>
+              </a:spcAft>
             </a:pPr>
             <a:r>
-              <a:rPr sz="700" b="0" i="0">
-                <a:solidFill>
-                  <a:srgbClr val="FFFFFF"/>
-                </a:solidFill>
-                <a:latin typeface="Calibri"/>
-              </a:rPr>
-              <a:t>•  Localização: Mamucabo, RJ (entre Paraty e Angra)</a:t>
+              <a:rPr sz="600">
+                <a:solidFill>
+                  <a:srgbClr val="887CD3"/>
+                </a:solidFill>
+                <a:latin typeface="Calibri"/>
+              </a:rPr>
+              <a:t>• </a:t>
+            </a:r>
+            <a:r>
+              <a:rPr sz="600" b="1">
+                <a:solidFill>
+                  <a:srgbClr val="201A47"/>
+                </a:solidFill>
+                <a:latin typeface="Calibri"/>
+              </a:rPr>
+              <a:t>Risco regulatório zerado </a:t>
+            </a:r>
+            <a:r>
+              <a:rPr sz="600">
+                <a:solidFill>
+                  <a:srgbClr val="333355"/>
+                </a:solidFill>
+                <a:latin typeface="Calibri"/>
+              </a:rPr>
+              <a:t>— Terreno desde 2009. LP emitida 2012, LI emitida jan/2024 e Alvará concluído. Investidor ingressa na fase de execução.</a:t>
+            </a:r>
+          </a:p>
+          <a:p>
+            <a:pPr>
+              <a:spcBef>
+                <a:spcPts val="150"/>
+              </a:spcBef>
+              <a:spcAft>
+                <a:spcPts val="0"/>
+              </a:spcAft>
+            </a:pPr>
+            <a:r>
+              <a:rPr sz="600">
+                <a:solidFill>
+                  <a:srgbClr val="887CD3"/>
+                </a:solidFill>
+                <a:latin typeface="Calibri"/>
+              </a:rPr>
+              <a:t>• </a:t>
+            </a:r>
+            <a:r>
+              <a:rPr sz="600" b="1">
+                <a:solidFill>
+                  <a:srgbClr val="201A47"/>
+                </a:solidFill>
+                <a:latin typeface="Calibri"/>
+              </a:rPr>
+              <a:t>Garantias robustas </a:t>
+            </a:r>
+            <a:r>
+              <a:rPr sz="600">
+                <a:solidFill>
+                  <a:srgbClr val="333355"/>
+                </a:solidFill>
+                <a:latin typeface="Calibri"/>
+              </a:rPr>
+              <a:t>— AF de cotas, terrenos e recebíveis. Razão mínima de 120%. Full cash sweep pós-entrega residencial.</a:t>
+            </a:r>
+          </a:p>
+          <a:p>
+            <a:pPr>
+              <a:spcBef>
+                <a:spcPts val="150"/>
+              </a:spcBef>
+              <a:spcAft>
+                <a:spcPts val="0"/>
+              </a:spcAft>
+            </a:pPr>
+            <a:r>
+              <a:rPr sz="600">
+                <a:solidFill>
+                  <a:srgbClr val="887CD3"/>
+                </a:solidFill>
+                <a:latin typeface="Calibri"/>
+              </a:rPr>
+              <a:t>• </a:t>
+            </a:r>
+            <a:r>
+              <a:rPr sz="600" b="1">
+                <a:solidFill>
+                  <a:srgbClr val="201A47"/>
+                </a:solidFill>
+                <a:latin typeface="Calibri"/>
+              </a:rPr>
+              <a:t>Track record Prima </a:t>
+            </a:r>
+            <a:r>
+              <a:rPr sz="600">
+                <a:solidFill>
+                  <a:srgbClr val="333355"/>
+                </a:solidFill>
+                <a:latin typeface="Calibri"/>
+              </a:rPr>
+              <a:t>— 20 anos, R$ 1,36 BI VGV em execução, R$ 280MM receita e R$ 138MM EBITDA em 2025. Premiado ADEMI-BA.</a:t>
             </a:r>
           </a:p>
         </p:txBody>
       </p:sp>
       <p:pic>
         <p:nvPicPr>
-          <p:cNvPr id="16" name="Picture 15" descr="pool.jpg"/>
+          <p:cNvPr id="55" name="Picture 54" descr="aerial.jpg"/>
           <p:cNvPicPr>
             <a:picLocks noChangeAspect="1"/>
           </p:cNvPicPr>
@@ -3698,8 +5487,8 @@
         </p:blipFill>
         <p:spPr>
           <a:xfrm>
-            <a:off x="108000" y="3924000"/>
-            <a:ext cx="1143000" cy="792000"/>
+            <a:off x="108000" y="4608000"/>
+            <a:ext cx="1116000" cy="612000"/>
           </a:xfrm>
           <a:prstGeom prst="rect">
             <a:avLst/>
@@ -3708,7 +5497,7 @@
       </p:pic>
       <p:pic>
         <p:nvPicPr>
-          <p:cNvPr id="17" name="Picture 16" descr="entrance.jpg"/>
+          <p:cNvPr id="56" name="Picture 55" descr="pool.jpg"/>
           <p:cNvPicPr>
             <a:picLocks noChangeAspect="1"/>
           </p:cNvPicPr>
@@ -3722,8 +5511,8 @@
         </p:blipFill>
         <p:spPr>
           <a:xfrm>
-            <a:off x="1287000" y="3924000"/>
-            <a:ext cx="1143000" cy="792000"/>
+            <a:off x="1296000" y="4608000"/>
+            <a:ext cx="1116000" cy="612000"/>
           </a:xfrm>
           <a:prstGeom prst="rect">
             <a:avLst/>
@@ -3732,14 +5521,14 @@
       </p:pic>
       <p:sp>
         <p:nvSpPr>
-          <p:cNvPr id="18" name="TextBox 17"/>
+          <p:cNvPr id="57" name="TextBox 56"/>
           <p:cNvSpPr txBox="1"/>
           <p:nvPr/>
         </p:nvSpPr>
         <p:spPr>
           <a:xfrm>
-            <a:off x="108000" y="4824000"/>
-            <a:ext cx="2358000" cy="180000"/>
+            <a:off x="108000" y="5292000"/>
+            <a:ext cx="2304000" cy="432000"/>
           </a:xfrm>
           <a:prstGeom prst="rect">
             <a:avLst/>
@@ -3751,30 +5540,370 @@
             <a:spAutoFit/>
           </a:bodyPr>
           <a:lstStyle/>
-          <a:p>
-            <a:pPr algn="l"/>
-            <a:r>
-              <a:rPr sz="600" b="1" i="0">
+          <a:p/>
+          <a:p>
+            <a:pPr>
+              <a:spcBef>
+                <a:spcPts val="0"/>
+              </a:spcBef>
+              <a:spcAft>
+                <a:spcPts val="100"/>
+              </a:spcAft>
+            </a:pPr>
+            <a:r>
+              <a:rPr sz="500" b="1">
                 <a:solidFill>
                   <a:srgbClr val="C8A96D"/>
                 </a:solidFill>
                 <a:latin typeface="Calibri"/>
               </a:rPr>
-              <a:t>GRUPO PRIMA</a:t>
-            </a:r>
-          </a:p>
-        </p:txBody>
-      </p:sp>
-      <p:sp>
-        <p:nvSpPr>
-          <p:cNvPr id="19" name="TextBox 18"/>
+              <a:t>DESENVOLVEDOR &amp; OPERADOR</a:t>
+            </a:r>
+          </a:p>
+          <a:p>
+            <a:pPr>
+              <a:spcBef>
+                <a:spcPts val="0"/>
+              </a:spcBef>
+              <a:spcAft>
+                <a:spcPts val="200"/>
+              </a:spcAft>
+            </a:pPr>
+            <a:r>
+              <a:rPr sz="800" b="1">
+                <a:solidFill>
+                  <a:srgbClr val="201A47"/>
+                </a:solidFill>
+                <a:latin typeface="Calibri"/>
+              </a:rPr>
+              <a:t>Grupo Prima &amp; Fasano</a:t>
+            </a:r>
+          </a:p>
+        </p:txBody>
+      </p:sp>
+      <p:sp>
+        <p:nvSpPr>
+          <p:cNvPr id="58" name="Rectangle 57"/>
+          <p:cNvSpPr/>
+          <p:nvPr/>
+        </p:nvSpPr>
+        <p:spPr>
+          <a:xfrm>
+            <a:off x="108000" y="5562000"/>
+            <a:ext cx="2304000" cy="10800"/>
+          </a:xfrm>
+          <a:prstGeom prst="rect">
+            <a:avLst/>
+          </a:prstGeom>
+          <a:solidFill>
+            <a:srgbClr val="C8A96D"/>
+          </a:solidFill>
+          <a:ln>
+            <a:noFill/>
+          </a:ln>
+        </p:spPr>
+        <p:style>
+          <a:lnRef idx="1">
+            <a:schemeClr val="accent1"/>
+          </a:lnRef>
+          <a:fillRef idx="3">
+            <a:schemeClr val="accent1"/>
+          </a:fillRef>
+          <a:effectRef idx="2">
+            <a:schemeClr val="accent1"/>
+          </a:effectRef>
+          <a:fontRef idx="minor">
+            <a:schemeClr val="lt1"/>
+          </a:fontRef>
+        </p:style>
+        <p:txBody>
+          <a:bodyPr rtlCol="0" anchor="ctr"/>
+          <a:lstStyle/>
+          <a:p>
+            <a:pPr algn="ctr"/>
+          </a:p>
+        </p:txBody>
+      </p:sp>
+      <p:sp>
+        <p:nvSpPr>
+          <p:cNvPr id="59" name="Rectangle 58"/>
+          <p:cNvSpPr/>
+          <p:nvPr/>
+        </p:nvSpPr>
+        <p:spPr>
+          <a:xfrm>
+            <a:off x="118800" y="5652000"/>
+            <a:ext cx="746400" cy="306000"/>
+          </a:xfrm>
+          <a:prstGeom prst="rect">
+            <a:avLst/>
+          </a:prstGeom>
+          <a:solidFill>
+            <a:srgbClr val="F0EEF8"/>
+          </a:solidFill>
+          <a:ln>
+            <a:noFill/>
+          </a:ln>
+        </p:spPr>
+        <p:style>
+          <a:lnRef idx="1">
+            <a:schemeClr val="accent1"/>
+          </a:lnRef>
+          <a:fillRef idx="3">
+            <a:schemeClr val="accent1"/>
+          </a:fillRef>
+          <a:effectRef idx="2">
+            <a:schemeClr val="accent1"/>
+          </a:effectRef>
+          <a:fontRef idx="minor">
+            <a:schemeClr val="lt1"/>
+          </a:fontRef>
+        </p:style>
+        <p:txBody>
+          <a:bodyPr rtlCol="0" anchor="ctr"/>
+          <a:lstStyle/>
+          <a:p>
+            <a:pPr algn="ctr"/>
+          </a:p>
+        </p:txBody>
+      </p:sp>
+      <p:sp>
+        <p:nvSpPr>
+          <p:cNvPr id="60" name="TextBox 59"/>
           <p:cNvSpPr txBox="1"/>
           <p:nvPr/>
         </p:nvSpPr>
         <p:spPr>
           <a:xfrm>
-            <a:off x="108000" y="5004000"/>
-            <a:ext cx="2358000" cy="1296000"/>
+            <a:off x="118800" y="5670000"/>
+            <a:ext cx="746400" cy="306000"/>
+          </a:xfrm>
+          <a:prstGeom prst="rect">
+            <a:avLst/>
+          </a:prstGeom>
+          <a:noFill/>
+        </p:spPr>
+        <p:txBody>
+          <a:bodyPr wrap="none">
+            <a:spAutoFit/>
+          </a:bodyPr>
+          <a:lstStyle/>
+          <a:p>
+            <a:pPr algn="ctr"/>
+            <a:r>
+              <a:rPr sz="700" b="1">
+                <a:solidFill>
+                  <a:srgbClr val="201A47"/>
+                </a:solidFill>
+                <a:latin typeface="Calibri"/>
+              </a:rPr>
+              <a:t>R$280MM</a:t>
+            </a:r>
+          </a:p>
+          <a:p>
+            <a:pPr algn="ctr"/>
+            <a:r>
+              <a:rPr sz="450">
+                <a:solidFill>
+                  <a:srgbClr val="7F808F"/>
+                </a:solidFill>
+                <a:latin typeface="Calibri"/>
+              </a:rPr>
+              <a:t>Receita 2025</a:t>
+            </a:r>
+          </a:p>
+        </p:txBody>
+      </p:sp>
+      <p:sp>
+        <p:nvSpPr>
+          <p:cNvPr id="61" name="Rectangle 60"/>
+          <p:cNvSpPr/>
+          <p:nvPr/>
+        </p:nvSpPr>
+        <p:spPr>
+          <a:xfrm>
+            <a:off x="886800" y="5652000"/>
+            <a:ext cx="746400" cy="306000"/>
+          </a:xfrm>
+          <a:prstGeom prst="rect">
+            <a:avLst/>
+          </a:prstGeom>
+          <a:solidFill>
+            <a:srgbClr val="F0EEF8"/>
+          </a:solidFill>
+          <a:ln>
+            <a:noFill/>
+          </a:ln>
+        </p:spPr>
+        <p:style>
+          <a:lnRef idx="1">
+            <a:schemeClr val="accent1"/>
+          </a:lnRef>
+          <a:fillRef idx="3">
+            <a:schemeClr val="accent1"/>
+          </a:fillRef>
+          <a:effectRef idx="2">
+            <a:schemeClr val="accent1"/>
+          </a:effectRef>
+          <a:fontRef idx="minor">
+            <a:schemeClr val="lt1"/>
+          </a:fontRef>
+        </p:style>
+        <p:txBody>
+          <a:bodyPr rtlCol="0" anchor="ctr"/>
+          <a:lstStyle/>
+          <a:p>
+            <a:pPr algn="ctr"/>
+          </a:p>
+        </p:txBody>
+      </p:sp>
+      <p:sp>
+        <p:nvSpPr>
+          <p:cNvPr id="62" name="TextBox 61"/>
+          <p:cNvSpPr txBox="1"/>
+          <p:nvPr/>
+        </p:nvSpPr>
+        <p:spPr>
+          <a:xfrm>
+            <a:off x="886800" y="5670000"/>
+            <a:ext cx="746400" cy="306000"/>
+          </a:xfrm>
+          <a:prstGeom prst="rect">
+            <a:avLst/>
+          </a:prstGeom>
+          <a:noFill/>
+        </p:spPr>
+        <p:txBody>
+          <a:bodyPr wrap="none">
+            <a:spAutoFit/>
+          </a:bodyPr>
+          <a:lstStyle/>
+          <a:p>
+            <a:pPr algn="ctr"/>
+            <a:r>
+              <a:rPr sz="700" b="1">
+                <a:solidFill>
+                  <a:srgbClr val="201A47"/>
+                </a:solidFill>
+                <a:latin typeface="Calibri"/>
+              </a:rPr>
+              <a:t>R$138MM</a:t>
+            </a:r>
+          </a:p>
+          <a:p>
+            <a:pPr algn="ctr"/>
+            <a:r>
+              <a:rPr sz="450">
+                <a:solidFill>
+                  <a:srgbClr val="7F808F"/>
+                </a:solidFill>
+                <a:latin typeface="Calibri"/>
+              </a:rPr>
+              <a:t>EBITDA 2025</a:t>
+            </a:r>
+          </a:p>
+        </p:txBody>
+      </p:sp>
+      <p:sp>
+        <p:nvSpPr>
+          <p:cNvPr id="63" name="Rectangle 62"/>
+          <p:cNvSpPr/>
+          <p:nvPr/>
+        </p:nvSpPr>
+        <p:spPr>
+          <a:xfrm>
+            <a:off x="1654800" y="5652000"/>
+            <a:ext cx="746400" cy="306000"/>
+          </a:xfrm>
+          <a:prstGeom prst="rect">
+            <a:avLst/>
+          </a:prstGeom>
+          <a:solidFill>
+            <a:srgbClr val="F0EEF8"/>
+          </a:solidFill>
+          <a:ln>
+            <a:noFill/>
+          </a:ln>
+        </p:spPr>
+        <p:style>
+          <a:lnRef idx="1">
+            <a:schemeClr val="accent1"/>
+          </a:lnRef>
+          <a:fillRef idx="3">
+            <a:schemeClr val="accent1"/>
+          </a:fillRef>
+          <a:effectRef idx="2">
+            <a:schemeClr val="accent1"/>
+          </a:effectRef>
+          <a:fontRef idx="minor">
+            <a:schemeClr val="lt1"/>
+          </a:fontRef>
+        </p:style>
+        <p:txBody>
+          <a:bodyPr rtlCol="0" anchor="ctr"/>
+          <a:lstStyle/>
+          <a:p>
+            <a:pPr algn="ctr"/>
+          </a:p>
+        </p:txBody>
+      </p:sp>
+      <p:sp>
+        <p:nvSpPr>
+          <p:cNvPr id="64" name="TextBox 63"/>
+          <p:cNvSpPr txBox="1"/>
+          <p:nvPr/>
+        </p:nvSpPr>
+        <p:spPr>
+          <a:xfrm>
+            <a:off x="1654800" y="5670000"/>
+            <a:ext cx="746400" cy="306000"/>
+          </a:xfrm>
+          <a:prstGeom prst="rect">
+            <a:avLst/>
+          </a:prstGeom>
+          <a:noFill/>
+        </p:spPr>
+        <p:txBody>
+          <a:bodyPr wrap="none">
+            <a:spAutoFit/>
+          </a:bodyPr>
+          <a:lstStyle/>
+          <a:p>
+            <a:pPr algn="ctr"/>
+            <a:r>
+              <a:rPr sz="700" b="1">
+                <a:solidFill>
+                  <a:srgbClr val="201A47"/>
+                </a:solidFill>
+                <a:latin typeface="Calibri"/>
+              </a:rPr>
+              <a:t>R$1,36BI</a:t>
+            </a:r>
+          </a:p>
+          <a:p>
+            <a:pPr algn="ctr"/>
+            <a:r>
+              <a:rPr sz="450">
+                <a:solidFill>
+                  <a:srgbClr val="7F808F"/>
+                </a:solidFill>
+                <a:latin typeface="Calibri"/>
+              </a:rPr>
+              <a:t>VGV em Exec.</a:t>
+            </a:r>
+          </a:p>
+        </p:txBody>
+      </p:sp>
+      <p:sp>
+        <p:nvSpPr>
+          <p:cNvPr id="65" name="TextBox 64"/>
+          <p:cNvSpPr txBox="1"/>
+          <p:nvPr/>
+        </p:nvSpPr>
+        <p:spPr>
+          <a:xfrm>
+            <a:off x="108000" y="6012000"/>
+            <a:ext cx="2304000" cy="432000"/>
           </a:xfrm>
           <a:prstGeom prst="rect">
             <a:avLst/>
@@ -3787,121 +5916,211 @@
           </a:bodyPr>
           <a:lstStyle/>
           <a:p>
-            <a:pPr algn="l">
-              <a:lnSpc>
-                <a:spcPts val="900"/>
-              </a:lnSpc>
-            </a:pPr>
-            <a:r>
-              <a:rPr sz="700" b="0" i="0">
-                <a:solidFill>
-                  <a:srgbClr val="FFFFFF"/>
-                </a:solidFill>
-                <a:latin typeface="Calibri"/>
-              </a:rPr>
-              <a:t>•  Incorporadora com +20 anos de experiência</a:t>
-            </a:r>
-          </a:p>
-          <a:p>
-            <a:pPr algn="l">
-              <a:lnSpc>
-                <a:spcPts val="900"/>
-              </a:lnSpc>
+            <a:pPr>
               <a:spcBef>
-                <a:spcPts val="100"/>
+                <a:spcPts val="0"/>
               </a:spcBef>
             </a:pPr>
-            <a:r>
-              <a:rPr sz="700" b="0" i="0">
-                <a:solidFill>
-                  <a:srgbClr val="FFFFFF"/>
-                </a:solidFill>
-                <a:latin typeface="Calibri"/>
-              </a:rPr>
-              <a:t>•  Portfólio: +R$2Bi em VGV lançado</a:t>
-            </a:r>
           </a:p>
           <a:p>
             <a:pPr algn="l">
-              <a:lnSpc>
-                <a:spcPts val="900"/>
-              </a:lnSpc>
               <a:spcBef>
-                <a:spcPts val="100"/>
+                <a:spcPts val="150"/>
+              </a:spcBef>
+              <a:spcAft>
+                <a:spcPts val="0"/>
+              </a:spcAft>
+            </a:pPr>
+            <a:r>
+              <a:rPr sz="600">
+                <a:solidFill>
+                  <a:srgbClr val="887CD3"/>
+                </a:solidFill>
+                <a:latin typeface="Calibri"/>
+              </a:rPr>
+              <a:t>• </a:t>
+            </a:r>
+            <a:r>
+              <a:rPr sz="600">
+                <a:solidFill>
+                  <a:srgbClr val="333355"/>
+                </a:solidFill>
+                <a:latin typeface="Calibri"/>
+              </a:rPr>
+              <a:t>Fundado em 2005 · 6 famílias industriais espanholas · 570 colaboradores · Governança formal</a:t>
+            </a:r>
+          </a:p>
+          <a:p>
+            <a:pPr algn="l">
+              <a:spcBef>
+                <a:spcPts val="150"/>
+              </a:spcBef>
+              <a:spcAft>
+                <a:spcPts val="0"/>
+              </a:spcAft>
+            </a:pPr>
+            <a:r>
+              <a:rPr sz="600">
+                <a:solidFill>
+                  <a:srgbClr val="887CD3"/>
+                </a:solidFill>
+                <a:latin typeface="Calibri"/>
+              </a:rPr>
+              <a:t>• </a:t>
+            </a:r>
+            <a:r>
+              <a:rPr sz="600">
+                <a:solidFill>
+                  <a:srgbClr val="333355"/>
+                </a:solidFill>
+                <a:latin typeface="Calibri"/>
+              </a:rPr>
+              <a:t>Hotel Fasano Salvador · 3 hotéis em operação · 4 em desenvolvimento em Mamucabo/Baixio</a:t>
+            </a:r>
+          </a:p>
+        </p:txBody>
+      </p:sp>
+      <p:sp>
+        <p:nvSpPr>
+          <p:cNvPr id="66" name="Rectangle 65"/>
+          <p:cNvSpPr/>
+          <p:nvPr/>
+        </p:nvSpPr>
+        <p:spPr>
+          <a:xfrm>
+            <a:off x="108000" y="6372000"/>
+            <a:ext cx="2304000" cy="10800"/>
+          </a:xfrm>
+          <a:prstGeom prst="rect">
+            <a:avLst/>
+          </a:prstGeom>
+          <a:solidFill>
+            <a:srgbClr val="E8E8F0"/>
+          </a:solidFill>
+          <a:ln>
+            <a:noFill/>
+          </a:ln>
+        </p:spPr>
+        <p:style>
+          <a:lnRef idx="1">
+            <a:schemeClr val="accent1"/>
+          </a:lnRef>
+          <a:fillRef idx="3">
+            <a:schemeClr val="accent1"/>
+          </a:fillRef>
+          <a:effectRef idx="2">
+            <a:schemeClr val="accent1"/>
+          </a:effectRef>
+          <a:fontRef idx="minor">
+            <a:schemeClr val="lt1"/>
+          </a:fontRef>
+        </p:style>
+        <p:txBody>
+          <a:bodyPr rtlCol="0" anchor="ctr"/>
+          <a:lstStyle/>
+          <a:p>
+            <a:pPr algn="ctr"/>
+          </a:p>
+        </p:txBody>
+      </p:sp>
+      <p:sp>
+        <p:nvSpPr>
+          <p:cNvPr id="67" name="TextBox 66"/>
+          <p:cNvSpPr txBox="1"/>
+          <p:nvPr/>
+        </p:nvSpPr>
+        <p:spPr>
+          <a:xfrm>
+            <a:off x="108000" y="6444000"/>
+            <a:ext cx="2304000" cy="576000"/>
+          </a:xfrm>
+          <a:prstGeom prst="rect">
+            <a:avLst/>
+          </a:prstGeom>
+          <a:noFill/>
+        </p:spPr>
+        <p:txBody>
+          <a:bodyPr wrap="square">
+            <a:spAutoFit/>
+          </a:bodyPr>
+          <a:lstStyle/>
+          <a:p>
+            <a:pPr>
+              <a:spcBef>
+                <a:spcPts val="0"/>
               </a:spcBef>
             </a:pPr>
             <a:r>
-              <a:rPr sz="700" b="0" i="0">
-                <a:solidFill>
-                  <a:srgbClr val="FFFFFF"/>
-                </a:solidFill>
-                <a:latin typeface="Calibri"/>
-              </a:rPr>
-              <a:t>•  51% do capital do projeto</a:t>
+              <a:rPr sz="650" b="1">
+                <a:solidFill>
+                  <a:srgbClr val="201A47"/>
+                </a:solidFill>
+                <a:latin typeface="Calibri"/>
+              </a:rPr>
+              <a:t>Fasano — Desde 1902</a:t>
             </a:r>
           </a:p>
           <a:p>
             <a:pPr algn="l">
-              <a:lnSpc>
-                <a:spcPts val="900"/>
-              </a:lnSpc>
               <a:spcBef>
-                <a:spcPts val="100"/>
+                <a:spcPts val="150"/>
               </a:spcBef>
+              <a:spcAft>
+                <a:spcPts val="0"/>
+              </a:spcAft>
             </a:pPr>
             <a:r>
-              <a:rPr sz="700" b="0" i="0">
-                <a:solidFill>
-                  <a:srgbClr val="FFFFFF"/>
-                </a:solidFill>
-                <a:latin typeface="Calibri"/>
-              </a:rPr>
-              <a:t>•  AF Terreno Residencial (840.834m²): Outorgado para 4k unidades</a:t>
+              <a:rPr sz="600">
+                <a:solidFill>
+                  <a:srgbClr val="887CD3"/>
+                </a:solidFill>
+                <a:latin typeface="Calibri"/>
+              </a:rPr>
+              <a:t>• </a:t>
+            </a:r>
+            <a:r>
+              <a:rPr sz="600">
+                <a:solidFill>
+                  <a:srgbClr val="333355"/>
+                </a:solidFill>
+                <a:latin typeface="Calibri"/>
+              </a:rPr>
+              <a:t>Marca centenária de luxo e gastronomia premium · Hotéis icônicos em SP, RJ, Punta del Este e Salvador</a:t>
             </a:r>
           </a:p>
           <a:p>
             <a:pPr algn="l">
-              <a:lnSpc>
-                <a:spcPts val="900"/>
-              </a:lnSpc>
               <a:spcBef>
-                <a:spcPts val="100"/>
+                <a:spcPts val="150"/>
               </a:spcBef>
+              <a:spcAft>
+                <a:spcPts val="0"/>
+              </a:spcAft>
             </a:pPr>
             <a:r>
-              <a:rPr sz="700" b="0" i="0">
-                <a:solidFill>
-                  <a:srgbClr val="FFFFFF"/>
-                </a:solidFill>
-                <a:latin typeface="Calibri"/>
-              </a:rPr>
-              <a:t>•  AF Terreno Residencial (240.829m²): Outorgado para 4k unidades</a:t>
-            </a:r>
-          </a:p>
-          <a:p>
-            <a:pPr algn="l">
-              <a:lnSpc>
-                <a:spcPts val="900"/>
-              </a:lnSpc>
-              <a:spcBef>
-                <a:spcPts val="100"/>
-              </a:spcBef>
-            </a:pPr>
-            <a:r>
-              <a:rPr sz="700" b="0" i="0">
-                <a:solidFill>
-                  <a:srgbClr val="FFFFFF"/>
-                </a:solidFill>
-                <a:latin typeface="Calibri"/>
-              </a:rPr>
-              <a:t>•  AF Terreno Hoteleiro (300.076m²)</a:t>
+              <a:rPr sz="600">
+                <a:solidFill>
+                  <a:srgbClr val="887CD3"/>
+                </a:solidFill>
+                <a:latin typeface="Calibri"/>
+              </a:rPr>
+              <a:t>• </a:t>
+            </a:r>
+            <a:r>
+              <a:rPr sz="600">
+                <a:solidFill>
+                  <a:srgbClr val="333355"/>
+                </a:solidFill>
+                <a:latin typeface="Calibri"/>
+              </a:rPr>
+              <a:t>Agrega prestígio internacional e forte valorização imobiliária ao complexo Mamucabo</a:t>
             </a:r>
           </a:p>
         </p:txBody>
       </p:sp>
       <p:pic>
         <p:nvPicPr>
-          <p:cNvPr id="20" name="Picture 19" descr="villa.jpg"/>
+          <p:cNvPr id="68" name="Picture 67" descr="entrance.jpg"/>
           <p:cNvPicPr>
             <a:picLocks noChangeAspect="1"/>
           </p:cNvPicPr>
@@ -3915,8 +6134,8 @@
         </p:blipFill>
         <p:spPr>
           <a:xfrm>
-            <a:off x="108000" y="6228000"/>
-            <a:ext cx="1143000" cy="792000"/>
+            <a:off x="108000" y="6948000"/>
+            <a:ext cx="1116000" cy="576000"/>
           </a:xfrm>
           <a:prstGeom prst="rect">
             <a:avLst/>
@@ -3925,7 +6144,7 @@
       </p:pic>
       <p:pic>
         <p:nvPicPr>
-          <p:cNvPr id="21" name="Picture 20" descr="lobby.jpg"/>
+          <p:cNvPr id="69" name="Picture 68" descr="room.jpg"/>
           <p:cNvPicPr>
             <a:picLocks noChangeAspect="1"/>
           </p:cNvPicPr>
@@ -3939,8 +6158,8 @@
         </p:blipFill>
         <p:spPr>
           <a:xfrm>
-            <a:off x="1287000" y="6228000"/>
-            <a:ext cx="1143000" cy="792000"/>
+            <a:off x="1296000" y="6948000"/>
+            <a:ext cx="1116000" cy="576000"/>
           </a:xfrm>
           <a:prstGeom prst="rect">
             <a:avLst/>
@@ -3949,14 +6168,14 @@
       </p:pic>
       <p:sp>
         <p:nvSpPr>
-          <p:cNvPr id="22" name="TextBox 21"/>
+          <p:cNvPr id="70" name="TextBox 69"/>
           <p:cNvSpPr txBox="1"/>
           <p:nvPr/>
         </p:nvSpPr>
         <p:spPr>
           <a:xfrm>
-            <a:off x="2574000" y="2484000"/>
-            <a:ext cx="2412000" cy="180000"/>
+            <a:off x="2628000" y="2844000"/>
+            <a:ext cx="2304000" cy="432000"/>
           </a:xfrm>
           <a:prstGeom prst="rect">
             <a:avLst/>
@@ -3968,30 +6187,871 @@
             <a:spAutoFit/>
           </a:bodyPr>
           <a:lstStyle/>
-          <a:p>
-            <a:pPr algn="l"/>
-            <a:r>
-              <a:rPr sz="600" b="1" i="0">
+          <a:p/>
+          <a:p>
+            <a:pPr>
+              <a:spcBef>
+                <a:spcPts val="0"/>
+              </a:spcBef>
+              <a:spcAft>
+                <a:spcPts val="100"/>
+              </a:spcAft>
+            </a:pPr>
+            <a:r>
+              <a:rPr sz="500" b="1">
                 <a:solidFill>
                   <a:srgbClr val="C8A96D"/>
                 </a:solidFill>
                 <a:latin typeface="Calibri"/>
               </a:rPr>
-              <a:t>FASANO</a:t>
-            </a:r>
-          </a:p>
-        </p:txBody>
-      </p:sp>
-      <p:sp>
-        <p:nvSpPr>
-          <p:cNvPr id="23" name="TextBox 22"/>
+              <a:t>OPERAÇÃO FINANCEIRA</a:t>
+            </a:r>
+          </a:p>
+          <a:p>
+            <a:pPr>
+              <a:spcBef>
+                <a:spcPts val="0"/>
+              </a:spcBef>
+              <a:spcAft>
+                <a:spcPts val="200"/>
+              </a:spcAft>
+            </a:pPr>
+            <a:r>
+              <a:rPr sz="800" b="1">
+                <a:solidFill>
+                  <a:srgbClr val="201A47"/>
+                </a:solidFill>
+                <a:latin typeface="Calibri"/>
+              </a:rPr>
+              <a:t>Estrutura de Investimento · CRI</a:t>
+            </a:r>
+          </a:p>
+        </p:txBody>
+      </p:sp>
+      <p:sp>
+        <p:nvSpPr>
+          <p:cNvPr id="71" name="Rectangle 70"/>
+          <p:cNvSpPr/>
+          <p:nvPr/>
+        </p:nvSpPr>
+        <p:spPr>
+          <a:xfrm>
+            <a:off x="2628000" y="3114000"/>
+            <a:ext cx="2304000" cy="10800"/>
+          </a:xfrm>
+          <a:prstGeom prst="rect">
+            <a:avLst/>
+          </a:prstGeom>
+          <a:solidFill>
+            <a:srgbClr val="C8A96D"/>
+          </a:solidFill>
+          <a:ln>
+            <a:noFill/>
+          </a:ln>
+        </p:spPr>
+        <p:style>
+          <a:lnRef idx="1">
+            <a:schemeClr val="accent1"/>
+          </a:lnRef>
+          <a:fillRef idx="3">
+            <a:schemeClr val="accent1"/>
+          </a:fillRef>
+          <a:effectRef idx="2">
+            <a:schemeClr val="accent1"/>
+          </a:effectRef>
+          <a:fontRef idx="minor">
+            <a:schemeClr val="lt1"/>
+          </a:fontRef>
+        </p:style>
+        <p:txBody>
+          <a:bodyPr rtlCol="0" anchor="ctr"/>
+          <a:lstStyle/>
+          <a:p>
+            <a:pPr algn="ctr"/>
+          </a:p>
+        </p:txBody>
+      </p:sp>
+      <p:sp>
+        <p:nvSpPr>
+          <p:cNvPr id="72" name="Rectangle 71"/>
+          <p:cNvSpPr/>
+          <p:nvPr/>
+        </p:nvSpPr>
+        <p:spPr>
+          <a:xfrm>
+            <a:off x="2628000" y="3204000"/>
+            <a:ext cx="2304000" cy="136800"/>
+          </a:xfrm>
+          <a:prstGeom prst="rect">
+            <a:avLst/>
+          </a:prstGeom>
+          <a:solidFill>
+            <a:srgbClr val="F5F3FB"/>
+          </a:solidFill>
+          <a:ln>
+            <a:noFill/>
+          </a:ln>
+        </p:spPr>
+        <p:style>
+          <a:lnRef idx="1">
+            <a:schemeClr val="accent1"/>
+          </a:lnRef>
+          <a:fillRef idx="3">
+            <a:schemeClr val="accent1"/>
+          </a:fillRef>
+          <a:effectRef idx="2">
+            <a:schemeClr val="accent1"/>
+          </a:effectRef>
+          <a:fontRef idx="minor">
+            <a:schemeClr val="lt1"/>
+          </a:fontRef>
+        </p:style>
+        <p:txBody>
+          <a:bodyPr rtlCol="0" anchor="ctr"/>
+          <a:lstStyle/>
+          <a:p>
+            <a:pPr algn="ctr"/>
+          </a:p>
+        </p:txBody>
+      </p:sp>
+      <p:sp>
+        <p:nvSpPr>
+          <p:cNvPr id="73" name="TextBox 72"/>
           <p:cNvSpPr txBox="1"/>
           <p:nvPr/>
         </p:nvSpPr>
         <p:spPr>
           <a:xfrm>
-            <a:off x="2574000" y="2664000"/>
-            <a:ext cx="2412000" cy="900000"/>
+            <a:off x="2656800" y="3218400"/>
+            <a:ext cx="2250000" cy="126000"/>
+          </a:xfrm>
+          <a:prstGeom prst="rect">
+            <a:avLst/>
+          </a:prstGeom>
+          <a:noFill/>
+        </p:spPr>
+        <p:txBody>
+          <a:bodyPr wrap="none">
+            <a:spAutoFit/>
+          </a:bodyPr>
+          <a:lstStyle/>
+          <a:p>
+            <a:pPr>
+              <a:spcBef>
+                <a:spcPts val="0"/>
+              </a:spcBef>
+            </a:pPr>
+            <a:r>
+              <a:rPr sz="550">
+                <a:solidFill>
+                  <a:srgbClr val="7F808F"/>
+                </a:solidFill>
+                <a:latin typeface="Calibri"/>
+              </a:rPr>
+              <a:t>Instrumento  </a:t>
+            </a:r>
+            <a:r>
+              <a:rPr sz="550" b="1">
+                <a:solidFill>
+                  <a:srgbClr val="221A50"/>
+                </a:solidFill>
+                <a:latin typeface="Calibri"/>
+              </a:rPr>
+              <a:t>CRI · Oferta pública (Res. CVM 160/22)</a:t>
+            </a:r>
+          </a:p>
+        </p:txBody>
+      </p:sp>
+      <p:sp>
+        <p:nvSpPr>
+          <p:cNvPr id="74" name="Rectangle 73"/>
+          <p:cNvSpPr/>
+          <p:nvPr/>
+        </p:nvSpPr>
+        <p:spPr>
+          <a:xfrm>
+            <a:off x="2628000" y="3348000"/>
+            <a:ext cx="2304000" cy="136800"/>
+          </a:xfrm>
+          <a:prstGeom prst="rect">
+            <a:avLst/>
+          </a:prstGeom>
+          <a:solidFill>
+            <a:srgbClr val="FFFFFF"/>
+          </a:solidFill>
+          <a:ln>
+            <a:noFill/>
+          </a:ln>
+        </p:spPr>
+        <p:style>
+          <a:lnRef idx="1">
+            <a:schemeClr val="accent1"/>
+          </a:lnRef>
+          <a:fillRef idx="3">
+            <a:schemeClr val="accent1"/>
+          </a:fillRef>
+          <a:effectRef idx="2">
+            <a:schemeClr val="accent1"/>
+          </a:effectRef>
+          <a:fontRef idx="minor">
+            <a:schemeClr val="lt1"/>
+          </a:fontRef>
+        </p:style>
+        <p:txBody>
+          <a:bodyPr rtlCol="0" anchor="ctr"/>
+          <a:lstStyle/>
+          <a:p>
+            <a:pPr algn="ctr"/>
+          </a:p>
+        </p:txBody>
+      </p:sp>
+      <p:sp>
+        <p:nvSpPr>
+          <p:cNvPr id="75" name="TextBox 74"/>
+          <p:cNvSpPr txBox="1"/>
+          <p:nvPr/>
+        </p:nvSpPr>
+        <p:spPr>
+          <a:xfrm>
+            <a:off x="2656800" y="3362400"/>
+            <a:ext cx="2250000" cy="126000"/>
+          </a:xfrm>
+          <a:prstGeom prst="rect">
+            <a:avLst/>
+          </a:prstGeom>
+          <a:noFill/>
+        </p:spPr>
+        <p:txBody>
+          <a:bodyPr wrap="none">
+            <a:spAutoFit/>
+          </a:bodyPr>
+          <a:lstStyle/>
+          <a:p>
+            <a:pPr>
+              <a:spcBef>
+                <a:spcPts val="0"/>
+              </a:spcBef>
+            </a:pPr>
+            <a:r>
+              <a:rPr sz="550">
+                <a:solidFill>
+                  <a:srgbClr val="7F808F"/>
+                </a:solidFill>
+                <a:latin typeface="Calibri"/>
+              </a:rPr>
+              <a:t>Volume  </a:t>
+            </a:r>
+            <a:r>
+              <a:rPr sz="550" b="1">
+                <a:solidFill>
+                  <a:srgbClr val="221A50"/>
+                </a:solidFill>
+                <a:latin typeface="Calibri"/>
+              </a:rPr>
+              <a:t>R$ 170MM · 5 integralizações semestrais</a:t>
+            </a:r>
+          </a:p>
+        </p:txBody>
+      </p:sp>
+      <p:sp>
+        <p:nvSpPr>
+          <p:cNvPr id="76" name="Rectangle 75"/>
+          <p:cNvSpPr/>
+          <p:nvPr/>
+        </p:nvSpPr>
+        <p:spPr>
+          <a:xfrm>
+            <a:off x="2628000" y="3492000"/>
+            <a:ext cx="2304000" cy="136800"/>
+          </a:xfrm>
+          <a:prstGeom prst="rect">
+            <a:avLst/>
+          </a:prstGeom>
+          <a:solidFill>
+            <a:srgbClr val="F5F3FB"/>
+          </a:solidFill>
+          <a:ln>
+            <a:noFill/>
+          </a:ln>
+        </p:spPr>
+        <p:style>
+          <a:lnRef idx="1">
+            <a:schemeClr val="accent1"/>
+          </a:lnRef>
+          <a:fillRef idx="3">
+            <a:schemeClr val="accent1"/>
+          </a:fillRef>
+          <a:effectRef idx="2">
+            <a:schemeClr val="accent1"/>
+          </a:effectRef>
+          <a:fontRef idx="minor">
+            <a:schemeClr val="lt1"/>
+          </a:fontRef>
+        </p:style>
+        <p:txBody>
+          <a:bodyPr rtlCol="0" anchor="ctr"/>
+          <a:lstStyle/>
+          <a:p>
+            <a:pPr algn="ctr"/>
+          </a:p>
+        </p:txBody>
+      </p:sp>
+      <p:sp>
+        <p:nvSpPr>
+          <p:cNvPr id="77" name="TextBox 76"/>
+          <p:cNvSpPr txBox="1"/>
+          <p:nvPr/>
+        </p:nvSpPr>
+        <p:spPr>
+          <a:xfrm>
+            <a:off x="2656800" y="3506400"/>
+            <a:ext cx="2250000" cy="126000"/>
+          </a:xfrm>
+          <a:prstGeom prst="rect">
+            <a:avLst/>
+          </a:prstGeom>
+          <a:noFill/>
+        </p:spPr>
+        <p:txBody>
+          <a:bodyPr wrap="none">
+            <a:spAutoFit/>
+          </a:bodyPr>
+          <a:lstStyle/>
+          <a:p>
+            <a:pPr>
+              <a:spcBef>
+                <a:spcPts val="0"/>
+              </a:spcBef>
+            </a:pPr>
+            <a:r>
+              <a:rPr sz="550">
+                <a:solidFill>
+                  <a:srgbClr val="7F808F"/>
+                </a:solidFill>
+                <a:latin typeface="Calibri"/>
+              </a:rPr>
+              <a:t>Devedoras  </a:t>
+            </a:r>
+            <a:r>
+              <a:rPr sz="550" b="1">
+                <a:solidFill>
+                  <a:srgbClr val="221A50"/>
+                </a:solidFill>
+                <a:latin typeface="Calibri"/>
+              </a:rPr>
+              <a:t>FAS Mamucabo Hotelaria + Empreendimentos Ltda.</a:t>
+            </a:r>
+          </a:p>
+        </p:txBody>
+      </p:sp>
+      <p:sp>
+        <p:nvSpPr>
+          <p:cNvPr id="78" name="Rectangle 77"/>
+          <p:cNvSpPr/>
+          <p:nvPr/>
+        </p:nvSpPr>
+        <p:spPr>
+          <a:xfrm>
+            <a:off x="2628000" y="3636000"/>
+            <a:ext cx="2304000" cy="136800"/>
+          </a:xfrm>
+          <a:prstGeom prst="rect">
+            <a:avLst/>
+          </a:prstGeom>
+          <a:solidFill>
+            <a:srgbClr val="FFFFFF"/>
+          </a:solidFill>
+          <a:ln>
+            <a:noFill/>
+          </a:ln>
+        </p:spPr>
+        <p:style>
+          <a:lnRef idx="1">
+            <a:schemeClr val="accent1"/>
+          </a:lnRef>
+          <a:fillRef idx="3">
+            <a:schemeClr val="accent1"/>
+          </a:fillRef>
+          <a:effectRef idx="2">
+            <a:schemeClr val="accent1"/>
+          </a:effectRef>
+          <a:fontRef idx="minor">
+            <a:schemeClr val="lt1"/>
+          </a:fontRef>
+        </p:style>
+        <p:txBody>
+          <a:bodyPr rtlCol="0" anchor="ctr"/>
+          <a:lstStyle/>
+          <a:p>
+            <a:pPr algn="ctr"/>
+          </a:p>
+        </p:txBody>
+      </p:sp>
+      <p:sp>
+        <p:nvSpPr>
+          <p:cNvPr id="79" name="TextBox 78"/>
+          <p:cNvSpPr txBox="1"/>
+          <p:nvPr/>
+        </p:nvSpPr>
+        <p:spPr>
+          <a:xfrm>
+            <a:off x="2656800" y="3650400"/>
+            <a:ext cx="2250000" cy="126000"/>
+          </a:xfrm>
+          <a:prstGeom prst="rect">
+            <a:avLst/>
+          </a:prstGeom>
+          <a:noFill/>
+        </p:spPr>
+        <p:txBody>
+          <a:bodyPr wrap="none">
+            <a:spAutoFit/>
+          </a:bodyPr>
+          <a:lstStyle/>
+          <a:p>
+            <a:pPr>
+              <a:spcBef>
+                <a:spcPts val="0"/>
+              </a:spcBef>
+            </a:pPr>
+            <a:r>
+              <a:rPr sz="550">
+                <a:solidFill>
+                  <a:srgbClr val="7F808F"/>
+                </a:solidFill>
+                <a:latin typeface="Calibri"/>
+              </a:rPr>
+              <a:t>Remuneração  </a:t>
+            </a:r>
+            <a:r>
+              <a:rPr sz="550" b="1">
+                <a:solidFill>
+                  <a:srgbClr val="201A47"/>
+                </a:solidFill>
+                <a:latin typeface="Calibri"/>
+              </a:rPr>
+              <a:t>IPCA + 12,5% a.a.</a:t>
+            </a:r>
+          </a:p>
+        </p:txBody>
+      </p:sp>
+      <p:sp>
+        <p:nvSpPr>
+          <p:cNvPr id="80" name="Rectangle 79"/>
+          <p:cNvSpPr/>
+          <p:nvPr/>
+        </p:nvSpPr>
+        <p:spPr>
+          <a:xfrm>
+            <a:off x="2628000" y="3780000"/>
+            <a:ext cx="2304000" cy="136800"/>
+          </a:xfrm>
+          <a:prstGeom prst="rect">
+            <a:avLst/>
+          </a:prstGeom>
+          <a:solidFill>
+            <a:srgbClr val="F5F3FB"/>
+          </a:solidFill>
+          <a:ln>
+            <a:noFill/>
+          </a:ln>
+        </p:spPr>
+        <p:style>
+          <a:lnRef idx="1">
+            <a:schemeClr val="accent1"/>
+          </a:lnRef>
+          <a:fillRef idx="3">
+            <a:schemeClr val="accent1"/>
+          </a:fillRef>
+          <a:effectRef idx="2">
+            <a:schemeClr val="accent1"/>
+          </a:effectRef>
+          <a:fontRef idx="minor">
+            <a:schemeClr val="lt1"/>
+          </a:fontRef>
+        </p:style>
+        <p:txBody>
+          <a:bodyPr rtlCol="0" anchor="ctr"/>
+          <a:lstStyle/>
+          <a:p>
+            <a:pPr algn="ctr"/>
+          </a:p>
+        </p:txBody>
+      </p:sp>
+      <p:sp>
+        <p:nvSpPr>
+          <p:cNvPr id="81" name="TextBox 80"/>
+          <p:cNvSpPr txBox="1"/>
+          <p:nvPr/>
+        </p:nvSpPr>
+        <p:spPr>
+          <a:xfrm>
+            <a:off x="2656800" y="3794400"/>
+            <a:ext cx="2250000" cy="126000"/>
+          </a:xfrm>
+          <a:prstGeom prst="rect">
+            <a:avLst/>
+          </a:prstGeom>
+          <a:noFill/>
+        </p:spPr>
+        <p:txBody>
+          <a:bodyPr wrap="none">
+            <a:spAutoFit/>
+          </a:bodyPr>
+          <a:lstStyle/>
+          <a:p>
+            <a:pPr>
+              <a:spcBef>
+                <a:spcPts val="0"/>
+              </a:spcBef>
+            </a:pPr>
+            <a:r>
+              <a:rPr sz="550">
+                <a:solidFill>
+                  <a:srgbClr val="7F808F"/>
+                </a:solidFill>
+                <a:latin typeface="Calibri"/>
+              </a:rPr>
+              <a:t>Juros  </a:t>
+            </a:r>
+            <a:r>
+              <a:rPr sz="550" b="1">
+                <a:solidFill>
+                  <a:srgbClr val="221A50"/>
+                </a:solidFill>
+                <a:latin typeface="Calibri"/>
+              </a:rPr>
+              <a:t>Mensal, sem carência</a:t>
+            </a:r>
+          </a:p>
+        </p:txBody>
+      </p:sp>
+      <p:sp>
+        <p:nvSpPr>
+          <p:cNvPr id="82" name="Rectangle 81"/>
+          <p:cNvSpPr/>
+          <p:nvPr/>
+        </p:nvSpPr>
+        <p:spPr>
+          <a:xfrm>
+            <a:off x="2628000" y="3924000"/>
+            <a:ext cx="2304000" cy="136800"/>
+          </a:xfrm>
+          <a:prstGeom prst="rect">
+            <a:avLst/>
+          </a:prstGeom>
+          <a:solidFill>
+            <a:srgbClr val="FFFFFF"/>
+          </a:solidFill>
+          <a:ln>
+            <a:noFill/>
+          </a:ln>
+        </p:spPr>
+        <p:style>
+          <a:lnRef idx="1">
+            <a:schemeClr val="accent1"/>
+          </a:lnRef>
+          <a:fillRef idx="3">
+            <a:schemeClr val="accent1"/>
+          </a:fillRef>
+          <a:effectRef idx="2">
+            <a:schemeClr val="accent1"/>
+          </a:effectRef>
+          <a:fontRef idx="minor">
+            <a:schemeClr val="lt1"/>
+          </a:fontRef>
+        </p:style>
+        <p:txBody>
+          <a:bodyPr rtlCol="0" anchor="ctr"/>
+          <a:lstStyle/>
+          <a:p>
+            <a:pPr algn="ctr"/>
+          </a:p>
+        </p:txBody>
+      </p:sp>
+      <p:sp>
+        <p:nvSpPr>
+          <p:cNvPr id="83" name="TextBox 82"/>
+          <p:cNvSpPr txBox="1"/>
+          <p:nvPr/>
+        </p:nvSpPr>
+        <p:spPr>
+          <a:xfrm>
+            <a:off x="2656800" y="3938400"/>
+            <a:ext cx="2250000" cy="126000"/>
+          </a:xfrm>
+          <a:prstGeom prst="rect">
+            <a:avLst/>
+          </a:prstGeom>
+          <a:noFill/>
+        </p:spPr>
+        <p:txBody>
+          <a:bodyPr wrap="none">
+            <a:spAutoFit/>
+          </a:bodyPr>
+          <a:lstStyle/>
+          <a:p>
+            <a:pPr>
+              <a:spcBef>
+                <a:spcPts val="0"/>
+              </a:spcBef>
+            </a:pPr>
+            <a:r>
+              <a:rPr sz="550">
+                <a:solidFill>
+                  <a:srgbClr val="7F808F"/>
+                </a:solidFill>
+                <a:latin typeface="Calibri"/>
+              </a:rPr>
+              <a:t>Prazo  </a:t>
+            </a:r>
+            <a:r>
+              <a:rPr sz="550" b="1">
+                <a:solidFill>
+                  <a:srgbClr val="221A50"/>
+                </a:solidFill>
+                <a:latin typeface="Calibri"/>
+              </a:rPr>
+              <a:t>Até 84 meses (ou 12m após entrega)</a:t>
+            </a:r>
+          </a:p>
+        </p:txBody>
+      </p:sp>
+      <p:sp>
+        <p:nvSpPr>
+          <p:cNvPr id="84" name="Rectangle 83"/>
+          <p:cNvSpPr/>
+          <p:nvPr/>
+        </p:nvSpPr>
+        <p:spPr>
+          <a:xfrm>
+            <a:off x="2628000" y="4068000"/>
+            <a:ext cx="2304000" cy="136800"/>
+          </a:xfrm>
+          <a:prstGeom prst="rect">
+            <a:avLst/>
+          </a:prstGeom>
+          <a:solidFill>
+            <a:srgbClr val="F5F3FB"/>
+          </a:solidFill>
+          <a:ln>
+            <a:noFill/>
+          </a:ln>
+        </p:spPr>
+        <p:style>
+          <a:lnRef idx="1">
+            <a:schemeClr val="accent1"/>
+          </a:lnRef>
+          <a:fillRef idx="3">
+            <a:schemeClr val="accent1"/>
+          </a:fillRef>
+          <a:effectRef idx="2">
+            <a:schemeClr val="accent1"/>
+          </a:effectRef>
+          <a:fontRef idx="minor">
+            <a:schemeClr val="lt1"/>
+          </a:fontRef>
+        </p:style>
+        <p:txBody>
+          <a:bodyPr rtlCol="0" anchor="ctr"/>
+          <a:lstStyle/>
+          <a:p>
+            <a:pPr algn="ctr"/>
+          </a:p>
+        </p:txBody>
+      </p:sp>
+      <p:sp>
+        <p:nvSpPr>
+          <p:cNvPr id="85" name="TextBox 84"/>
+          <p:cNvSpPr txBox="1"/>
+          <p:nvPr/>
+        </p:nvSpPr>
+        <p:spPr>
+          <a:xfrm>
+            <a:off x="2656800" y="4082400"/>
+            <a:ext cx="2250000" cy="126000"/>
+          </a:xfrm>
+          <a:prstGeom prst="rect">
+            <a:avLst/>
+          </a:prstGeom>
+          <a:noFill/>
+        </p:spPr>
+        <p:txBody>
+          <a:bodyPr wrap="none">
+            <a:spAutoFit/>
+          </a:bodyPr>
+          <a:lstStyle/>
+          <a:p>
+            <a:pPr>
+              <a:spcBef>
+                <a:spcPts val="0"/>
+              </a:spcBef>
+            </a:pPr>
+            <a:r>
+              <a:rPr sz="550">
+                <a:solidFill>
+                  <a:srgbClr val="7F808F"/>
+                </a:solidFill>
+                <a:latin typeface="Calibri"/>
+              </a:rPr>
+              <a:t>Amortização  </a:t>
+            </a:r>
+            <a:r>
+              <a:rPr sz="550" b="1">
+                <a:solidFill>
+                  <a:srgbClr val="221A50"/>
+                </a:solidFill>
+                <a:latin typeface="Calibri"/>
+              </a:rPr>
+              <a:t>Full cash sweep pós-entrega Residencial</a:t>
+            </a:r>
+          </a:p>
+        </p:txBody>
+      </p:sp>
+      <p:sp>
+        <p:nvSpPr>
+          <p:cNvPr id="86" name="Rectangle 85"/>
+          <p:cNvSpPr/>
+          <p:nvPr/>
+        </p:nvSpPr>
+        <p:spPr>
+          <a:xfrm>
+            <a:off x="2628000" y="4212000"/>
+            <a:ext cx="2304000" cy="136800"/>
+          </a:xfrm>
+          <a:prstGeom prst="rect">
+            <a:avLst/>
+          </a:prstGeom>
+          <a:solidFill>
+            <a:srgbClr val="FFFFFF"/>
+          </a:solidFill>
+          <a:ln>
+            <a:noFill/>
+          </a:ln>
+        </p:spPr>
+        <p:style>
+          <a:lnRef idx="1">
+            <a:schemeClr val="accent1"/>
+          </a:lnRef>
+          <a:fillRef idx="3">
+            <a:schemeClr val="accent1"/>
+          </a:fillRef>
+          <a:effectRef idx="2">
+            <a:schemeClr val="accent1"/>
+          </a:effectRef>
+          <a:fontRef idx="minor">
+            <a:schemeClr val="lt1"/>
+          </a:fontRef>
+        </p:style>
+        <p:txBody>
+          <a:bodyPr rtlCol="0" anchor="ctr"/>
+          <a:lstStyle/>
+          <a:p>
+            <a:pPr algn="ctr"/>
+          </a:p>
+        </p:txBody>
+      </p:sp>
+      <p:sp>
+        <p:nvSpPr>
+          <p:cNvPr id="87" name="TextBox 86"/>
+          <p:cNvSpPr txBox="1"/>
+          <p:nvPr/>
+        </p:nvSpPr>
+        <p:spPr>
+          <a:xfrm>
+            <a:off x="2656800" y="4226400"/>
+            <a:ext cx="2250000" cy="126000"/>
+          </a:xfrm>
+          <a:prstGeom prst="rect">
+            <a:avLst/>
+          </a:prstGeom>
+          <a:noFill/>
+        </p:spPr>
+        <p:txBody>
+          <a:bodyPr wrap="none">
+            <a:spAutoFit/>
+          </a:bodyPr>
+          <a:lstStyle/>
+          <a:p>
+            <a:pPr>
+              <a:spcBef>
+                <a:spcPts val="0"/>
+              </a:spcBef>
+            </a:pPr>
+            <a:r>
+              <a:rPr sz="550">
+                <a:solidFill>
+                  <a:srgbClr val="7F808F"/>
+                </a:solidFill>
+                <a:latin typeface="Calibri"/>
+              </a:rPr>
+              <a:t>Duration  </a:t>
+            </a:r>
+            <a:r>
+              <a:rPr sz="550" b="1">
+                <a:solidFill>
+                  <a:srgbClr val="221A50"/>
+                </a:solidFill>
+                <a:latin typeface="Calibri"/>
+              </a:rPr>
+              <a:t>3,06 anos · Cobertura mínima 120%</a:t>
+            </a:r>
+          </a:p>
+        </p:txBody>
+      </p:sp>
+      <p:sp>
+        <p:nvSpPr>
+          <p:cNvPr id="88" name="Rectangle 87"/>
+          <p:cNvSpPr/>
+          <p:nvPr/>
+        </p:nvSpPr>
+        <p:spPr>
+          <a:xfrm>
+            <a:off x="2628000" y="4410000"/>
+            <a:ext cx="2304000" cy="360000"/>
+          </a:xfrm>
+          <a:prstGeom prst="rect">
+            <a:avLst/>
+          </a:prstGeom>
+          <a:solidFill>
+            <a:srgbClr val="201A47"/>
+          </a:solidFill>
+          <a:ln>
+            <a:noFill/>
+          </a:ln>
+        </p:spPr>
+        <p:style>
+          <a:lnRef idx="1">
+            <a:schemeClr val="accent1"/>
+          </a:lnRef>
+          <a:fillRef idx="3">
+            <a:schemeClr val="accent1"/>
+          </a:fillRef>
+          <a:effectRef idx="2">
+            <a:schemeClr val="accent1"/>
+          </a:effectRef>
+          <a:fontRef idx="minor">
+            <a:schemeClr val="lt1"/>
+          </a:fontRef>
+        </p:style>
+        <p:txBody>
+          <a:bodyPr rtlCol="0" anchor="ctr"/>
+          <a:lstStyle/>
+          <a:p>
+            <a:pPr algn="ctr"/>
+          </a:p>
+        </p:txBody>
+      </p:sp>
+      <p:sp>
+        <p:nvSpPr>
+          <p:cNvPr id="89" name="TextBox 88"/>
+          <p:cNvSpPr txBox="1"/>
+          <p:nvPr/>
+        </p:nvSpPr>
+        <p:spPr>
+          <a:xfrm>
+            <a:off x="2664000" y="4428000"/>
+            <a:ext cx="2232000" cy="360000"/>
           </a:xfrm>
           <a:prstGeom prst="rect">
             <a:avLst/>
@@ -4004,83 +7064,766 @@
           </a:bodyPr>
           <a:lstStyle/>
           <a:p>
-            <a:pPr algn="l">
-              <a:lnSpc>
-                <a:spcPts val="900"/>
-              </a:lnSpc>
-            </a:pPr>
-            <a:r>
-              <a:rPr sz="700" b="0" i="0">
+            <a:r>
+              <a:rPr sz="1400" b="1">
+                <a:solidFill>
+                  <a:srgbClr val="C8A96D"/>
+                </a:solidFill>
+                <a:latin typeface="Calibri"/>
+              </a:rPr>
+              <a:t>30,9% a.a.</a:t>
+            </a:r>
+          </a:p>
+          <a:p>
+            <a:r>
+              <a:rPr sz="550">
                 <a:solidFill>
                   <a:srgbClr val="FFFFFF"/>
                 </a:solidFill>
                 <a:latin typeface="Calibri"/>
               </a:rPr>
-              <a:t>•  Rede hoteleira de ultra-luxo referência no Brasil</a:t>
-            </a:r>
-          </a:p>
-          <a:p>
-            <a:pPr algn="l">
-              <a:lnSpc>
-                <a:spcPts val="900"/>
-              </a:lnSpc>
+              <a:t>TIR Equity — Investidor (49%) · Prazo 2026–2038</a:t>
+            </a:r>
+          </a:p>
+        </p:txBody>
+      </p:sp>
+      <p:sp>
+        <p:nvSpPr>
+          <p:cNvPr id="90" name="Rectangle 89"/>
+          <p:cNvSpPr/>
+          <p:nvPr/>
+        </p:nvSpPr>
+        <p:spPr>
+          <a:xfrm>
+            <a:off x="2628000" y="4842000"/>
+            <a:ext cx="1116000" cy="432000"/>
+          </a:xfrm>
+          <a:prstGeom prst="rect">
+            <a:avLst/>
+          </a:prstGeom>
+          <a:solidFill>
+            <a:srgbClr val="887CD3"/>
+          </a:solidFill>
+          <a:ln>
+            <a:noFill/>
+          </a:ln>
+        </p:spPr>
+        <p:style>
+          <a:lnRef idx="1">
+            <a:schemeClr val="accent1"/>
+          </a:lnRef>
+          <a:fillRef idx="3">
+            <a:schemeClr val="accent1"/>
+          </a:fillRef>
+          <a:effectRef idx="2">
+            <a:schemeClr val="accent1"/>
+          </a:effectRef>
+          <a:fontRef idx="minor">
+            <a:schemeClr val="lt1"/>
+          </a:fontRef>
+        </p:style>
+        <p:txBody>
+          <a:bodyPr rtlCol="0" anchor="ctr"/>
+          <a:lstStyle/>
+          <a:p>
+            <a:pPr algn="ctr"/>
+          </a:p>
+        </p:txBody>
+      </p:sp>
+      <p:sp>
+        <p:nvSpPr>
+          <p:cNvPr id="91" name="TextBox 90"/>
+          <p:cNvSpPr txBox="1"/>
+          <p:nvPr/>
+        </p:nvSpPr>
+        <p:spPr>
+          <a:xfrm>
+            <a:off x="2664000" y="4860000"/>
+            <a:ext cx="1044000" cy="432000"/>
+          </a:xfrm>
+          <a:prstGeom prst="rect">
+            <a:avLst/>
+          </a:prstGeom>
+          <a:noFill/>
+        </p:spPr>
+        <p:txBody>
+          <a:bodyPr wrap="none">
+            <a:spAutoFit/>
+          </a:bodyPr>
+          <a:lstStyle/>
+          <a:p>
+            <a:pPr algn="ctr"/>
+            <a:r>
+              <a:rPr sz="1300" b="1">
+                <a:solidFill>
+                  <a:srgbClr val="FFFFFF"/>
+                </a:solidFill>
+                <a:latin typeface="Calibri"/>
+              </a:rPr>
+              <a:t>49%</a:t>
+            </a:r>
+          </a:p>
+          <a:p>
+            <a:pPr algn="ctr"/>
+            <a:r>
+              <a:rPr sz="550">
+                <a:solidFill>
+                  <a:srgbClr val="FFFFFF"/>
+                </a:solidFill>
+                <a:latin typeface="Calibri"/>
+              </a:rPr>
+              <a:t>Investidor</a:t>
+            </a:r>
+          </a:p>
+          <a:p>
+            <a:pPr algn="ctr"/>
+            <a:r>
+              <a:rPr sz="550">
+                <a:solidFill>
+                  <a:srgbClr val="C8A96D"/>
+                </a:solidFill>
+                <a:latin typeface="Calibri"/>
+              </a:rPr>
+              <a:t>R$ 44,2MM</a:t>
+            </a:r>
+          </a:p>
+        </p:txBody>
+      </p:sp>
+      <p:sp>
+        <p:nvSpPr>
+          <p:cNvPr id="92" name="Rectangle 91"/>
+          <p:cNvSpPr/>
+          <p:nvPr/>
+        </p:nvSpPr>
+        <p:spPr>
+          <a:xfrm>
+            <a:off x="3816000" y="4842000"/>
+            <a:ext cx="1116000" cy="432000"/>
+          </a:xfrm>
+          <a:prstGeom prst="rect">
+            <a:avLst/>
+          </a:prstGeom>
+          <a:solidFill>
+            <a:srgbClr val="443C7A"/>
+          </a:solidFill>
+          <a:ln>
+            <a:noFill/>
+          </a:ln>
+        </p:spPr>
+        <p:style>
+          <a:lnRef idx="1">
+            <a:schemeClr val="accent1"/>
+          </a:lnRef>
+          <a:fillRef idx="3">
+            <a:schemeClr val="accent1"/>
+          </a:fillRef>
+          <a:effectRef idx="2">
+            <a:schemeClr val="accent1"/>
+          </a:effectRef>
+          <a:fontRef idx="minor">
+            <a:schemeClr val="lt1"/>
+          </a:fontRef>
+        </p:style>
+        <p:txBody>
+          <a:bodyPr rtlCol="0" anchor="ctr"/>
+          <a:lstStyle/>
+          <a:p>
+            <a:pPr algn="ctr"/>
+          </a:p>
+        </p:txBody>
+      </p:sp>
+      <p:sp>
+        <p:nvSpPr>
+          <p:cNvPr id="93" name="TextBox 92"/>
+          <p:cNvSpPr txBox="1"/>
+          <p:nvPr/>
+        </p:nvSpPr>
+        <p:spPr>
+          <a:xfrm>
+            <a:off x="3852000" y="4860000"/>
+            <a:ext cx="1044000" cy="432000"/>
+          </a:xfrm>
+          <a:prstGeom prst="rect">
+            <a:avLst/>
+          </a:prstGeom>
+          <a:noFill/>
+        </p:spPr>
+        <p:txBody>
+          <a:bodyPr wrap="none">
+            <a:spAutoFit/>
+          </a:bodyPr>
+          <a:lstStyle/>
+          <a:p>
+            <a:pPr algn="ctr"/>
+            <a:r>
+              <a:rPr sz="1300" b="1">
+                <a:solidFill>
+                  <a:srgbClr val="FFFFFF"/>
+                </a:solidFill>
+                <a:latin typeface="Calibri"/>
+              </a:rPr>
+              <a:t>51%</a:t>
+            </a:r>
+          </a:p>
+          <a:p>
+            <a:pPr algn="ctr"/>
+            <a:r>
+              <a:rPr sz="550">
+                <a:solidFill>
+                  <a:srgbClr val="FFFFFF"/>
+                </a:solidFill>
+                <a:latin typeface="Calibri"/>
+              </a:rPr>
+              <a:t>Grupo Prima</a:t>
+            </a:r>
+          </a:p>
+          <a:p>
+            <a:pPr algn="ctr"/>
+            <a:r>
+              <a:rPr sz="550">
+                <a:solidFill>
+                  <a:srgbClr val="C8A96D"/>
+                </a:solidFill>
+                <a:latin typeface="Calibri"/>
+              </a:rPr>
+              <a:t>R$ 46,0MM</a:t>
+            </a:r>
+          </a:p>
+        </p:txBody>
+      </p:sp>
+      <p:sp>
+        <p:nvSpPr>
+          <p:cNvPr id="94" name="TextBox 93"/>
+          <p:cNvSpPr txBox="1"/>
+          <p:nvPr/>
+        </p:nvSpPr>
+        <p:spPr>
+          <a:xfrm>
+            <a:off x="2628000" y="5346000"/>
+            <a:ext cx="2304000" cy="180000"/>
+          </a:xfrm>
+          <a:prstGeom prst="rect">
+            <a:avLst/>
+          </a:prstGeom>
+          <a:noFill/>
+        </p:spPr>
+        <p:txBody>
+          <a:bodyPr wrap="none">
+            <a:spAutoFit/>
+          </a:bodyPr>
+          <a:lstStyle/>
+          <a:p>
+            <a:pPr>
               <a:spcBef>
-                <a:spcPts val="100"/>
+                <a:spcPts val="0"/>
               </a:spcBef>
             </a:pPr>
             <a:r>
-              <a:rPr sz="700" b="0" i="0">
-                <a:solidFill>
-                  <a:srgbClr val="FFFFFF"/>
-                </a:solidFill>
-                <a:latin typeface="Calibri"/>
-              </a:rPr>
-              <a:t>•  Presente em São Paulo, Rio, Trancoso, Punta del Este, Lisboa</a:t>
-            </a:r>
-          </a:p>
-          <a:p>
-            <a:pPr algn="l">
-              <a:lnSpc>
-                <a:spcPts val="900"/>
-              </a:lnSpc>
+              <a:rPr sz="500">
+                <a:solidFill>
+                  <a:srgbClr val="7F808F"/>
+                </a:solidFill>
+                <a:latin typeface="Calibri"/>
+              </a:rPr>
+              <a:t>Equity total R$ 90,2MM. R$ 32,9MM já investidos pelo Prima (terreno + licenças + projetos).</a:t>
+            </a:r>
+          </a:p>
+        </p:txBody>
+      </p:sp>
+      <p:sp>
+        <p:nvSpPr>
+          <p:cNvPr id="95" name="TextBox 94"/>
+          <p:cNvSpPr txBox="1"/>
+          <p:nvPr/>
+        </p:nvSpPr>
+        <p:spPr>
+          <a:xfrm>
+            <a:off x="2628000" y="5598000"/>
+            <a:ext cx="2304000" cy="432000"/>
+          </a:xfrm>
+          <a:prstGeom prst="rect">
+            <a:avLst/>
+          </a:prstGeom>
+          <a:noFill/>
+        </p:spPr>
+        <p:txBody>
+          <a:bodyPr wrap="square">
+            <a:spAutoFit/>
+          </a:bodyPr>
+          <a:lstStyle/>
+          <a:p/>
+          <a:p>
+            <a:pPr>
               <a:spcBef>
+                <a:spcPts val="0"/>
+              </a:spcBef>
+              <a:spcAft>
                 <a:spcPts val="100"/>
+              </a:spcAft>
+            </a:pPr>
+            <a:r>
+              <a:rPr sz="500" b="1">
+                <a:solidFill>
+                  <a:srgbClr val="C8A96D"/>
+                </a:solidFill>
+                <a:latin typeface="Calibri"/>
+              </a:rPr>
+              <a:t>LOCALIZAÇÃO &amp; DESTINO</a:t>
+            </a:r>
+          </a:p>
+          <a:p>
+            <a:pPr>
+              <a:spcBef>
+                <a:spcPts val="0"/>
+              </a:spcBef>
+              <a:spcAft>
+                <a:spcPts val="200"/>
+              </a:spcAft>
+            </a:pPr>
+            <a:r>
+              <a:rPr sz="800" b="1">
+                <a:solidFill>
+                  <a:srgbClr val="201A47"/>
+                </a:solidFill>
+                <a:latin typeface="Calibri"/>
+              </a:rPr>
+              <a:t>Mamucabo · Destino AAA</a:t>
+            </a:r>
+          </a:p>
+        </p:txBody>
+      </p:sp>
+      <p:sp>
+        <p:nvSpPr>
+          <p:cNvPr id="96" name="Rectangle 95"/>
+          <p:cNvSpPr/>
+          <p:nvPr/>
+        </p:nvSpPr>
+        <p:spPr>
+          <a:xfrm>
+            <a:off x="2628000" y="5868000"/>
+            <a:ext cx="2304000" cy="10800"/>
+          </a:xfrm>
+          <a:prstGeom prst="rect">
+            <a:avLst/>
+          </a:prstGeom>
+          <a:solidFill>
+            <a:srgbClr val="C8A96D"/>
+          </a:solidFill>
+          <a:ln>
+            <a:noFill/>
+          </a:ln>
+        </p:spPr>
+        <p:style>
+          <a:lnRef idx="1">
+            <a:schemeClr val="accent1"/>
+          </a:lnRef>
+          <a:fillRef idx="3">
+            <a:schemeClr val="accent1"/>
+          </a:fillRef>
+          <a:effectRef idx="2">
+            <a:schemeClr val="accent1"/>
+          </a:effectRef>
+          <a:fontRef idx="minor">
+            <a:schemeClr val="lt1"/>
+          </a:fontRef>
+        </p:style>
+        <p:txBody>
+          <a:bodyPr rtlCol="0" anchor="ctr"/>
+          <a:lstStyle/>
+          <a:p>
+            <a:pPr algn="ctr"/>
+          </a:p>
+        </p:txBody>
+      </p:sp>
+      <p:sp>
+        <p:nvSpPr>
+          <p:cNvPr id="97" name="TextBox 96"/>
+          <p:cNvSpPr txBox="1"/>
+          <p:nvPr/>
+        </p:nvSpPr>
+        <p:spPr>
+          <a:xfrm>
+            <a:off x="2628000" y="5958000"/>
+            <a:ext cx="2304000" cy="504000"/>
+          </a:xfrm>
+          <a:prstGeom prst="rect">
+            <a:avLst/>
+          </a:prstGeom>
+          <a:noFill/>
+        </p:spPr>
+        <p:txBody>
+          <a:bodyPr wrap="square">
+            <a:spAutoFit/>
+          </a:bodyPr>
+          <a:lstStyle/>
+          <a:p>
+            <a:pPr>
+              <a:spcBef>
+                <a:spcPts val="0"/>
               </a:spcBef>
             </a:pPr>
             <a:r>
-              <a:rPr sz="700" b="0" i="0">
-                <a:solidFill>
-                  <a:srgbClr val="FFFFFF"/>
-                </a:solidFill>
-                <a:latin typeface="Calibri"/>
-              </a:rPr>
-              <a:t>•  Gestão hoteleira + brand licensing do projeto</a:t>
+              <a:rPr sz="600">
+                <a:solidFill>
+                  <a:srgbClr val="887CD3"/>
+                </a:solidFill>
+                <a:latin typeface="Calibri"/>
+              </a:rPr>
+              <a:t>• </a:t>
+            </a:r>
+            <a:r>
+              <a:rPr sz="600" b="1">
+                <a:solidFill>
+                  <a:srgbClr val="201A47"/>
+                </a:solidFill>
+                <a:latin typeface="Calibri"/>
+              </a:rPr>
+              <a:t>Esplanada, BA</a:t>
+            </a:r>
+            <a:r>
+              <a:rPr sz="600">
+                <a:solidFill>
+                  <a:srgbClr val="333355"/>
+                </a:solidFill>
+                <a:latin typeface="Calibri"/>
+              </a:rPr>
+              <a:t> · 108 km de Salvador · 13 km de praias intocadas · Ecossistemas de lagoas e mata nativa</a:t>
             </a:r>
           </a:p>
           <a:p>
             <a:pPr algn="l">
-              <a:lnSpc>
-                <a:spcPts val="900"/>
-              </a:lnSpc>
               <a:spcBef>
-                <a:spcPts val="100"/>
+                <a:spcPts val="150"/>
+              </a:spcBef>
+              <a:spcAft>
+                <a:spcPts val="0"/>
+              </a:spcAft>
+            </a:pPr>
+            <a:r>
+              <a:rPr sz="600">
+                <a:solidFill>
+                  <a:srgbClr val="887CD3"/>
+                </a:solidFill>
+                <a:latin typeface="Calibri"/>
+              </a:rPr>
+              <a:t>• </a:t>
+            </a:r>
+            <a:r>
+              <a:rPr sz="600">
+                <a:solidFill>
+                  <a:srgbClr val="333355"/>
+                </a:solidFill>
+                <a:latin typeface="Calibri"/>
+              </a:rPr>
+              <a:t>Área licenciada: +63MM m² · Comercializável: +25MM m² · Pista de pouso, heliponto e utilities completas</a:t>
+            </a:r>
+          </a:p>
+        </p:txBody>
+      </p:sp>
+      <p:sp>
+        <p:nvSpPr>
+          <p:cNvPr id="98" name="Rectangle 97"/>
+          <p:cNvSpPr/>
+          <p:nvPr/>
+        </p:nvSpPr>
+        <p:spPr>
+          <a:xfrm>
+            <a:off x="2628000" y="6318000"/>
+            <a:ext cx="2304000" cy="10800"/>
+          </a:xfrm>
+          <a:prstGeom prst="rect">
+            <a:avLst/>
+          </a:prstGeom>
+          <a:solidFill>
+            <a:srgbClr val="E8E8F0"/>
+          </a:solidFill>
+          <a:ln>
+            <a:noFill/>
+          </a:ln>
+        </p:spPr>
+        <p:style>
+          <a:lnRef idx="1">
+            <a:schemeClr val="accent1"/>
+          </a:lnRef>
+          <a:fillRef idx="3">
+            <a:schemeClr val="accent1"/>
+          </a:fillRef>
+          <a:effectRef idx="2">
+            <a:schemeClr val="accent1"/>
+          </a:effectRef>
+          <a:fontRef idx="minor">
+            <a:schemeClr val="lt1"/>
+          </a:fontRef>
+        </p:style>
+        <p:txBody>
+          <a:bodyPr rtlCol="0" anchor="ctr"/>
+          <a:lstStyle/>
+          <a:p>
+            <a:pPr algn="ctr"/>
+          </a:p>
+        </p:txBody>
+      </p:sp>
+      <p:sp>
+        <p:nvSpPr>
+          <p:cNvPr id="99" name="TextBox 98"/>
+          <p:cNvSpPr txBox="1"/>
+          <p:nvPr/>
+        </p:nvSpPr>
+        <p:spPr>
+          <a:xfrm>
+            <a:off x="2628000" y="6390000"/>
+            <a:ext cx="2304000" cy="180000"/>
+          </a:xfrm>
+          <a:prstGeom prst="rect">
+            <a:avLst/>
+          </a:prstGeom>
+          <a:noFill/>
+        </p:spPr>
+        <p:txBody>
+          <a:bodyPr wrap="none">
+            <a:spAutoFit/>
+          </a:bodyPr>
+          <a:lstStyle/>
+          <a:p>
+            <a:pPr>
+              <a:spcBef>
+                <a:spcPts val="0"/>
               </a:spcBef>
             </a:pPr>
             <a:r>
-              <a:rPr sz="700" b="0" i="0">
-                <a:solidFill>
-                  <a:srgbClr val="FFFFFF"/>
-                </a:solidFill>
-                <a:latin typeface="Calibri"/>
-              </a:rPr>
-              <a:t>•  49% do capital do projeto</a:t>
+              <a:rPr sz="650" b="1">
+                <a:solidFill>
+                  <a:srgbClr val="201A47"/>
+                </a:solidFill>
+                <a:latin typeface="Calibri"/>
+              </a:rPr>
+              <a:t>Branded Residences · 48 Unidades · VGV R$ 411,6MM</a:t>
+            </a:r>
+          </a:p>
+        </p:txBody>
+      </p:sp>
+      <p:sp>
+        <p:nvSpPr>
+          <p:cNvPr id="100" name="Rectangle 99"/>
+          <p:cNvSpPr/>
+          <p:nvPr/>
+        </p:nvSpPr>
+        <p:spPr>
+          <a:xfrm>
+            <a:off x="2628000" y="6606000"/>
+            <a:ext cx="1116000" cy="324000"/>
+          </a:xfrm>
+          <a:prstGeom prst="rect">
+            <a:avLst/>
+          </a:prstGeom>
+          <a:solidFill>
+            <a:srgbClr val="F5E8D0"/>
+          </a:solidFill>
+          <a:ln>
+            <a:noFill/>
+          </a:ln>
+        </p:spPr>
+        <p:style>
+          <a:lnRef idx="1">
+            <a:schemeClr val="accent1"/>
+          </a:lnRef>
+          <a:fillRef idx="3">
+            <a:schemeClr val="accent1"/>
+          </a:fillRef>
+          <a:effectRef idx="2">
+            <a:schemeClr val="accent1"/>
+          </a:effectRef>
+          <a:fontRef idx="minor">
+            <a:schemeClr val="lt1"/>
+          </a:fontRef>
+        </p:style>
+        <p:txBody>
+          <a:bodyPr rtlCol="0" anchor="ctr"/>
+          <a:lstStyle/>
+          <a:p>
+            <a:pPr algn="ctr"/>
+          </a:p>
+        </p:txBody>
+      </p:sp>
+      <p:sp>
+        <p:nvSpPr>
+          <p:cNvPr id="101" name="TextBox 100"/>
+          <p:cNvSpPr txBox="1"/>
+          <p:nvPr/>
+        </p:nvSpPr>
+        <p:spPr>
+          <a:xfrm>
+            <a:off x="2646000" y="6624000"/>
+            <a:ext cx="1080000" cy="288000"/>
+          </a:xfrm>
+          <a:prstGeom prst="rect">
+            <a:avLst/>
+          </a:prstGeom>
+          <a:noFill/>
+        </p:spPr>
+        <p:txBody>
+          <a:bodyPr wrap="none">
+            <a:spAutoFit/>
+          </a:bodyPr>
+          <a:lstStyle/>
+          <a:p>
+            <a:pPr algn="ctr"/>
+            <a:r>
+              <a:rPr sz="700" b="1">
+                <a:solidFill>
+                  <a:srgbClr val="201A47"/>
+                </a:solidFill>
+                <a:latin typeface="Calibri"/>
+              </a:rPr>
+              <a:t>F1 · 22 unid.</a:t>
+            </a:r>
+          </a:p>
+          <a:p>
+            <a:pPr algn="ctr"/>
+            <a:r>
+              <a:rPr sz="500">
+                <a:solidFill>
+                  <a:srgbClr val="7F808F"/>
+                </a:solidFill>
+                <a:latin typeface="Calibri"/>
+              </a:rPr>
+              <a:t>R$ 156MM · Out/2026</a:t>
+            </a:r>
+          </a:p>
+        </p:txBody>
+      </p:sp>
+      <p:sp>
+        <p:nvSpPr>
+          <p:cNvPr id="102" name="Rectangle 101"/>
+          <p:cNvSpPr/>
+          <p:nvPr/>
+        </p:nvSpPr>
+        <p:spPr>
+          <a:xfrm>
+            <a:off x="3816000" y="6606000"/>
+            <a:ext cx="1116000" cy="324000"/>
+          </a:xfrm>
+          <a:prstGeom prst="rect">
+            <a:avLst/>
+          </a:prstGeom>
+          <a:solidFill>
+            <a:srgbClr val="F5E8D0"/>
+          </a:solidFill>
+          <a:ln>
+            <a:noFill/>
+          </a:ln>
+        </p:spPr>
+        <p:style>
+          <a:lnRef idx="1">
+            <a:schemeClr val="accent1"/>
+          </a:lnRef>
+          <a:fillRef idx="3">
+            <a:schemeClr val="accent1"/>
+          </a:fillRef>
+          <a:effectRef idx="2">
+            <a:schemeClr val="accent1"/>
+          </a:effectRef>
+          <a:fontRef idx="minor">
+            <a:schemeClr val="lt1"/>
+          </a:fontRef>
+        </p:style>
+        <p:txBody>
+          <a:bodyPr rtlCol="0" anchor="ctr"/>
+          <a:lstStyle/>
+          <a:p>
+            <a:pPr algn="ctr"/>
+          </a:p>
+        </p:txBody>
+      </p:sp>
+      <p:sp>
+        <p:nvSpPr>
+          <p:cNvPr id="103" name="TextBox 102"/>
+          <p:cNvSpPr txBox="1"/>
+          <p:nvPr/>
+        </p:nvSpPr>
+        <p:spPr>
+          <a:xfrm>
+            <a:off x="3834000" y="6624000"/>
+            <a:ext cx="1080000" cy="288000"/>
+          </a:xfrm>
+          <a:prstGeom prst="rect">
+            <a:avLst/>
+          </a:prstGeom>
+          <a:noFill/>
+        </p:spPr>
+        <p:txBody>
+          <a:bodyPr wrap="none">
+            <a:spAutoFit/>
+          </a:bodyPr>
+          <a:lstStyle/>
+          <a:p>
+            <a:pPr algn="ctr"/>
+            <a:r>
+              <a:rPr sz="700" b="1">
+                <a:solidFill>
+                  <a:srgbClr val="201A47"/>
+                </a:solidFill>
+                <a:latin typeface="Calibri"/>
+              </a:rPr>
+              <a:t>F2 · 26 unid.</a:t>
+            </a:r>
+          </a:p>
+          <a:p>
+            <a:pPr algn="ctr"/>
+            <a:r>
+              <a:rPr sz="500">
+                <a:solidFill>
+                  <a:srgbClr val="7F808F"/>
+                </a:solidFill>
+                <a:latin typeface="Calibri"/>
+              </a:rPr>
+              <a:t>R$ 285MM · Jan/2028</a:t>
+            </a:r>
+          </a:p>
+        </p:txBody>
+      </p:sp>
+      <p:sp>
+        <p:nvSpPr>
+          <p:cNvPr id="104" name="TextBox 103"/>
+          <p:cNvSpPr txBox="1"/>
+          <p:nvPr/>
+        </p:nvSpPr>
+        <p:spPr>
+          <a:xfrm>
+            <a:off x="2628000" y="7002000"/>
+            <a:ext cx="2304000" cy="180000"/>
+          </a:xfrm>
+          <a:prstGeom prst="rect">
+            <a:avLst/>
+          </a:prstGeom>
+          <a:noFill/>
+        </p:spPr>
+        <p:txBody>
+          <a:bodyPr wrap="none">
+            <a:spAutoFit/>
+          </a:bodyPr>
+          <a:lstStyle/>
+          <a:p>
+            <a:pPr>
+              <a:spcBef>
+                <a:spcPts val="0"/>
+              </a:spcBef>
+            </a:pPr>
+            <a:r>
+              <a:rPr sz="500">
+                <a:solidFill>
+                  <a:srgbClr val="7F808F"/>
+                </a:solidFill>
+                <a:latin typeface="Calibri"/>
+              </a:rPr>
+              <a:t>15+10 Casas Rental Pool · 17 Lotes 2.200m² · 16 Lotes 2.500m² · Terreno 260.350m²</a:t>
             </a:r>
           </a:p>
         </p:txBody>
       </p:sp>
       <p:pic>
         <p:nvPicPr>
-          <p:cNvPr id="24" name="Picture 23" descr="room.jpg"/>
+          <p:cNvPr id="105" name="Picture 104" descr="villa.jpg"/>
           <p:cNvPicPr>
             <a:picLocks noChangeAspect="1"/>
           </p:cNvPicPr>
@@ -4094,8 +7837,8 @@
         </p:blipFill>
         <p:spPr>
           <a:xfrm>
-            <a:off x="2574000" y="3492000"/>
-            <a:ext cx="1170000" cy="792000"/>
+            <a:off x="2628000" y="7254000"/>
+            <a:ext cx="1116000" cy="576000"/>
           </a:xfrm>
           <a:prstGeom prst="rect">
             <a:avLst/>
@@ -4104,7 +7847,7 @@
       </p:pic>
       <p:pic>
         <p:nvPicPr>
-          <p:cNvPr id="25" name="Picture 24" descr="aerial.jpg"/>
+          <p:cNvPr id="106" name="Picture 105" descr="lobby.jpg"/>
           <p:cNvPicPr>
             <a:picLocks noChangeAspect="1"/>
           </p:cNvPicPr>
@@ -4118,8 +7861,8 @@
         </p:blipFill>
         <p:spPr>
           <a:xfrm>
-            <a:off x="3780000" y="3492000"/>
-            <a:ext cx="1170000" cy="792000"/>
+            <a:off x="3816000" y="7254000"/>
+            <a:ext cx="1116000" cy="576000"/>
           </a:xfrm>
           <a:prstGeom prst="rect">
             <a:avLst/>
@@ -4128,846 +7871,14 @@
       </p:pic>
       <p:sp>
         <p:nvSpPr>
-          <p:cNvPr id="26" name="TextBox 25"/>
-          <p:cNvSpPr txBox="1"/>
-          <p:nvPr/>
-        </p:nvSpPr>
-        <p:spPr>
-          <a:xfrm>
-            <a:off x="2574000" y="4392000"/>
-            <a:ext cx="2412000" cy="180000"/>
-          </a:xfrm>
-          <a:prstGeom prst="rect">
-            <a:avLst/>
-          </a:prstGeom>
-          <a:noFill/>
-        </p:spPr>
-        <p:txBody>
-          <a:bodyPr wrap="square">
-            <a:spAutoFit/>
-          </a:bodyPr>
-          <a:lstStyle/>
-          <a:p>
-            <a:pPr algn="l"/>
-            <a:r>
-              <a:rPr sz="600" b="1" i="0">
-                <a:solidFill>
-                  <a:srgbClr val="C8A96D"/>
-                </a:solidFill>
-                <a:latin typeface="Calibri"/>
-              </a:rPr>
-              <a:t>ESTRUTURA CRI</a:t>
-            </a:r>
-          </a:p>
-        </p:txBody>
-      </p:sp>
-      <p:sp>
-        <p:nvSpPr>
-          <p:cNvPr id="27" name="TextBox 26"/>
-          <p:cNvSpPr txBox="1"/>
-          <p:nvPr/>
-        </p:nvSpPr>
-        <p:spPr>
-          <a:xfrm>
-            <a:off x="2574000" y="4572000"/>
-            <a:ext cx="2412000" cy="180000"/>
-          </a:xfrm>
-          <a:prstGeom prst="rect">
-            <a:avLst/>
-          </a:prstGeom>
-          <a:noFill/>
-        </p:spPr>
-        <p:txBody>
-          <a:bodyPr wrap="square">
-            <a:spAutoFit/>
-          </a:bodyPr>
-          <a:lstStyle/>
-          <a:p>
-            <a:pPr algn="l"/>
-            <a:r>
-              <a:rPr sz="600" b="1" i="0">
-                <a:solidFill>
-                  <a:srgbClr val="201A47"/>
-                </a:solidFill>
-                <a:latin typeface="Calibri"/>
-              </a:rPr>
-              <a:t>GARANTIAS CRI</a:t>
-            </a:r>
-          </a:p>
-        </p:txBody>
-      </p:sp>
-      <p:sp>
-        <p:nvSpPr>
-          <p:cNvPr id="28" name="TextBox 27"/>
-          <p:cNvSpPr txBox="1"/>
-          <p:nvPr/>
-        </p:nvSpPr>
-        <p:spPr>
-          <a:xfrm>
-            <a:off x="2574000" y="4752000"/>
-            <a:ext cx="2412000" cy="1008000"/>
-          </a:xfrm>
-          <a:prstGeom prst="rect">
-            <a:avLst/>
-          </a:prstGeom>
-          <a:noFill/>
-        </p:spPr>
-        <p:txBody>
-          <a:bodyPr wrap="square">
-            <a:spAutoFit/>
-          </a:bodyPr>
-          <a:lstStyle/>
-          <a:p>
-            <a:pPr algn="l">
-              <a:lnSpc>
-                <a:spcPts val="900"/>
-              </a:lnSpc>
-            </a:pPr>
-            <a:r>
-              <a:rPr sz="700" b="0" i="0">
-                <a:solidFill>
-                  <a:srgbClr val="FFFFFF"/>
-                </a:solidFill>
-                <a:latin typeface="Calibri"/>
-              </a:rPr>
-              <a:t>•  Cessão de 100% das cotas das Devedoras</a:t>
-            </a:r>
-          </a:p>
-          <a:p>
-            <a:pPr algn="l">
-              <a:lnSpc>
-                <a:spcPts val="900"/>
-              </a:lnSpc>
-              <a:spcBef>
-                <a:spcPts val="100"/>
-              </a:spcBef>
-            </a:pPr>
-            <a:r>
-              <a:rPr sz="700" b="0" i="0">
-                <a:solidFill>
-                  <a:srgbClr val="FFFFFF"/>
-                </a:solidFill>
-                <a:latin typeface="Calibri"/>
-              </a:rPr>
-              <a:t>•  AF Terreno Residencial (840.834m²): Outorgado para 4k unidades</a:t>
-            </a:r>
-          </a:p>
-          <a:p>
-            <a:pPr algn="l">
-              <a:lnSpc>
-                <a:spcPts val="900"/>
-              </a:lnSpc>
-              <a:spcBef>
-                <a:spcPts val="100"/>
-              </a:spcBef>
-            </a:pPr>
-            <a:r>
-              <a:rPr sz="700" b="0" i="0">
-                <a:solidFill>
-                  <a:srgbClr val="FFFFFF"/>
-                </a:solidFill>
-                <a:latin typeface="Calibri"/>
-              </a:rPr>
-              <a:t>•  AF Terreno Hoteleiro (300.076m²)</a:t>
-            </a:r>
-          </a:p>
-          <a:p>
-            <a:pPr algn="l">
-              <a:lnSpc>
-                <a:spcPts val="900"/>
-              </a:lnSpc>
-              <a:spcBef>
-                <a:spcPts val="100"/>
-              </a:spcBef>
-            </a:pPr>
-            <a:r>
-              <a:rPr sz="700" b="0" i="0">
-                <a:solidFill>
-                  <a:srgbClr val="FFFFFF"/>
-                </a:solidFill>
-                <a:latin typeface="Calibri"/>
-              </a:rPr>
-              <a:t>•  Cessão fiduciária de recebíveis e das quotas de sociedades hoteleiras</a:t>
-            </a:r>
-          </a:p>
-        </p:txBody>
-      </p:sp>
-      <p:sp>
-        <p:nvSpPr>
-          <p:cNvPr id="29" name="TextBox 28"/>
-          <p:cNvSpPr txBox="1"/>
-          <p:nvPr/>
-        </p:nvSpPr>
-        <p:spPr>
-          <a:xfrm>
-            <a:off x="5094000" y="2484000"/>
-            <a:ext cx="2376000" cy="180000"/>
-          </a:xfrm>
-          <a:prstGeom prst="rect">
-            <a:avLst/>
-          </a:prstGeom>
-          <a:noFill/>
-        </p:spPr>
-        <p:txBody>
-          <a:bodyPr wrap="square">
-            <a:spAutoFit/>
-          </a:bodyPr>
-          <a:lstStyle/>
-          <a:p>
-            <a:pPr algn="l"/>
-            <a:r>
-              <a:rPr sz="600" b="1" i="0">
-                <a:solidFill>
-                  <a:srgbClr val="C8A96D"/>
-                </a:solidFill>
-                <a:latin typeface="Calibri"/>
-              </a:rPr>
-              <a:t>INDICADORES</a:t>
-            </a:r>
-          </a:p>
-        </p:txBody>
-      </p:sp>
-      <p:sp>
-        <p:nvSpPr>
-          <p:cNvPr id="30" name="TextBox 29"/>
-          <p:cNvSpPr txBox="1"/>
-          <p:nvPr/>
-        </p:nvSpPr>
-        <p:spPr>
-          <a:xfrm>
-            <a:off x="5094000" y="2664000"/>
-            <a:ext cx="2376000" cy="288000"/>
-          </a:xfrm>
-          <a:prstGeom prst="rect">
-            <a:avLst/>
-          </a:prstGeom>
-          <a:noFill/>
-        </p:spPr>
-        <p:txBody>
-          <a:bodyPr wrap="square">
-            <a:spAutoFit/>
-          </a:bodyPr>
-          <a:lstStyle/>
-          <a:p>
-            <a:pPr algn="l"/>
-            <a:r>
-              <a:rPr sz="1400" b="1" i="0">
-                <a:solidFill>
-                  <a:srgbClr val="887CD3"/>
-                </a:solidFill>
-                <a:latin typeface="Calibri"/>
-              </a:rPr>
-              <a:t>R$ 330Mi</a:t>
-            </a:r>
-          </a:p>
-        </p:txBody>
-      </p:sp>
-      <p:sp>
-        <p:nvSpPr>
-          <p:cNvPr id="31" name="TextBox 30"/>
-          <p:cNvSpPr txBox="1"/>
-          <p:nvPr/>
-        </p:nvSpPr>
-        <p:spPr>
-          <a:xfrm>
-            <a:off x="5094000" y="2916000"/>
-            <a:ext cx="2376000" cy="180000"/>
-          </a:xfrm>
-          <a:prstGeom prst="rect">
-            <a:avLst/>
-          </a:prstGeom>
-          <a:noFill/>
-        </p:spPr>
-        <p:txBody>
-          <a:bodyPr wrap="square">
-            <a:spAutoFit/>
-          </a:bodyPr>
-          <a:lstStyle/>
-          <a:p>
-            <a:pPr algn="l"/>
-            <a:r>
-              <a:rPr sz="650" b="0" i="0">
-                <a:solidFill>
-                  <a:srgbClr val="7F808F"/>
-                </a:solidFill>
-                <a:latin typeface="Calibri"/>
-              </a:rPr>
-              <a:t>Captação Total CRI</a:t>
-            </a:r>
-          </a:p>
-        </p:txBody>
-      </p:sp>
-      <p:sp>
-        <p:nvSpPr>
-          <p:cNvPr id="32" name="TextBox 31"/>
-          <p:cNvSpPr txBox="1"/>
-          <p:nvPr/>
-        </p:nvSpPr>
-        <p:spPr>
-          <a:xfrm>
-            <a:off x="5094000" y="3096000"/>
-            <a:ext cx="2376000" cy="288000"/>
-          </a:xfrm>
-          <a:prstGeom prst="rect">
-            <a:avLst/>
-          </a:prstGeom>
-          <a:noFill/>
-        </p:spPr>
-        <p:txBody>
-          <a:bodyPr wrap="square">
-            <a:spAutoFit/>
-          </a:bodyPr>
-          <a:lstStyle/>
-          <a:p>
-            <a:pPr algn="l"/>
-            <a:r>
-              <a:rPr sz="1400" b="1" i="0">
-                <a:solidFill>
-                  <a:srgbClr val="887CD3"/>
-                </a:solidFill>
-                <a:latin typeface="Calibri"/>
-              </a:rPr>
-              <a:t>R$ 1,25Bi</a:t>
-            </a:r>
-          </a:p>
-        </p:txBody>
-      </p:sp>
-      <p:sp>
-        <p:nvSpPr>
-          <p:cNvPr id="33" name="TextBox 32"/>
-          <p:cNvSpPr txBox="1"/>
-          <p:nvPr/>
-        </p:nvSpPr>
-        <p:spPr>
-          <a:xfrm>
-            <a:off x="5094000" y="3348000"/>
-            <a:ext cx="2376000" cy="180000"/>
-          </a:xfrm>
-          <a:prstGeom prst="rect">
-            <a:avLst/>
-          </a:prstGeom>
-          <a:noFill/>
-        </p:spPr>
-        <p:txBody>
-          <a:bodyPr wrap="square">
-            <a:spAutoFit/>
-          </a:bodyPr>
-          <a:lstStyle/>
-          <a:p>
-            <a:pPr algn="l"/>
-            <a:r>
-              <a:rPr sz="650" b="0" i="0">
-                <a:solidFill>
-                  <a:srgbClr val="7F808F"/>
-                </a:solidFill>
-                <a:latin typeface="Calibri"/>
-              </a:rPr>
-              <a:t>VGV Total do Projeto</a:t>
-            </a:r>
-          </a:p>
-        </p:txBody>
-      </p:sp>
-      <p:sp>
-        <p:nvSpPr>
-          <p:cNvPr id="34" name="TextBox 33"/>
-          <p:cNvSpPr txBox="1"/>
-          <p:nvPr/>
-        </p:nvSpPr>
-        <p:spPr>
-          <a:xfrm>
-            <a:off x="5094000" y="3528000"/>
-            <a:ext cx="2376000" cy="288000"/>
-          </a:xfrm>
-          <a:prstGeom prst="rect">
-            <a:avLst/>
-          </a:prstGeom>
-          <a:noFill/>
-        </p:spPr>
-        <p:txBody>
-          <a:bodyPr wrap="square">
-            <a:spAutoFit/>
-          </a:bodyPr>
-          <a:lstStyle/>
-          <a:p>
-            <a:pPr algn="l"/>
-            <a:r>
-              <a:rPr sz="1400" b="1" i="0">
-                <a:solidFill>
-                  <a:srgbClr val="887CD3"/>
-                </a:solidFill>
-                <a:latin typeface="Calibri"/>
-              </a:rPr>
-              <a:t>13,5% a.a.</a:t>
-            </a:r>
-          </a:p>
-        </p:txBody>
-      </p:sp>
-      <p:sp>
-        <p:nvSpPr>
-          <p:cNvPr id="35" name="TextBox 34"/>
-          <p:cNvSpPr txBox="1"/>
-          <p:nvPr/>
-        </p:nvSpPr>
-        <p:spPr>
-          <a:xfrm>
-            <a:off x="5094000" y="3780000"/>
-            <a:ext cx="2376000" cy="180000"/>
-          </a:xfrm>
-          <a:prstGeom prst="rect">
-            <a:avLst/>
-          </a:prstGeom>
-          <a:noFill/>
-        </p:spPr>
-        <p:txBody>
-          <a:bodyPr wrap="square">
-            <a:spAutoFit/>
-          </a:bodyPr>
-          <a:lstStyle/>
-          <a:p>
-            <a:pPr algn="l"/>
-            <a:r>
-              <a:rPr sz="650" b="0" i="0">
-                <a:solidFill>
-                  <a:srgbClr val="7F808F"/>
-                </a:solidFill>
-                <a:latin typeface="Calibri"/>
-              </a:rPr>
-              <a:t>Taxa CRI (IPCA+)</a:t>
-            </a:r>
-          </a:p>
-        </p:txBody>
-      </p:sp>
-      <p:sp>
-        <p:nvSpPr>
-          <p:cNvPr id="36" name="TextBox 35"/>
-          <p:cNvSpPr txBox="1"/>
-          <p:nvPr/>
-        </p:nvSpPr>
-        <p:spPr>
-          <a:xfrm>
-            <a:off x="5094000" y="3960000"/>
-            <a:ext cx="2376000" cy="288000"/>
-          </a:xfrm>
-          <a:prstGeom prst="rect">
-            <a:avLst/>
-          </a:prstGeom>
-          <a:noFill/>
-        </p:spPr>
-        <p:txBody>
-          <a:bodyPr wrap="square">
-            <a:spAutoFit/>
-          </a:bodyPr>
-          <a:lstStyle/>
-          <a:p>
-            <a:pPr algn="l"/>
-            <a:r>
-              <a:rPr sz="1400" b="1" i="0">
-                <a:solidFill>
-                  <a:srgbClr val="887CD3"/>
-                </a:solidFill>
-                <a:latin typeface="Calibri"/>
-              </a:rPr>
-              <a:t>48 meses</a:t>
-            </a:r>
-          </a:p>
-        </p:txBody>
-      </p:sp>
-      <p:sp>
-        <p:nvSpPr>
-          <p:cNvPr id="37" name="TextBox 36"/>
-          <p:cNvSpPr txBox="1"/>
-          <p:nvPr/>
-        </p:nvSpPr>
-        <p:spPr>
-          <a:xfrm>
-            <a:off x="5094000" y="4212000"/>
-            <a:ext cx="2376000" cy="180000"/>
-          </a:xfrm>
-          <a:prstGeom prst="rect">
-            <a:avLst/>
-          </a:prstGeom>
-          <a:noFill/>
-        </p:spPr>
-        <p:txBody>
-          <a:bodyPr wrap="square">
-            <a:spAutoFit/>
-          </a:bodyPr>
-          <a:lstStyle/>
-          <a:p>
-            <a:pPr algn="l"/>
-            <a:r>
-              <a:rPr sz="650" b="0" i="0">
-                <a:solidFill>
-                  <a:srgbClr val="7F808F"/>
-                </a:solidFill>
-                <a:latin typeface="Calibri"/>
-              </a:rPr>
-              <a:t>Prazo</a:t>
-            </a:r>
-          </a:p>
-        </p:txBody>
-      </p:sp>
-      <p:sp>
-        <p:nvSpPr>
-          <p:cNvPr id="38" name="TextBox 37"/>
-          <p:cNvSpPr txBox="1"/>
-          <p:nvPr/>
-        </p:nvSpPr>
-        <p:spPr>
-          <a:xfrm>
-            <a:off x="5094000" y="4392000"/>
-            <a:ext cx="2376000" cy="288000"/>
-          </a:xfrm>
-          <a:prstGeom prst="rect">
-            <a:avLst/>
-          </a:prstGeom>
-          <a:noFill/>
-        </p:spPr>
-        <p:txBody>
-          <a:bodyPr wrap="square">
-            <a:spAutoFit/>
-          </a:bodyPr>
-          <a:lstStyle/>
-          <a:p>
-            <a:pPr algn="l"/>
-            <a:r>
-              <a:rPr sz="1400" b="1" i="0">
-                <a:solidFill>
-                  <a:srgbClr val="887CD3"/>
-                </a:solidFill>
-                <a:latin typeface="Calibri"/>
-              </a:rPr>
-              <a:t>Mai/2025</a:t>
-            </a:r>
-          </a:p>
-        </p:txBody>
-      </p:sp>
-      <p:sp>
-        <p:nvSpPr>
-          <p:cNvPr id="39" name="TextBox 38"/>
-          <p:cNvSpPr txBox="1"/>
-          <p:nvPr/>
-        </p:nvSpPr>
-        <p:spPr>
-          <a:xfrm>
-            <a:off x="5094000" y="4644000"/>
-            <a:ext cx="2376000" cy="180000"/>
-          </a:xfrm>
-          <a:prstGeom prst="rect">
-            <a:avLst/>
-          </a:prstGeom>
-          <a:noFill/>
-        </p:spPr>
-        <p:txBody>
-          <a:bodyPr wrap="square">
-            <a:spAutoFit/>
-          </a:bodyPr>
-          <a:lstStyle/>
-          <a:p>
-            <a:pPr algn="l"/>
-            <a:r>
-              <a:rPr sz="650" b="0" i="0">
-                <a:solidFill>
-                  <a:srgbClr val="7F808F"/>
-                </a:solidFill>
-                <a:latin typeface="Calibri"/>
-              </a:rPr>
-              <a:t>Emissão</a:t>
-            </a:r>
-          </a:p>
-        </p:txBody>
-      </p:sp>
-      <p:sp>
-        <p:nvSpPr>
-          <p:cNvPr id="40" name="TextBox 39"/>
-          <p:cNvSpPr txBox="1"/>
-          <p:nvPr/>
-        </p:nvSpPr>
-        <p:spPr>
-          <a:xfrm>
-            <a:off x="5094000" y="4896000"/>
-            <a:ext cx="2376000" cy="180000"/>
-          </a:xfrm>
-          <a:prstGeom prst="rect">
-            <a:avLst/>
-          </a:prstGeom>
-          <a:noFill/>
-        </p:spPr>
-        <p:txBody>
-          <a:bodyPr wrap="square">
-            <a:spAutoFit/>
-          </a:bodyPr>
-          <a:lstStyle/>
-          <a:p>
-            <a:pPr algn="l"/>
-            <a:r>
-              <a:rPr sz="600" b="1" i="0">
-                <a:solidFill>
-                  <a:srgbClr val="C8A96D"/>
-                </a:solidFill>
-                <a:latin typeface="Calibri"/>
-              </a:rPr>
-              <a:t>MARCOS CONCLUÍDOS</a:t>
-            </a:r>
-          </a:p>
-        </p:txBody>
-      </p:sp>
-      <p:sp>
-        <p:nvSpPr>
-          <p:cNvPr id="41" name="TextBox 40"/>
-          <p:cNvSpPr txBox="1"/>
-          <p:nvPr/>
-        </p:nvSpPr>
-        <p:spPr>
-          <a:xfrm>
-            <a:off x="5094000" y="5076000"/>
-            <a:ext cx="2376000" cy="936000"/>
-          </a:xfrm>
-          <a:prstGeom prst="rect">
-            <a:avLst/>
-          </a:prstGeom>
-          <a:noFill/>
-        </p:spPr>
-        <p:txBody>
-          <a:bodyPr wrap="square">
-            <a:spAutoFit/>
-          </a:bodyPr>
-          <a:lstStyle/>
-          <a:p>
-            <a:pPr algn="l">
-              <a:lnSpc>
-                <a:spcPts val="900"/>
-              </a:lnSpc>
-            </a:pPr>
-            <a:r>
-              <a:rPr sz="700" b="0" i="0">
-                <a:solidFill>
-                  <a:srgbClr val="FFFFFF"/>
-                </a:solidFill>
-                <a:latin typeface="Calibri"/>
-              </a:rPr>
-              <a:t>•  Aquisição do terreno (2020/2008) — a valor de mercado</a:t>
-            </a:r>
-          </a:p>
-          <a:p>
-            <a:pPr algn="l">
-              <a:lnSpc>
-                <a:spcPts val="900"/>
-              </a:lnSpc>
-              <a:spcBef>
-                <a:spcPts val="100"/>
-              </a:spcBef>
-            </a:pPr>
-            <a:r>
-              <a:rPr sz="700" b="0" i="0">
-                <a:solidFill>
-                  <a:srgbClr val="FFFFFF"/>
-                </a:solidFill>
-                <a:latin typeface="Calibri"/>
-              </a:rPr>
-              <a:t>•  Licença Prévia emitida 2012 — renovada até mai/2031</a:t>
-            </a:r>
-          </a:p>
-          <a:p>
-            <a:pPr algn="l">
-              <a:lnSpc>
-                <a:spcPts val="900"/>
-              </a:lnSpc>
-              <a:spcBef>
-                <a:spcPts val="100"/>
-              </a:spcBef>
-            </a:pPr>
-            <a:r>
-              <a:rPr sz="700" b="0" i="0">
-                <a:solidFill>
-                  <a:srgbClr val="FFFFFF"/>
-                </a:solidFill>
-                <a:latin typeface="Calibri"/>
-              </a:rPr>
-              <a:t>•  Licença de Instalação emitida jun/2024 — válida até jun/2026</a:t>
-            </a:r>
-          </a:p>
-          <a:p>
-            <a:pPr algn="l">
-              <a:lnSpc>
-                <a:spcPts val="900"/>
-              </a:lnSpc>
-              <a:spcBef>
-                <a:spcPts val="100"/>
-              </a:spcBef>
-            </a:pPr>
-            <a:r>
-              <a:rPr sz="700" b="0" i="0">
-                <a:solidFill>
-                  <a:srgbClr val="FFFFFF"/>
-                </a:solidFill>
-                <a:latin typeface="Calibri"/>
-              </a:rPr>
-              <a:t>•  Alvará de Construção emitido — Projetos arquitetônicos concluídos</a:t>
-            </a:r>
-          </a:p>
-        </p:txBody>
-      </p:sp>
-      <p:sp>
-        <p:nvSpPr>
-          <p:cNvPr id="42" name="TextBox 41"/>
-          <p:cNvSpPr txBox="1"/>
-          <p:nvPr/>
-        </p:nvSpPr>
-        <p:spPr>
-          <a:xfrm>
-            <a:off x="5094000" y="6012000"/>
-            <a:ext cx="2376000" cy="180000"/>
-          </a:xfrm>
-          <a:prstGeom prst="rect">
-            <a:avLst/>
-          </a:prstGeom>
-          <a:noFill/>
-        </p:spPr>
-        <p:txBody>
-          <a:bodyPr wrap="square">
-            <a:spAutoFit/>
-          </a:bodyPr>
-          <a:lstStyle/>
-          <a:p>
-            <a:pPr algn="l"/>
-            <a:r>
-              <a:rPr sz="600" b="1" i="0">
-                <a:solidFill>
-                  <a:srgbClr val="C8A96D"/>
-                </a:solidFill>
-                <a:latin typeface="Calibri"/>
-              </a:rPr>
-              <a:t>PRÓXIMAS ETAPAS</a:t>
-            </a:r>
-          </a:p>
-        </p:txBody>
-      </p:sp>
-      <p:sp>
-        <p:nvSpPr>
-          <p:cNvPr id="43" name="TextBox 42"/>
-          <p:cNvSpPr txBox="1"/>
-          <p:nvPr/>
-        </p:nvSpPr>
-        <p:spPr>
-          <a:xfrm>
-            <a:off x="5094000" y="6192000"/>
-            <a:ext cx="2376000" cy="1080000"/>
-          </a:xfrm>
-          <a:prstGeom prst="rect">
-            <a:avLst/>
-          </a:prstGeom>
-          <a:noFill/>
-        </p:spPr>
-        <p:txBody>
-          <a:bodyPr wrap="square">
-            <a:spAutoFit/>
-          </a:bodyPr>
-          <a:lstStyle/>
-          <a:p>
-            <a:pPr algn="l">
-              <a:lnSpc>
-                <a:spcPts val="900"/>
-              </a:lnSpc>
-            </a:pPr>
-            <a:r>
-              <a:rPr sz="700" b="0" i="0">
-                <a:solidFill>
-                  <a:srgbClr val="FFFFFF"/>
-                </a:solidFill>
-                <a:latin typeface="Calibri"/>
-              </a:rPr>
-              <a:t>•  Integralização final do equity — investidor 4%</a:t>
-            </a:r>
-          </a:p>
-          <a:p>
-            <a:pPr algn="l">
-              <a:lnSpc>
-                <a:spcPts val="900"/>
-              </a:lnSpc>
-              <a:spcBef>
-                <a:spcPts val="100"/>
-              </a:spcBef>
-            </a:pPr>
-            <a:r>
-              <a:rPr sz="700" b="0" i="0">
-                <a:solidFill>
-                  <a:srgbClr val="FFFFFF"/>
-                </a:solidFill>
-                <a:latin typeface="Calibri"/>
-              </a:rPr>
-              <a:t>•  Estruturação e emissão do CRI (R$ 330MM)</a:t>
-            </a:r>
-          </a:p>
-          <a:p>
-            <a:pPr algn="l">
-              <a:lnSpc>
-                <a:spcPts val="900"/>
-              </a:lnSpc>
-              <a:spcBef>
-                <a:spcPts val="100"/>
-              </a:spcBef>
-            </a:pPr>
-            <a:r>
-              <a:rPr sz="700" b="0" i="0">
-                <a:solidFill>
-                  <a:srgbClr val="FFFFFF"/>
-                </a:solidFill>
-                <a:latin typeface="Calibri"/>
-              </a:rPr>
-              <a:t>•  Lançamento Residencial Fase 1 — out/2025</a:t>
-            </a:r>
-          </a:p>
-          <a:p>
-            <a:pPr algn="l">
-              <a:lnSpc>
-                <a:spcPts val="900"/>
-              </a:lnSpc>
-              <a:spcBef>
-                <a:spcPts val="100"/>
-              </a:spcBef>
-            </a:pPr>
-            <a:r>
-              <a:rPr sz="700" b="0" i="0">
-                <a:solidFill>
-                  <a:srgbClr val="FFFFFF"/>
-                </a:solidFill>
-                <a:latin typeface="Calibri"/>
-              </a:rPr>
-              <a:t>•  Início obras Hotel + Residencial — set/2025 / jan/2027</a:t>
-            </a:r>
-          </a:p>
-          <a:p>
-            <a:pPr algn="l">
-              <a:lnSpc>
-                <a:spcPts val="900"/>
-              </a:lnSpc>
-              <a:spcBef>
-                <a:spcPts val="100"/>
-              </a:spcBef>
-            </a:pPr>
-            <a:r>
-              <a:rPr sz="700" b="0" i="0">
-                <a:solidFill>
-                  <a:srgbClr val="FFFFFF"/>
-                </a:solidFill>
-                <a:latin typeface="Calibri"/>
-              </a:rPr>
-              <a:t>•  Abertura Hotel Fasano — jan/2026</a:t>
-            </a:r>
-          </a:p>
-        </p:txBody>
-      </p:sp>
-      <p:sp>
-        <p:nvSpPr>
-          <p:cNvPr id="44" name="Rectangle 43"/>
+          <p:cNvPr id="107" name="Rectangle 106"/>
           <p:cNvSpPr/>
           <p:nvPr/>
         </p:nvSpPr>
         <p:spPr>
           <a:xfrm>
-            <a:off x="0" y="9612000"/>
-            <a:ext cx="7560000" cy="432000"/>
+            <a:off x="5040000" y="2772000"/>
+            <a:ext cx="2520000" cy="6696000"/>
           </a:xfrm>
           <a:prstGeom prst="rect">
             <a:avLst/>
@@ -4976,9 +7887,7 @@
             <a:srgbClr val="201A47"/>
           </a:solidFill>
           <a:ln>
-            <a:solidFill>
-              <a:srgbClr val="201A47"/>
-            </a:solidFill>
+            <a:noFill/>
           </a:ln>
         </p:spPr>
         <p:style>
@@ -5005,14 +7914,14 @@
       </p:sp>
       <p:sp>
         <p:nvSpPr>
-          <p:cNvPr id="45" name="TextBox 44"/>
+          <p:cNvPr id="108" name="TextBox 107"/>
           <p:cNvSpPr txBox="1"/>
           <p:nvPr/>
         </p:nvSpPr>
         <p:spPr>
           <a:xfrm>
-            <a:off x="180000" y="9648000"/>
-            <a:ext cx="3600000" cy="360000"/>
+            <a:off x="5148000" y="2844000"/>
+            <a:ext cx="2304000" cy="180000"/>
           </a:xfrm>
           <a:prstGeom prst="rect">
             <a:avLst/>
@@ -5020,80 +7929,51 @@
           <a:noFill/>
         </p:spPr>
         <p:txBody>
-          <a:bodyPr wrap="square">
+          <a:bodyPr wrap="none">
             <a:spAutoFit/>
           </a:bodyPr>
           <a:lstStyle/>
-          <a:p>
-            <a:pPr algn="l"/>
-            <a:r>
-              <a:rPr sz="650" b="0" i="0">
-                <a:solidFill>
-                  <a:srgbClr val="FFFFFF"/>
-                </a:solidFill>
-                <a:latin typeface="Calibri"/>
-              </a:rPr>
-              <a:t>Aval cruzado das holdings e subholdings do Grupo Prima</a:t>
-            </a:r>
-          </a:p>
-        </p:txBody>
-      </p:sp>
-      <p:sp>
-        <p:nvSpPr>
-          <p:cNvPr id="46" name="TextBox 45"/>
-          <p:cNvSpPr txBox="1"/>
-          <p:nvPr/>
-        </p:nvSpPr>
-        <p:spPr>
-          <a:xfrm>
-            <a:off x="180000" y="9648000"/>
-            <a:ext cx="7200000" cy="360000"/>
-          </a:xfrm>
-          <a:prstGeom prst="rect">
-            <a:avLst/>
-          </a:prstGeom>
-          <a:noFill/>
-        </p:spPr>
-        <p:txBody>
-          <a:bodyPr wrap="square">
-            <a:spAutoFit/>
-          </a:bodyPr>
-          <a:lstStyle/>
-          <a:p>
-            <a:pPr algn="ctr"/>
-            <a:r>
-              <a:rPr sz="700" b="1" i="0">
-                <a:solidFill>
-                  <a:srgbClr val="FFFFFF"/>
-                </a:solidFill>
-                <a:latin typeface="Calibri"/>
-              </a:rPr>
-              <a:t>Negociação Fasano concluída — Formalização em fase final</a:t>
-            </a:r>
-          </a:p>
-        </p:txBody>
-      </p:sp>
-      <p:sp>
-        <p:nvSpPr>
-          <p:cNvPr id="47" name="Rectangle 46"/>
+          <a:p/>
+          <a:p>
+            <a:pPr>
+              <a:spcBef>
+                <a:spcPts val="0"/>
+              </a:spcBef>
+              <a:spcAft>
+                <a:spcPts val="100"/>
+              </a:spcAft>
+            </a:pPr>
+            <a:r>
+              <a:rPr sz="500" b="1">
+                <a:solidFill>
+                  <a:srgbClr val="C8A96D"/>
+                </a:solidFill>
+                <a:latin typeface="Calibri"/>
+              </a:rPr>
+              <a:t>GARANTIAS CRI</a:t>
+            </a:r>
+          </a:p>
+        </p:txBody>
+      </p:sp>
+      <p:sp>
+        <p:nvSpPr>
+          <p:cNvPr id="109" name="Rectangle 108"/>
           <p:cNvSpPr/>
           <p:nvPr/>
         </p:nvSpPr>
         <p:spPr>
           <a:xfrm>
-            <a:off x="0" y="10044000"/>
-            <a:ext cx="7560000" cy="648000"/>
+            <a:off x="5148000" y="2995200"/>
+            <a:ext cx="2304000" cy="10800"/>
           </a:xfrm>
           <a:prstGeom prst="rect">
             <a:avLst/>
           </a:prstGeom>
           <a:solidFill>
-            <a:srgbClr val="1A1A2E"/>
+            <a:srgbClr val="C8A96D"/>
           </a:solidFill>
           <a:ln>
-            <a:solidFill>
-              <a:srgbClr val="1A1A2E"/>
-            </a:solidFill>
+            <a:noFill/>
           </a:ln>
         </p:spPr>
         <p:style>
@@ -5118,9 +7998,1545 @@
           </a:p>
         </p:txBody>
       </p:sp>
+      <p:sp>
+        <p:nvSpPr>
+          <p:cNvPr id="110" name="TextBox 109"/>
+          <p:cNvSpPr txBox="1"/>
+          <p:nvPr/>
+        </p:nvSpPr>
+        <p:spPr>
+          <a:xfrm>
+            <a:off x="5148000" y="3060000"/>
+            <a:ext cx="2304000" cy="900000"/>
+          </a:xfrm>
+          <a:prstGeom prst="rect">
+            <a:avLst/>
+          </a:prstGeom>
+          <a:noFill/>
+        </p:spPr>
+        <p:txBody>
+          <a:bodyPr wrap="square">
+            <a:spAutoFit/>
+          </a:bodyPr>
+          <a:lstStyle/>
+          <a:p>
+            <a:pPr>
+              <a:spcBef>
+                <a:spcPts val="0"/>
+              </a:spcBef>
+            </a:pPr>
+          </a:p>
+          <a:p>
+            <a:pPr algn="l">
+              <a:spcBef>
+                <a:spcPts val="150"/>
+              </a:spcBef>
+              <a:spcAft>
+                <a:spcPts val="0"/>
+              </a:spcAft>
+            </a:pPr>
+            <a:r>
+              <a:rPr sz="600">
+                <a:solidFill>
+                  <a:srgbClr val="887CD3"/>
+                </a:solidFill>
+                <a:latin typeface="Calibri"/>
+              </a:rPr>
+              <a:t>• </a:t>
+            </a:r>
+            <a:r>
+              <a:rPr sz="600">
+                <a:solidFill>
+                  <a:srgbClr val="FFFFFF"/>
+                </a:solidFill>
+                <a:latin typeface="Calibri"/>
+              </a:rPr>
+              <a:t>AF de 100% das cotas das Devedoras</a:t>
+            </a:r>
+          </a:p>
+          <a:p>
+            <a:pPr algn="l">
+              <a:spcBef>
+                <a:spcPts val="150"/>
+              </a:spcBef>
+              <a:spcAft>
+                <a:spcPts val="0"/>
+              </a:spcAft>
+            </a:pPr>
+            <a:r>
+              <a:rPr sz="600">
+                <a:solidFill>
+                  <a:srgbClr val="887CD3"/>
+                </a:solidFill>
+                <a:latin typeface="Calibri"/>
+              </a:rPr>
+              <a:t>• </a:t>
+            </a:r>
+            <a:r>
+              <a:rPr sz="600">
+                <a:solidFill>
+                  <a:srgbClr val="FFFFFF"/>
+                </a:solidFill>
+                <a:latin typeface="Calibri"/>
+              </a:rPr>
+              <a:t>AF terreno Residencial (260.350m²) c/ conversão para AF de unidades</a:t>
+            </a:r>
+          </a:p>
+          <a:p>
+            <a:pPr algn="l">
+              <a:spcBef>
+                <a:spcPts val="150"/>
+              </a:spcBef>
+              <a:spcAft>
+                <a:spcPts val="0"/>
+              </a:spcAft>
+            </a:pPr>
+            <a:r>
+              <a:rPr sz="600">
+                <a:solidFill>
+                  <a:srgbClr val="887CD3"/>
+                </a:solidFill>
+                <a:latin typeface="Calibri"/>
+              </a:rPr>
+              <a:t>• </a:t>
+            </a:r>
+            <a:r>
+              <a:rPr sz="600">
+                <a:solidFill>
+                  <a:srgbClr val="FFFFFF"/>
+                </a:solidFill>
+                <a:latin typeface="Calibri"/>
+              </a:rPr>
+              <a:t>AF terreno Hoteleiro (306.017m²)</a:t>
+            </a:r>
+          </a:p>
+          <a:p>
+            <a:pPr algn="l">
+              <a:spcBef>
+                <a:spcPts val="150"/>
+              </a:spcBef>
+              <a:spcAft>
+                <a:spcPts val="0"/>
+              </a:spcAft>
+            </a:pPr>
+            <a:r>
+              <a:rPr sz="600">
+                <a:solidFill>
+                  <a:srgbClr val="887CD3"/>
+                </a:solidFill>
+                <a:latin typeface="Calibri"/>
+              </a:rPr>
+              <a:t>• </a:t>
+            </a:r>
+            <a:r>
+              <a:rPr sz="600">
+                <a:solidFill>
+                  <a:srgbClr val="FFFFFF"/>
+                </a:solidFill>
+                <a:latin typeface="Calibri"/>
+              </a:rPr>
+              <a:t>Cessão fiduciária de recebíveis do Residencial e das receitas hoteleiras</a:t>
+            </a:r>
+          </a:p>
+          <a:p>
+            <a:pPr algn="l">
+              <a:spcBef>
+                <a:spcPts val="150"/>
+              </a:spcBef>
+              <a:spcAft>
+                <a:spcPts val="0"/>
+              </a:spcAft>
+            </a:pPr>
+            <a:r>
+              <a:rPr sz="600">
+                <a:solidFill>
+                  <a:srgbClr val="887CD3"/>
+                </a:solidFill>
+                <a:latin typeface="Calibri"/>
+              </a:rPr>
+              <a:t>• </a:t>
+            </a:r>
+            <a:r>
+              <a:rPr sz="600">
+                <a:solidFill>
+                  <a:srgbClr val="FFFFFF"/>
+                </a:solidFill>
+                <a:latin typeface="Calibri"/>
+              </a:rPr>
+              <a:t>Aval cruzado das holdings e subholdings do Grupo Prima</a:t>
+            </a:r>
+          </a:p>
+        </p:txBody>
+      </p:sp>
+      <p:sp>
+        <p:nvSpPr>
+          <p:cNvPr id="111" name="Rectangle 110"/>
+          <p:cNvSpPr/>
+          <p:nvPr/>
+        </p:nvSpPr>
+        <p:spPr>
+          <a:xfrm>
+            <a:off x="5148000" y="4032000"/>
+            <a:ext cx="2304000" cy="10800"/>
+          </a:xfrm>
+          <a:prstGeom prst="rect">
+            <a:avLst/>
+          </a:prstGeom>
+          <a:solidFill>
+            <a:srgbClr val="887CD3"/>
+          </a:solidFill>
+          <a:ln>
+            <a:noFill/>
+          </a:ln>
+        </p:spPr>
+        <p:style>
+          <a:lnRef idx="1">
+            <a:schemeClr val="accent1"/>
+          </a:lnRef>
+          <a:fillRef idx="3">
+            <a:schemeClr val="accent1"/>
+          </a:fillRef>
+          <a:effectRef idx="2">
+            <a:schemeClr val="accent1"/>
+          </a:effectRef>
+          <a:fontRef idx="minor">
+            <a:schemeClr val="lt1"/>
+          </a:fontRef>
+        </p:style>
+        <p:txBody>
+          <a:bodyPr rtlCol="0" anchor="ctr"/>
+          <a:lstStyle/>
+          <a:p>
+            <a:pPr algn="ctr"/>
+          </a:p>
+        </p:txBody>
+      </p:sp>
+      <p:sp>
+        <p:nvSpPr>
+          <p:cNvPr id="112" name="TextBox 111"/>
+          <p:cNvSpPr txBox="1"/>
+          <p:nvPr/>
+        </p:nvSpPr>
+        <p:spPr>
+          <a:xfrm>
+            <a:off x="5148000" y="4104000"/>
+            <a:ext cx="2304000" cy="180000"/>
+          </a:xfrm>
+          <a:prstGeom prst="rect">
+            <a:avLst/>
+          </a:prstGeom>
+          <a:noFill/>
+        </p:spPr>
+        <p:txBody>
+          <a:bodyPr wrap="none">
+            <a:spAutoFit/>
+          </a:bodyPr>
+          <a:lstStyle/>
+          <a:p/>
+          <a:p>
+            <a:pPr>
+              <a:spcBef>
+                <a:spcPts val="0"/>
+              </a:spcBef>
+              <a:spcAft>
+                <a:spcPts val="100"/>
+              </a:spcAft>
+            </a:pPr>
+            <a:r>
+              <a:rPr sz="500" b="1">
+                <a:solidFill>
+                  <a:srgbClr val="C8A96D"/>
+                </a:solidFill>
+                <a:latin typeface="Calibri"/>
+              </a:rPr>
+              <a:t>MARCOS CONCLUÍDOS</a:t>
+            </a:r>
+          </a:p>
+        </p:txBody>
+      </p:sp>
+      <p:sp>
+        <p:nvSpPr>
+          <p:cNvPr id="113" name="Rectangle 112"/>
+          <p:cNvSpPr/>
+          <p:nvPr/>
+        </p:nvSpPr>
+        <p:spPr>
+          <a:xfrm>
+            <a:off x="5148000" y="4255200"/>
+            <a:ext cx="2304000" cy="10800"/>
+          </a:xfrm>
+          <a:prstGeom prst="rect">
+            <a:avLst/>
+          </a:prstGeom>
+          <a:solidFill>
+            <a:srgbClr val="C8A96D"/>
+          </a:solidFill>
+          <a:ln>
+            <a:noFill/>
+          </a:ln>
+        </p:spPr>
+        <p:style>
+          <a:lnRef idx="1">
+            <a:schemeClr val="accent1"/>
+          </a:lnRef>
+          <a:fillRef idx="3">
+            <a:schemeClr val="accent1"/>
+          </a:fillRef>
+          <a:effectRef idx="2">
+            <a:schemeClr val="accent1"/>
+          </a:effectRef>
+          <a:fontRef idx="minor">
+            <a:schemeClr val="lt1"/>
+          </a:fontRef>
+        </p:style>
+        <p:txBody>
+          <a:bodyPr rtlCol="0" anchor="ctr"/>
+          <a:lstStyle/>
+          <a:p>
+            <a:pPr algn="ctr"/>
+          </a:p>
+        </p:txBody>
+      </p:sp>
+      <p:sp>
+        <p:nvSpPr>
+          <p:cNvPr id="114" name="TextBox 113"/>
+          <p:cNvSpPr txBox="1"/>
+          <p:nvPr/>
+        </p:nvSpPr>
+        <p:spPr>
+          <a:xfrm>
+            <a:off x="5148000" y="4320000"/>
+            <a:ext cx="2304000" cy="900000"/>
+          </a:xfrm>
+          <a:prstGeom prst="rect">
+            <a:avLst/>
+          </a:prstGeom>
+          <a:noFill/>
+        </p:spPr>
+        <p:txBody>
+          <a:bodyPr wrap="square">
+            <a:spAutoFit/>
+          </a:bodyPr>
+          <a:lstStyle/>
+          <a:p>
+            <a:pPr>
+              <a:spcBef>
+                <a:spcPts val="0"/>
+              </a:spcBef>
+            </a:pPr>
+          </a:p>
+          <a:p>
+            <a:pPr algn="l">
+              <a:spcBef>
+                <a:spcPts val="150"/>
+              </a:spcBef>
+              <a:spcAft>
+                <a:spcPts val="0"/>
+              </a:spcAft>
+            </a:pPr>
+            <a:r>
+              <a:rPr sz="600">
+                <a:solidFill>
+                  <a:srgbClr val="887CD3"/>
+                </a:solidFill>
+                <a:latin typeface="Calibri"/>
+              </a:rPr>
+              <a:t>• </a:t>
+            </a:r>
+            <a:r>
+              <a:rPr sz="600">
+                <a:solidFill>
+                  <a:srgbClr val="FFFFFF"/>
+                </a:solidFill>
+                <a:latin typeface="Calibri"/>
+              </a:rPr>
+              <a:t>Aquisição de terreno (2008/2009) — a valor de mercado</a:t>
+            </a:r>
+          </a:p>
+          <a:p>
+            <a:pPr algn="l">
+              <a:spcBef>
+                <a:spcPts val="150"/>
+              </a:spcBef>
+              <a:spcAft>
+                <a:spcPts val="0"/>
+              </a:spcAft>
+            </a:pPr>
+            <a:r>
+              <a:rPr sz="600">
+                <a:solidFill>
+                  <a:srgbClr val="887CD3"/>
+                </a:solidFill>
+                <a:latin typeface="Calibri"/>
+              </a:rPr>
+              <a:t>• </a:t>
+            </a:r>
+            <a:r>
+              <a:rPr sz="600">
+                <a:solidFill>
+                  <a:srgbClr val="FFFFFF"/>
+                </a:solidFill>
+                <a:latin typeface="Calibri"/>
+              </a:rPr>
+              <a:t>Licença Prévia emitida 2012 — renovada até mar/2030</a:t>
+            </a:r>
+          </a:p>
+          <a:p>
+            <a:pPr algn="l">
+              <a:spcBef>
+                <a:spcPts val="150"/>
+              </a:spcBef>
+              <a:spcAft>
+                <a:spcPts val="0"/>
+              </a:spcAft>
+            </a:pPr>
+            <a:r>
+              <a:rPr sz="600">
+                <a:solidFill>
+                  <a:srgbClr val="887CD3"/>
+                </a:solidFill>
+                <a:latin typeface="Calibri"/>
+              </a:rPr>
+              <a:t>• </a:t>
+            </a:r>
+            <a:r>
+              <a:rPr sz="600">
+                <a:solidFill>
+                  <a:srgbClr val="FFFFFF"/>
+                </a:solidFill>
+                <a:latin typeface="Calibri"/>
+              </a:rPr>
+              <a:t>Licença de Instalação emitida jan/2024 — válida até jan/2030</a:t>
+            </a:r>
+          </a:p>
+          <a:p>
+            <a:pPr algn="l">
+              <a:spcBef>
+                <a:spcPts val="150"/>
+              </a:spcBef>
+              <a:spcAft>
+                <a:spcPts val="0"/>
+              </a:spcAft>
+            </a:pPr>
+            <a:r>
+              <a:rPr sz="600">
+                <a:solidFill>
+                  <a:srgbClr val="887CD3"/>
+                </a:solidFill>
+                <a:latin typeface="Calibri"/>
+              </a:rPr>
+              <a:t>• </a:t>
+            </a:r>
+            <a:r>
+              <a:rPr sz="600">
+                <a:solidFill>
+                  <a:srgbClr val="FFFFFF"/>
+                </a:solidFill>
+                <a:latin typeface="Calibri"/>
+              </a:rPr>
+              <a:t>Alvará de Construção emitido · Projetos arquitetônicos concluídos</a:t>
+            </a:r>
+          </a:p>
+          <a:p>
+            <a:pPr algn="l">
+              <a:spcBef>
+                <a:spcPts val="150"/>
+              </a:spcBef>
+              <a:spcAft>
+                <a:spcPts val="0"/>
+              </a:spcAft>
+            </a:pPr>
+            <a:r>
+              <a:rPr sz="600">
+                <a:solidFill>
+                  <a:srgbClr val="887CD3"/>
+                </a:solidFill>
+                <a:latin typeface="Calibri"/>
+              </a:rPr>
+              <a:t>• </a:t>
+            </a:r>
+            <a:r>
+              <a:rPr sz="600">
+                <a:solidFill>
+                  <a:srgbClr val="FFFFFF"/>
+                </a:solidFill>
+                <a:latin typeface="Calibri"/>
+              </a:rPr>
+              <a:t>Negociação Fasano concluída — formalização em fase final</a:t>
+            </a:r>
+          </a:p>
+        </p:txBody>
+      </p:sp>
+      <p:sp>
+        <p:nvSpPr>
+          <p:cNvPr id="115" name="Rectangle 114"/>
+          <p:cNvSpPr/>
+          <p:nvPr/>
+        </p:nvSpPr>
+        <p:spPr>
+          <a:xfrm>
+            <a:off x="5148000" y="5292000"/>
+            <a:ext cx="2304000" cy="10800"/>
+          </a:xfrm>
+          <a:prstGeom prst="rect">
+            <a:avLst/>
+          </a:prstGeom>
+          <a:solidFill>
+            <a:srgbClr val="887CD3"/>
+          </a:solidFill>
+          <a:ln>
+            <a:noFill/>
+          </a:ln>
+        </p:spPr>
+        <p:style>
+          <a:lnRef idx="1">
+            <a:schemeClr val="accent1"/>
+          </a:lnRef>
+          <a:fillRef idx="3">
+            <a:schemeClr val="accent1"/>
+          </a:fillRef>
+          <a:effectRef idx="2">
+            <a:schemeClr val="accent1"/>
+          </a:effectRef>
+          <a:fontRef idx="minor">
+            <a:schemeClr val="lt1"/>
+          </a:fontRef>
+        </p:style>
+        <p:txBody>
+          <a:bodyPr rtlCol="0" anchor="ctr"/>
+          <a:lstStyle/>
+          <a:p>
+            <a:pPr algn="ctr"/>
+          </a:p>
+        </p:txBody>
+      </p:sp>
+      <p:sp>
+        <p:nvSpPr>
+          <p:cNvPr id="116" name="TextBox 115"/>
+          <p:cNvSpPr txBox="1"/>
+          <p:nvPr/>
+        </p:nvSpPr>
+        <p:spPr>
+          <a:xfrm>
+            <a:off x="5148000" y="5364000"/>
+            <a:ext cx="2304000" cy="180000"/>
+          </a:xfrm>
+          <a:prstGeom prst="rect">
+            <a:avLst/>
+          </a:prstGeom>
+          <a:noFill/>
+        </p:spPr>
+        <p:txBody>
+          <a:bodyPr wrap="none">
+            <a:spAutoFit/>
+          </a:bodyPr>
+          <a:lstStyle/>
+          <a:p/>
+          <a:p>
+            <a:pPr>
+              <a:spcBef>
+                <a:spcPts val="0"/>
+              </a:spcBef>
+              <a:spcAft>
+                <a:spcPts val="100"/>
+              </a:spcAft>
+            </a:pPr>
+            <a:r>
+              <a:rPr sz="500" b="1">
+                <a:solidFill>
+                  <a:srgbClr val="C8A96D"/>
+                </a:solidFill>
+                <a:latin typeface="Calibri"/>
+              </a:rPr>
+              <a:t>PRÓXIMAS ETAPAS</a:t>
+            </a:r>
+          </a:p>
+        </p:txBody>
+      </p:sp>
+      <p:sp>
+        <p:nvSpPr>
+          <p:cNvPr id="117" name="Rectangle 116"/>
+          <p:cNvSpPr/>
+          <p:nvPr/>
+        </p:nvSpPr>
+        <p:spPr>
+          <a:xfrm>
+            <a:off x="5148000" y="5515200"/>
+            <a:ext cx="2304000" cy="10800"/>
+          </a:xfrm>
+          <a:prstGeom prst="rect">
+            <a:avLst/>
+          </a:prstGeom>
+          <a:solidFill>
+            <a:srgbClr val="C8A96D"/>
+          </a:solidFill>
+          <a:ln>
+            <a:noFill/>
+          </a:ln>
+        </p:spPr>
+        <p:style>
+          <a:lnRef idx="1">
+            <a:schemeClr val="accent1"/>
+          </a:lnRef>
+          <a:fillRef idx="3">
+            <a:schemeClr val="accent1"/>
+          </a:fillRef>
+          <a:effectRef idx="2">
+            <a:schemeClr val="accent1"/>
+          </a:effectRef>
+          <a:fontRef idx="minor">
+            <a:schemeClr val="lt1"/>
+          </a:fontRef>
+        </p:style>
+        <p:txBody>
+          <a:bodyPr rtlCol="0" anchor="ctr"/>
+          <a:lstStyle/>
+          <a:p>
+            <a:pPr algn="ctr"/>
+          </a:p>
+        </p:txBody>
+      </p:sp>
+      <p:sp>
+        <p:nvSpPr>
+          <p:cNvPr id="118" name="TextBox 117"/>
+          <p:cNvSpPr txBox="1"/>
+          <p:nvPr/>
+        </p:nvSpPr>
+        <p:spPr>
+          <a:xfrm>
+            <a:off x="5148000" y="5580000"/>
+            <a:ext cx="2304000" cy="900000"/>
+          </a:xfrm>
+          <a:prstGeom prst="rect">
+            <a:avLst/>
+          </a:prstGeom>
+          <a:noFill/>
+        </p:spPr>
+        <p:txBody>
+          <a:bodyPr wrap="square">
+            <a:spAutoFit/>
+          </a:bodyPr>
+          <a:lstStyle/>
+          <a:p>
+            <a:pPr>
+              <a:spcBef>
+                <a:spcPts val="0"/>
+              </a:spcBef>
+            </a:pPr>
+          </a:p>
+          <a:p>
+            <a:pPr algn="l">
+              <a:spcBef>
+                <a:spcPts val="150"/>
+              </a:spcBef>
+              <a:spcAft>
+                <a:spcPts val="0"/>
+              </a:spcAft>
+            </a:pPr>
+            <a:r>
+              <a:rPr sz="600">
+                <a:solidFill>
+                  <a:srgbClr val="887CD3"/>
+                </a:solidFill>
+                <a:latin typeface="Calibri"/>
+              </a:rPr>
+              <a:t>• </a:t>
+            </a:r>
+            <a:r>
+              <a:rPr sz="600">
+                <a:solidFill>
+                  <a:srgbClr val="FFFFFF"/>
+                </a:solidFill>
+                <a:latin typeface="Calibri"/>
+              </a:rPr>
+              <a:t>Integralização final do equity — investidor 49%</a:t>
+            </a:r>
+          </a:p>
+          <a:p>
+            <a:pPr algn="l">
+              <a:spcBef>
+                <a:spcPts val="150"/>
+              </a:spcBef>
+              <a:spcAft>
+                <a:spcPts val="0"/>
+              </a:spcAft>
+            </a:pPr>
+            <a:r>
+              <a:rPr sz="600">
+                <a:solidFill>
+                  <a:srgbClr val="887CD3"/>
+                </a:solidFill>
+                <a:latin typeface="Calibri"/>
+              </a:rPr>
+              <a:t>• </a:t>
+            </a:r>
+            <a:r>
+              <a:rPr sz="600">
+                <a:solidFill>
+                  <a:srgbClr val="FFFFFF"/>
+                </a:solidFill>
+                <a:latin typeface="Calibri"/>
+              </a:rPr>
+              <a:t>Estruturação e emissão do CRI (R$ 170MM)</a:t>
+            </a:r>
+          </a:p>
+          <a:p>
+            <a:pPr algn="l">
+              <a:spcBef>
+                <a:spcPts val="150"/>
+              </a:spcBef>
+              <a:spcAft>
+                <a:spcPts val="0"/>
+              </a:spcAft>
+            </a:pPr>
+            <a:r>
+              <a:rPr sz="600">
+                <a:solidFill>
+                  <a:srgbClr val="887CD3"/>
+                </a:solidFill>
+                <a:latin typeface="Calibri"/>
+              </a:rPr>
+              <a:t>• </a:t>
+            </a:r>
+            <a:r>
+              <a:rPr sz="600">
+                <a:solidFill>
+                  <a:srgbClr val="FFFFFF"/>
+                </a:solidFill>
+                <a:latin typeface="Calibri"/>
+              </a:rPr>
+              <a:t>Lançamento Residencial Fase 1 — out/2026</a:t>
+            </a:r>
+          </a:p>
+          <a:p>
+            <a:pPr algn="l">
+              <a:spcBef>
+                <a:spcPts val="150"/>
+              </a:spcBef>
+              <a:spcAft>
+                <a:spcPts val="0"/>
+              </a:spcAft>
+            </a:pPr>
+            <a:r>
+              <a:rPr sz="600">
+                <a:solidFill>
+                  <a:srgbClr val="887CD3"/>
+                </a:solidFill>
+                <a:latin typeface="Calibri"/>
+              </a:rPr>
+              <a:t>• </a:t>
+            </a:r>
+            <a:r>
+              <a:rPr sz="600">
+                <a:solidFill>
+                  <a:srgbClr val="FFFFFF"/>
+                </a:solidFill>
+                <a:latin typeface="Calibri"/>
+              </a:rPr>
+              <a:t>Início obras Hotel + Residencial — out/2026 / abr/2027</a:t>
+            </a:r>
+          </a:p>
+          <a:p>
+            <a:pPr algn="l">
+              <a:spcBef>
+                <a:spcPts val="150"/>
+              </a:spcBef>
+              <a:spcAft>
+                <a:spcPts val="0"/>
+              </a:spcAft>
+            </a:pPr>
+            <a:r>
+              <a:rPr sz="600">
+                <a:solidFill>
+                  <a:srgbClr val="887CD3"/>
+                </a:solidFill>
+                <a:latin typeface="Calibri"/>
+              </a:rPr>
+              <a:t>• </a:t>
+            </a:r>
+            <a:r>
+              <a:rPr sz="600">
+                <a:solidFill>
+                  <a:srgbClr val="FFFFFF"/>
+                </a:solidFill>
+                <a:latin typeface="Calibri"/>
+              </a:rPr>
+              <a:t>Abertura Hotel Fasano — jan/2029</a:t>
+            </a:r>
+          </a:p>
+        </p:txBody>
+      </p:sp>
+      <p:sp>
+        <p:nvSpPr>
+          <p:cNvPr id="119" name="Rectangle 118"/>
+          <p:cNvSpPr/>
+          <p:nvPr/>
+        </p:nvSpPr>
+        <p:spPr>
+          <a:xfrm>
+            <a:off x="5148000" y="6552000"/>
+            <a:ext cx="2304000" cy="10800"/>
+          </a:xfrm>
+          <a:prstGeom prst="rect">
+            <a:avLst/>
+          </a:prstGeom>
+          <a:solidFill>
+            <a:srgbClr val="887CD3"/>
+          </a:solidFill>
+          <a:ln>
+            <a:noFill/>
+          </a:ln>
+        </p:spPr>
+        <p:style>
+          <a:lnRef idx="1">
+            <a:schemeClr val="accent1"/>
+          </a:lnRef>
+          <a:fillRef idx="3">
+            <a:schemeClr val="accent1"/>
+          </a:fillRef>
+          <a:effectRef idx="2">
+            <a:schemeClr val="accent1"/>
+          </a:effectRef>
+          <a:fontRef idx="minor">
+            <a:schemeClr val="lt1"/>
+          </a:fontRef>
+        </p:style>
+        <p:txBody>
+          <a:bodyPr rtlCol="0" anchor="ctr"/>
+          <a:lstStyle/>
+          <a:p>
+            <a:pPr algn="ctr"/>
+          </a:p>
+        </p:txBody>
+      </p:sp>
+      <p:sp>
+        <p:nvSpPr>
+          <p:cNvPr id="120" name="Rectangle 119"/>
+          <p:cNvSpPr/>
+          <p:nvPr/>
+        </p:nvSpPr>
+        <p:spPr>
+          <a:xfrm>
+            <a:off x="0" y="9468000"/>
+            <a:ext cx="7560000" cy="720000"/>
+          </a:xfrm>
+          <a:prstGeom prst="rect">
+            <a:avLst/>
+          </a:prstGeom>
+          <a:solidFill>
+            <a:srgbClr val="18143A"/>
+          </a:solidFill>
+          <a:ln>
+            <a:noFill/>
+          </a:ln>
+        </p:spPr>
+        <p:style>
+          <a:lnRef idx="1">
+            <a:schemeClr val="accent1"/>
+          </a:lnRef>
+          <a:fillRef idx="3">
+            <a:schemeClr val="accent1"/>
+          </a:fillRef>
+          <a:effectRef idx="2">
+            <a:schemeClr val="accent1"/>
+          </a:effectRef>
+          <a:fontRef idx="minor">
+            <a:schemeClr val="lt1"/>
+          </a:fontRef>
+        </p:style>
+        <p:txBody>
+          <a:bodyPr rtlCol="0" anchor="ctr"/>
+          <a:lstStyle/>
+          <a:p>
+            <a:pPr algn="ctr"/>
+          </a:p>
+        </p:txBody>
+      </p:sp>
+      <p:sp>
+        <p:nvSpPr>
+          <p:cNvPr id="121" name="TextBox 120"/>
+          <p:cNvSpPr txBox="1"/>
+          <p:nvPr/>
+        </p:nvSpPr>
+        <p:spPr>
+          <a:xfrm>
+            <a:off x="108000" y="9504000"/>
+            <a:ext cx="2304000" cy="144000"/>
+          </a:xfrm>
+          <a:prstGeom prst="rect">
+            <a:avLst/>
+          </a:prstGeom>
+          <a:noFill/>
+        </p:spPr>
+        <p:txBody>
+          <a:bodyPr wrap="none">
+            <a:spAutoFit/>
+          </a:bodyPr>
+          <a:lstStyle/>
+          <a:p/>
+          <a:p>
+            <a:pPr>
+              <a:spcBef>
+                <a:spcPts val="0"/>
+              </a:spcBef>
+              <a:spcAft>
+                <a:spcPts val="100"/>
+              </a:spcAft>
+            </a:pPr>
+            <a:r>
+              <a:rPr sz="500" b="1">
+                <a:solidFill>
+                  <a:srgbClr val="C8A96D"/>
+                </a:solidFill>
+                <a:latin typeface="Calibri"/>
+              </a:rPr>
+              <a:t>GARANTIAS CRI</a:t>
+            </a:r>
+          </a:p>
+        </p:txBody>
+      </p:sp>
+      <p:sp>
+        <p:nvSpPr>
+          <p:cNvPr id="122" name="TextBox 121"/>
+          <p:cNvSpPr txBox="1"/>
+          <p:nvPr/>
+        </p:nvSpPr>
+        <p:spPr>
+          <a:xfrm>
+            <a:off x="108000" y="9648000"/>
+            <a:ext cx="2304000" cy="504000"/>
+          </a:xfrm>
+          <a:prstGeom prst="rect">
+            <a:avLst/>
+          </a:prstGeom>
+          <a:noFill/>
+        </p:spPr>
+        <p:txBody>
+          <a:bodyPr wrap="square">
+            <a:spAutoFit/>
+          </a:bodyPr>
+          <a:lstStyle/>
+          <a:p>
+            <a:pPr>
+              <a:spcBef>
+                <a:spcPts val="0"/>
+              </a:spcBef>
+            </a:pPr>
+          </a:p>
+          <a:p>
+            <a:pPr algn="l">
+              <a:spcBef>
+                <a:spcPts val="150"/>
+              </a:spcBef>
+              <a:spcAft>
+                <a:spcPts val="0"/>
+              </a:spcAft>
+            </a:pPr>
+            <a:r>
+              <a:rPr sz="550">
+                <a:solidFill>
+                  <a:srgbClr val="887CD3"/>
+                </a:solidFill>
+                <a:latin typeface="Calibri"/>
+              </a:rPr>
+              <a:t>• </a:t>
+            </a:r>
+            <a:r>
+              <a:rPr sz="550">
+                <a:solidFill>
+                  <a:srgbClr val="FFFFFF"/>
+                </a:solidFill>
+                <a:latin typeface="Calibri"/>
+              </a:rPr>
+              <a:t>AF de 100% das cotas das Devedoras</a:t>
+            </a:r>
+          </a:p>
+          <a:p>
+            <a:pPr algn="l">
+              <a:spcBef>
+                <a:spcPts val="150"/>
+              </a:spcBef>
+              <a:spcAft>
+                <a:spcPts val="0"/>
+              </a:spcAft>
+            </a:pPr>
+            <a:r>
+              <a:rPr sz="550">
+                <a:solidFill>
+                  <a:srgbClr val="887CD3"/>
+                </a:solidFill>
+                <a:latin typeface="Calibri"/>
+              </a:rPr>
+              <a:t>• </a:t>
+            </a:r>
+            <a:r>
+              <a:rPr sz="550">
+                <a:solidFill>
+                  <a:srgbClr val="FFFFFF"/>
+                </a:solidFill>
+                <a:latin typeface="Calibri"/>
+              </a:rPr>
+              <a:t>AF terreno Residencial (260.350m²) c/ conversão para AF de unidades</a:t>
+            </a:r>
+          </a:p>
+          <a:p>
+            <a:pPr algn="l">
+              <a:spcBef>
+                <a:spcPts val="150"/>
+              </a:spcBef>
+              <a:spcAft>
+                <a:spcPts val="0"/>
+              </a:spcAft>
+            </a:pPr>
+            <a:r>
+              <a:rPr sz="550">
+                <a:solidFill>
+                  <a:srgbClr val="887CD3"/>
+                </a:solidFill>
+                <a:latin typeface="Calibri"/>
+              </a:rPr>
+              <a:t>• </a:t>
+            </a:r>
+            <a:r>
+              <a:rPr sz="550">
+                <a:solidFill>
+                  <a:srgbClr val="FFFFFF"/>
+                </a:solidFill>
+                <a:latin typeface="Calibri"/>
+              </a:rPr>
+              <a:t>AF terreno Hoteleiro (306.017m²)</a:t>
+            </a:r>
+          </a:p>
+          <a:p>
+            <a:pPr algn="l">
+              <a:spcBef>
+                <a:spcPts val="150"/>
+              </a:spcBef>
+              <a:spcAft>
+                <a:spcPts val="0"/>
+              </a:spcAft>
+            </a:pPr>
+            <a:r>
+              <a:rPr sz="550">
+                <a:solidFill>
+                  <a:srgbClr val="887CD3"/>
+                </a:solidFill>
+                <a:latin typeface="Calibri"/>
+              </a:rPr>
+              <a:t>• </a:t>
+            </a:r>
+            <a:r>
+              <a:rPr sz="550">
+                <a:solidFill>
+                  <a:srgbClr val="FFFFFF"/>
+                </a:solidFill>
+                <a:latin typeface="Calibri"/>
+              </a:rPr>
+              <a:t>Cessão fiduciária de recebíveis do Residencial e das receitas hoteleiras</a:t>
+            </a:r>
+          </a:p>
+          <a:p>
+            <a:pPr algn="l">
+              <a:spcBef>
+                <a:spcPts val="150"/>
+              </a:spcBef>
+              <a:spcAft>
+                <a:spcPts val="0"/>
+              </a:spcAft>
+            </a:pPr>
+            <a:r>
+              <a:rPr sz="550">
+                <a:solidFill>
+                  <a:srgbClr val="887CD3"/>
+                </a:solidFill>
+                <a:latin typeface="Calibri"/>
+              </a:rPr>
+              <a:t>• </a:t>
+            </a:r>
+            <a:r>
+              <a:rPr sz="550">
+                <a:solidFill>
+                  <a:srgbClr val="FFFFFF"/>
+                </a:solidFill>
+                <a:latin typeface="Calibri"/>
+              </a:rPr>
+              <a:t>Aval cruzado das holdings e subholdings do Grupo Prima</a:t>
+            </a:r>
+          </a:p>
+        </p:txBody>
+      </p:sp>
+      <p:sp>
+        <p:nvSpPr>
+          <p:cNvPr id="123" name="TextBox 122"/>
+          <p:cNvSpPr txBox="1"/>
+          <p:nvPr/>
+        </p:nvSpPr>
+        <p:spPr>
+          <a:xfrm>
+            <a:off x="2628000" y="9504000"/>
+            <a:ext cx="2304000" cy="144000"/>
+          </a:xfrm>
+          <a:prstGeom prst="rect">
+            <a:avLst/>
+          </a:prstGeom>
+          <a:noFill/>
+        </p:spPr>
+        <p:txBody>
+          <a:bodyPr wrap="none">
+            <a:spAutoFit/>
+          </a:bodyPr>
+          <a:lstStyle/>
+          <a:p/>
+          <a:p>
+            <a:pPr>
+              <a:spcBef>
+                <a:spcPts val="0"/>
+              </a:spcBef>
+              <a:spcAft>
+                <a:spcPts val="100"/>
+              </a:spcAft>
+            </a:pPr>
+            <a:r>
+              <a:rPr sz="500" b="1">
+                <a:solidFill>
+                  <a:srgbClr val="C8A96D"/>
+                </a:solidFill>
+                <a:latin typeface="Calibri"/>
+              </a:rPr>
+              <a:t>MARCOS CONCLUÍDOS</a:t>
+            </a:r>
+          </a:p>
+        </p:txBody>
+      </p:sp>
+      <p:sp>
+        <p:nvSpPr>
+          <p:cNvPr id="124" name="TextBox 123"/>
+          <p:cNvSpPr txBox="1"/>
+          <p:nvPr/>
+        </p:nvSpPr>
+        <p:spPr>
+          <a:xfrm>
+            <a:off x="2628000" y="9648000"/>
+            <a:ext cx="2304000" cy="504000"/>
+          </a:xfrm>
+          <a:prstGeom prst="rect">
+            <a:avLst/>
+          </a:prstGeom>
+          <a:noFill/>
+        </p:spPr>
+        <p:txBody>
+          <a:bodyPr wrap="square">
+            <a:spAutoFit/>
+          </a:bodyPr>
+          <a:lstStyle/>
+          <a:p>
+            <a:pPr>
+              <a:spcBef>
+                <a:spcPts val="0"/>
+              </a:spcBef>
+            </a:pPr>
+          </a:p>
+          <a:p>
+            <a:pPr algn="l">
+              <a:spcBef>
+                <a:spcPts val="150"/>
+              </a:spcBef>
+              <a:spcAft>
+                <a:spcPts val="0"/>
+              </a:spcAft>
+            </a:pPr>
+            <a:r>
+              <a:rPr sz="550">
+                <a:solidFill>
+                  <a:srgbClr val="887CD3"/>
+                </a:solidFill>
+                <a:latin typeface="Calibri"/>
+              </a:rPr>
+              <a:t>• </a:t>
+            </a:r>
+            <a:r>
+              <a:rPr sz="550">
+                <a:solidFill>
+                  <a:srgbClr val="FFFFFF"/>
+                </a:solidFill>
+                <a:latin typeface="Calibri"/>
+              </a:rPr>
+              <a:t>Aquisição de terreno (2008/2009) — a valor de mercado</a:t>
+            </a:r>
+          </a:p>
+          <a:p>
+            <a:pPr algn="l">
+              <a:spcBef>
+                <a:spcPts val="150"/>
+              </a:spcBef>
+              <a:spcAft>
+                <a:spcPts val="0"/>
+              </a:spcAft>
+            </a:pPr>
+            <a:r>
+              <a:rPr sz="550">
+                <a:solidFill>
+                  <a:srgbClr val="887CD3"/>
+                </a:solidFill>
+                <a:latin typeface="Calibri"/>
+              </a:rPr>
+              <a:t>• </a:t>
+            </a:r>
+            <a:r>
+              <a:rPr sz="550">
+                <a:solidFill>
+                  <a:srgbClr val="FFFFFF"/>
+                </a:solidFill>
+                <a:latin typeface="Calibri"/>
+              </a:rPr>
+              <a:t>Licença Prévia emitida 2012 — renovada até mar/2030</a:t>
+            </a:r>
+          </a:p>
+          <a:p>
+            <a:pPr algn="l">
+              <a:spcBef>
+                <a:spcPts val="150"/>
+              </a:spcBef>
+              <a:spcAft>
+                <a:spcPts val="0"/>
+              </a:spcAft>
+            </a:pPr>
+            <a:r>
+              <a:rPr sz="550">
+                <a:solidFill>
+                  <a:srgbClr val="887CD3"/>
+                </a:solidFill>
+                <a:latin typeface="Calibri"/>
+              </a:rPr>
+              <a:t>• </a:t>
+            </a:r>
+            <a:r>
+              <a:rPr sz="550">
+                <a:solidFill>
+                  <a:srgbClr val="FFFFFF"/>
+                </a:solidFill>
+                <a:latin typeface="Calibri"/>
+              </a:rPr>
+              <a:t>Licença de Instalação emitida jan/2024 — válida até jan/2030</a:t>
+            </a:r>
+          </a:p>
+          <a:p>
+            <a:pPr algn="l">
+              <a:spcBef>
+                <a:spcPts val="150"/>
+              </a:spcBef>
+              <a:spcAft>
+                <a:spcPts val="0"/>
+              </a:spcAft>
+            </a:pPr>
+            <a:r>
+              <a:rPr sz="550">
+                <a:solidFill>
+                  <a:srgbClr val="887CD3"/>
+                </a:solidFill>
+                <a:latin typeface="Calibri"/>
+              </a:rPr>
+              <a:t>• </a:t>
+            </a:r>
+            <a:r>
+              <a:rPr sz="550">
+                <a:solidFill>
+                  <a:srgbClr val="FFFFFF"/>
+                </a:solidFill>
+                <a:latin typeface="Calibri"/>
+              </a:rPr>
+              <a:t>Alvará de Construção emitido · Projetos arquitetônicos concluídos</a:t>
+            </a:r>
+          </a:p>
+          <a:p>
+            <a:pPr algn="l">
+              <a:spcBef>
+                <a:spcPts val="150"/>
+              </a:spcBef>
+              <a:spcAft>
+                <a:spcPts val="0"/>
+              </a:spcAft>
+            </a:pPr>
+            <a:r>
+              <a:rPr sz="550">
+                <a:solidFill>
+                  <a:srgbClr val="887CD3"/>
+                </a:solidFill>
+                <a:latin typeface="Calibri"/>
+              </a:rPr>
+              <a:t>• </a:t>
+            </a:r>
+            <a:r>
+              <a:rPr sz="550">
+                <a:solidFill>
+                  <a:srgbClr val="FFFFFF"/>
+                </a:solidFill>
+                <a:latin typeface="Calibri"/>
+              </a:rPr>
+              <a:t>Negociação Fasano concluída — formalização em fase final</a:t>
+            </a:r>
+          </a:p>
+        </p:txBody>
+      </p:sp>
+      <p:sp>
+        <p:nvSpPr>
+          <p:cNvPr id="125" name="TextBox 124"/>
+          <p:cNvSpPr txBox="1"/>
+          <p:nvPr/>
+        </p:nvSpPr>
+        <p:spPr>
+          <a:xfrm>
+            <a:off x="5148000" y="9504000"/>
+            <a:ext cx="2304000" cy="144000"/>
+          </a:xfrm>
+          <a:prstGeom prst="rect">
+            <a:avLst/>
+          </a:prstGeom>
+          <a:noFill/>
+        </p:spPr>
+        <p:txBody>
+          <a:bodyPr wrap="none">
+            <a:spAutoFit/>
+          </a:bodyPr>
+          <a:lstStyle/>
+          <a:p/>
+          <a:p>
+            <a:pPr>
+              <a:spcBef>
+                <a:spcPts val="0"/>
+              </a:spcBef>
+              <a:spcAft>
+                <a:spcPts val="100"/>
+              </a:spcAft>
+            </a:pPr>
+            <a:r>
+              <a:rPr sz="500" b="1">
+                <a:solidFill>
+                  <a:srgbClr val="C8A96D"/>
+                </a:solidFill>
+                <a:latin typeface="Calibri"/>
+              </a:rPr>
+              <a:t>PRÓXIMAS ETAPAS</a:t>
+            </a:r>
+          </a:p>
+        </p:txBody>
+      </p:sp>
+      <p:sp>
+        <p:nvSpPr>
+          <p:cNvPr id="126" name="TextBox 125"/>
+          <p:cNvSpPr txBox="1"/>
+          <p:nvPr/>
+        </p:nvSpPr>
+        <p:spPr>
+          <a:xfrm>
+            <a:off x="5148000" y="9648000"/>
+            <a:ext cx="2304000" cy="504000"/>
+          </a:xfrm>
+          <a:prstGeom prst="rect">
+            <a:avLst/>
+          </a:prstGeom>
+          <a:noFill/>
+        </p:spPr>
+        <p:txBody>
+          <a:bodyPr wrap="square">
+            <a:spAutoFit/>
+          </a:bodyPr>
+          <a:lstStyle/>
+          <a:p>
+            <a:pPr>
+              <a:spcBef>
+                <a:spcPts val="0"/>
+              </a:spcBef>
+            </a:pPr>
+          </a:p>
+          <a:p>
+            <a:pPr algn="l">
+              <a:spcBef>
+                <a:spcPts val="150"/>
+              </a:spcBef>
+              <a:spcAft>
+                <a:spcPts val="0"/>
+              </a:spcAft>
+            </a:pPr>
+            <a:r>
+              <a:rPr sz="550">
+                <a:solidFill>
+                  <a:srgbClr val="887CD3"/>
+                </a:solidFill>
+                <a:latin typeface="Calibri"/>
+              </a:rPr>
+              <a:t>• </a:t>
+            </a:r>
+            <a:r>
+              <a:rPr sz="550">
+                <a:solidFill>
+                  <a:srgbClr val="FFFFFF"/>
+                </a:solidFill>
+                <a:latin typeface="Calibri"/>
+              </a:rPr>
+              <a:t>Integralização final do equity — investidor 49%</a:t>
+            </a:r>
+          </a:p>
+          <a:p>
+            <a:pPr algn="l">
+              <a:spcBef>
+                <a:spcPts val="150"/>
+              </a:spcBef>
+              <a:spcAft>
+                <a:spcPts val="0"/>
+              </a:spcAft>
+            </a:pPr>
+            <a:r>
+              <a:rPr sz="550">
+                <a:solidFill>
+                  <a:srgbClr val="887CD3"/>
+                </a:solidFill>
+                <a:latin typeface="Calibri"/>
+              </a:rPr>
+              <a:t>• </a:t>
+            </a:r>
+            <a:r>
+              <a:rPr sz="550">
+                <a:solidFill>
+                  <a:srgbClr val="FFFFFF"/>
+                </a:solidFill>
+                <a:latin typeface="Calibri"/>
+              </a:rPr>
+              <a:t>Estruturação e emissão do CRI (R$ 170MM)</a:t>
+            </a:r>
+          </a:p>
+          <a:p>
+            <a:pPr algn="l">
+              <a:spcBef>
+                <a:spcPts val="150"/>
+              </a:spcBef>
+              <a:spcAft>
+                <a:spcPts val="0"/>
+              </a:spcAft>
+            </a:pPr>
+            <a:r>
+              <a:rPr sz="550">
+                <a:solidFill>
+                  <a:srgbClr val="887CD3"/>
+                </a:solidFill>
+                <a:latin typeface="Calibri"/>
+              </a:rPr>
+              <a:t>• </a:t>
+            </a:r>
+            <a:r>
+              <a:rPr sz="550">
+                <a:solidFill>
+                  <a:srgbClr val="FFFFFF"/>
+                </a:solidFill>
+                <a:latin typeface="Calibri"/>
+              </a:rPr>
+              <a:t>Lançamento Residencial Fase 1 — out/2026</a:t>
+            </a:r>
+          </a:p>
+          <a:p>
+            <a:pPr algn="l">
+              <a:spcBef>
+                <a:spcPts val="150"/>
+              </a:spcBef>
+              <a:spcAft>
+                <a:spcPts val="0"/>
+              </a:spcAft>
+            </a:pPr>
+            <a:r>
+              <a:rPr sz="550">
+                <a:solidFill>
+                  <a:srgbClr val="887CD3"/>
+                </a:solidFill>
+                <a:latin typeface="Calibri"/>
+              </a:rPr>
+              <a:t>• </a:t>
+            </a:r>
+            <a:r>
+              <a:rPr sz="550">
+                <a:solidFill>
+                  <a:srgbClr val="FFFFFF"/>
+                </a:solidFill>
+                <a:latin typeface="Calibri"/>
+              </a:rPr>
+              <a:t>Início obras Hotel + Residencial — out/2026 / abr/2027</a:t>
+            </a:r>
+          </a:p>
+          <a:p>
+            <a:pPr algn="l">
+              <a:spcBef>
+                <a:spcPts val="150"/>
+              </a:spcBef>
+              <a:spcAft>
+                <a:spcPts val="0"/>
+              </a:spcAft>
+            </a:pPr>
+            <a:r>
+              <a:rPr sz="550">
+                <a:solidFill>
+                  <a:srgbClr val="887CD3"/>
+                </a:solidFill>
+                <a:latin typeface="Calibri"/>
+              </a:rPr>
+              <a:t>• </a:t>
+            </a:r>
+            <a:r>
+              <a:rPr sz="550">
+                <a:solidFill>
+                  <a:srgbClr val="FFFFFF"/>
+                </a:solidFill>
+                <a:latin typeface="Calibri"/>
+              </a:rPr>
+              <a:t>Abertura Hotel Fasano — jan/2029</a:t>
+            </a:r>
+          </a:p>
+        </p:txBody>
+      </p:sp>
+      <p:sp>
+        <p:nvSpPr>
+          <p:cNvPr id="127" name="Rectangle 126"/>
+          <p:cNvSpPr/>
+          <p:nvPr/>
+        </p:nvSpPr>
+        <p:spPr>
+          <a:xfrm>
+            <a:off x="0" y="10188000"/>
+            <a:ext cx="7560000" cy="504000"/>
+          </a:xfrm>
+          <a:prstGeom prst="rect">
+            <a:avLst/>
+          </a:prstGeom>
+          <a:solidFill>
+            <a:srgbClr val="201A47"/>
+          </a:solidFill>
+          <a:ln>
+            <a:noFill/>
+          </a:ln>
+        </p:spPr>
+        <p:style>
+          <a:lnRef idx="1">
+            <a:schemeClr val="accent1"/>
+          </a:lnRef>
+          <a:fillRef idx="3">
+            <a:schemeClr val="accent1"/>
+          </a:fillRef>
+          <a:effectRef idx="2">
+            <a:schemeClr val="accent1"/>
+          </a:effectRef>
+          <a:fontRef idx="minor">
+            <a:schemeClr val="lt1"/>
+          </a:fontRef>
+        </p:style>
+        <p:txBody>
+          <a:bodyPr rtlCol="0" anchor="ctr"/>
+          <a:lstStyle/>
+          <a:p>
+            <a:pPr algn="ctr"/>
+          </a:p>
+        </p:txBody>
+      </p:sp>
       <p:pic>
         <p:nvPicPr>
-          <p:cNvPr id="48" name="Picture 47" descr="logo_mb_ib_white.png"/>
+          <p:cNvPr id="128" name="Picture 127" descr="logo_mb_ib_white.png"/>
           <p:cNvPicPr>
             <a:picLocks noChangeAspect="1"/>
           </p:cNvPicPr>
@@ -5134,8 +9550,8 @@
         </p:blipFill>
         <p:spPr>
           <a:xfrm>
-            <a:off x="108000" y="10116000"/>
-            <a:ext cx="720000" cy="504000"/>
+            <a:off x="144000" y="10260000"/>
+            <a:ext cx="792000" cy="360000"/>
           </a:xfrm>
           <a:prstGeom prst="rect">
             <a:avLst/>
@@ -5144,14 +9560,14 @@
       </p:pic>
       <p:sp>
         <p:nvSpPr>
-          <p:cNvPr id="49" name="TextBox 48"/>
+          <p:cNvPr id="129" name="TextBox 128"/>
           <p:cNvSpPr txBox="1"/>
           <p:nvPr/>
         </p:nvSpPr>
         <p:spPr>
           <a:xfrm>
-            <a:off x="936000" y="10116000"/>
-            <a:ext cx="5580000" cy="576000"/>
+            <a:off x="1080000" y="10260000"/>
+            <a:ext cx="5040000" cy="360000"/>
           </a:xfrm>
           <a:prstGeom prst="rect">
             <a:avLst/>
@@ -5164,29 +9580,33 @@
           </a:bodyPr>
           <a:lstStyle/>
           <a:p>
-            <a:pPr algn="ctr"/>
-            <a:r>
-              <a:rPr sz="550" b="0" i="0">
+            <a:pPr>
+              <a:spcBef>
+                <a:spcPts val="0"/>
+              </a:spcBef>
+            </a:pPr>
+            <a:r>
+              <a:rPr sz="450">
                 <a:solidFill>
                   <a:srgbClr val="7F808F"/>
                 </a:solidFill>
                 <a:latin typeface="Calibri"/>
               </a:rPr>
-              <a:t>Material preparado pela Monte Bravo Investimentos para uso exclusivo e confidencial. Este documento não constitui oferta de valores mobiliários. As informações aqui contidas são baseadas em fontes consideradas confiáveis, porém não garantidas. Investimentos envolvem riscos e retornos passados não garantem resultados futuros. Distribuição ou reprodução proibida sem autorização expressa.</a:t>
-            </a:r>
-          </a:p>
-        </p:txBody>
-      </p:sp>
-      <p:sp>
-        <p:nvSpPr>
-          <p:cNvPr id="50" name="TextBox 49"/>
+              <a:t>Material elaborado pela Monte Bravo Investment Banking para fins informativos. Não constitui oferta ou recomendação de investimento. Destinado exclusivamente a investidores qualificados (Res. CVM 30). Informações baseadas em documentos do Grupo Prima. Investimentos em CRI e participações imobiliárias envolvem riscos. Vedada a reprodução sem autorização prévia.</a:t>
+            </a:r>
+          </a:p>
+        </p:txBody>
+      </p:sp>
+      <p:sp>
+        <p:nvSpPr>
+          <p:cNvPr id="130" name="TextBox 129"/>
           <p:cNvSpPr txBox="1"/>
           <p:nvPr/>
         </p:nvSpPr>
         <p:spPr>
           <a:xfrm>
-            <a:off x="6588000" y="10260000"/>
-            <a:ext cx="864000" cy="216000"/>
+            <a:off x="6300000" y="10296000"/>
+            <a:ext cx="1080000" cy="288000"/>
           </a:xfrm>
           <a:prstGeom prst="rect">
             <a:avLst/>
@@ -5194,20 +9614,21 @@
           <a:noFill/>
         </p:spPr>
         <p:txBody>
-          <a:bodyPr wrap="square">
+          <a:bodyPr wrap="none">
             <a:spAutoFit/>
           </a:bodyPr>
           <a:lstStyle/>
           <a:p>
             <a:pPr algn="r"/>
             <a:r>
-              <a:rPr sz="600" b="0" i="0">
-                <a:solidFill>
-                  <a:srgbClr val="C8A96D"/>
-                </a:solidFill>
-                <a:latin typeface="Calibri"/>
-              </a:rPr>
-              <a:t>montebravo.com.br</a:t>
+              <a:rPr sz="500">
+                <a:solidFill>
+                  <a:srgbClr val="7F808F"/>
+                </a:solidFill>
+                <a:latin typeface="Calibri"/>
+              </a:rPr>
+              <a:t>Versão Indicativa
+Março 2026</a:t>
             </a:r>
           </a:p>
         </p:txBody>
